--- a/pitch_deck.pptx
+++ b/pitch_deck.pptx
@@ -3110,7 +3110,52 @@
       <p:grpSpPr/>
       <p:sp>
         <p:nvSpPr>
-          <p:cNvPr id="2" name="TextBox 1"/>
+          <p:cNvPr id="2" name="Oval 1"/>
+          <p:cNvSpPr/>
+          <p:nvPr/>
+        </p:nvSpPr>
+        <p:spPr>
+          <a:xfrm>
+            <a:off x="3346704" y="685800"/>
+            <a:ext cx="5486400" cy="5486400"/>
+          </a:xfrm>
+          <a:prstGeom prst="ellipse">
+            <a:avLst/>
+          </a:prstGeom>
+          <a:solidFill>
+            <a:srgbClr val="0C1423"/>
+          </a:solidFill>
+          <a:ln w="12700">
+            <a:solidFill>
+              <a:srgbClr val="06B6D4"/>
+            </a:solidFill>
+          </a:ln>
+        </p:spPr>
+        <p:style>
+          <a:lnRef idx="1">
+            <a:schemeClr val="accent1"/>
+          </a:lnRef>
+          <a:fillRef idx="3">
+            <a:schemeClr val="accent1"/>
+          </a:fillRef>
+          <a:effectRef idx="2">
+            <a:schemeClr val="accent1"/>
+          </a:effectRef>
+          <a:fontRef idx="minor">
+            <a:schemeClr val="lt1"/>
+          </a:fontRef>
+        </p:style>
+        <p:txBody>
+          <a:bodyPr rtlCol="0" anchor="ctr"/>
+          <a:lstStyle/>
+          <a:p>
+            <a:pPr algn="ctr"/>
+          </a:p>
+        </p:txBody>
+      </p:sp>
+      <p:sp>
+        <p:nvSpPr>
+          <p:cNvPr id="3" name="TextBox 2"/>
           <p:cNvSpPr txBox="1"/>
           <p:nvPr/>
         </p:nvSpPr>
@@ -3130,8 +3175,8 @@
           </a:bodyPr>
           <a:lstStyle/>
           <a:p>
-            <a:pPr>
-              <a:defRPr sz="6400" b="1">
+            <a:pPr algn="ctr">
+              <a:defRPr sz="6000" b="1">
                 <a:solidFill>
                   <a:srgbClr val="06B6D4"/>
                 </a:solidFill>
@@ -3139,15 +3184,15 @@
               </a:defRPr>
             </a:pPr>
             <a:r>
-              <a:t>KumbhForce AI</a:t>
-            </a:r>
-          </a:p>
-          <a:p>
-            <a:pPr>
+              <a:t>KUMBHFORCE AI</a:t>
+            </a:r>
+          </a:p>
+          <a:p>
+            <a:pPr algn="ctr">
               <a:spcBef>
                 <a:spcPts val="1500"/>
               </a:spcBef>
-              <a:defRPr sz="2800" b="1">
+              <a:defRPr sz="2200">
                 <a:solidFill>
                   <a:srgbClr val="F3F4F6"/>
                 </a:solidFill>
@@ -3155,15 +3200,15 @@
               </a:defRPr>
             </a:pPr>
             <a:r>
-              <a:t>Synchronizing Humanity at Scale</a:t>
-            </a:r>
-          </a:p>
-          <a:p>
-            <a:pPr>
+              <a:t>Autonomous Volunteer Command &amp; Spatial Intelligence</a:t>
+            </a:r>
+          </a:p>
+          <a:p>
+            <a:pPr algn="ctr">
               <a:spcBef>
-                <a:spcPts val="3000"/>
+                <a:spcPts val="4000"/>
               </a:spcBef>
-              <a:defRPr sz="1600">
+              <a:defRPr sz="1300">
                 <a:solidFill>
                   <a:srgbClr val="9CA3AF"/>
                 </a:solidFill>
@@ -3171,11 +3216,11 @@
               </a:defRPr>
             </a:pPr>
             <a:r>
-              <a:t>Autonomous Volunteer Command &amp; Operations Intelligence Platform for Mahakumbh</a:t>
+              <a:t>Mahakumbh Staffing War Room</a:t>
             </a:r>
             <a:br/>
             <a:r>
-              <a:t>Presented by: Aditya Pandey</a:t>
+              <a:t>Designed &amp; Built by Aditya Pandey</a:t>
             </a:r>
           </a:p>
         </p:txBody>
@@ -3214,44 +3259,8 @@
         </p:nvSpPr>
         <p:spPr>
           <a:xfrm>
-            <a:off x="685800" y="457200"/>
-            <a:ext cx="10817352" cy="914400"/>
-          </a:xfrm>
-          <a:prstGeom prst="rect">
-            <a:avLst/>
-          </a:prstGeom>
-          <a:noFill/>
-        </p:spPr>
-        <p:txBody>
-          <a:bodyPr wrap="square" lIns="0" tIns="0">
-            <a:spAutoFit/>
-          </a:bodyPr>
-          <a:lstStyle/>
-          <a:p>
-            <a:pPr>
-              <a:defRPr sz="3600" b="1">
-                <a:solidFill>
-                  <a:srgbClr val="06B6D4"/>
-                </a:solidFill>
-                <a:latin typeface="Arial"/>
-              </a:defRPr>
-            </a:pPr>
-            <a:r>
-              <a:t>Operations Decision Assistant (AI Copilot)</a:t>
-            </a:r>
-          </a:p>
-        </p:txBody>
-      </p:sp>
-      <p:sp>
-        <p:nvSpPr>
-          <p:cNvPr id="3" name="TextBox 2"/>
-          <p:cNvSpPr txBox="1"/>
-          <p:nvPr/>
-        </p:nvSpPr>
-        <p:spPr>
-          <a:xfrm>
-            <a:off x="685800" y="1645920"/>
-            <a:ext cx="10817352" cy="4389120"/>
+            <a:off x="685800" y="365760"/>
+            <a:ext cx="10817352" cy="365760"/>
           </a:xfrm>
           <a:prstGeom prst="rect">
             <a:avLst/>
@@ -3265,10 +3274,43 @@
           <a:lstStyle/>
           <a:p>
             <a:pPr>
-              <a:spcAft>
-                <a:spcPts val="2000"/>
-              </a:spcAft>
-              <a:defRPr sz="2000">
+              <a:defRPr sz="1000" b="1">
+                <a:solidFill>
+                  <a:srgbClr val="06B6D4"/>
+                </a:solidFill>
+                <a:latin typeface="Arial"/>
+              </a:defRPr>
+            </a:pPr>
+            <a:r>
+              <a:t>TELEMETRY TRIGGER TO RESOLUTION TRACK</a:t>
+            </a:r>
+          </a:p>
+        </p:txBody>
+      </p:sp>
+      <p:sp>
+        <p:nvSpPr>
+          <p:cNvPr id="3" name="TextBox 2"/>
+          <p:cNvSpPr txBox="1"/>
+          <p:nvPr/>
+        </p:nvSpPr>
+        <p:spPr>
+          <a:xfrm>
+            <a:off x="685800" y="640080"/>
+            <a:ext cx="10817352" cy="731520"/>
+          </a:xfrm>
+          <a:prstGeom prst="rect">
+            <a:avLst/>
+          </a:prstGeom>
+          <a:noFill/>
+        </p:spPr>
+        <p:txBody>
+          <a:bodyPr wrap="square">
+            <a:spAutoFit/>
+          </a:bodyPr>
+          <a:lstStyle/>
+          <a:p>
+            <a:pPr>
+              <a:defRPr sz="2800" b="1">
                 <a:solidFill>
                   <a:srgbClr val="F3F4F6"/>
                 </a:solidFill>
@@ -3276,39 +3318,534 @@
               </a:defRPr>
             </a:pPr>
             <a:r>
-              <a:t>• Natural Language Queries: Command queries resolved instantly with database citations.</a:t>
-            </a:r>
-          </a:p>
-          <a:p>
-            <a:pPr>
-              <a:spcAft>
-                <a:spcPts val="2000"/>
-              </a:spcAft>
-              <a:defRPr sz="2000">
-                <a:solidFill>
-                  <a:srgbClr val="F3F4F6"/>
-                </a:solidFill>
-                <a:latin typeface="Arial"/>
-              </a:defRPr>
-            </a:pPr>
-            <a:r>
-              <a:t>• SLA Analysis Headers: Confidence score, estimated response time, and impact metrics.</a:t>
-            </a:r>
-          </a:p>
-          <a:p>
-            <a:pPr>
-              <a:spcAft>
-                <a:spcPts val="2000"/>
-              </a:spcAft>
-              <a:defRPr sz="2000">
-                <a:solidFill>
-                  <a:srgbClr val="F3F4F6"/>
-                </a:solidFill>
-                <a:latin typeface="Arial"/>
-              </a:defRPr>
-            </a:pPr>
-            <a:r>
-              <a:t>• Executable CTAs: Actionable buttons linked directly to dispatches and map views.</a:t>
+              <a:t>Incident Response Journey Flow</a:t>
+            </a:r>
+          </a:p>
+        </p:txBody>
+      </p:sp>
+      <p:sp>
+        <p:nvSpPr>
+          <p:cNvPr id="4" name="Rectangle 3"/>
+          <p:cNvSpPr/>
+          <p:nvPr/>
+        </p:nvSpPr>
+        <p:spPr>
+          <a:xfrm>
+            <a:off x="685800" y="2377440"/>
+            <a:ext cx="2011680" cy="3200400"/>
+          </a:xfrm>
+          <a:prstGeom prst="rect">
+            <a:avLst/>
+          </a:prstGeom>
+          <a:solidFill>
+            <a:srgbClr val="111827"/>
+          </a:solidFill>
+          <a:ln w="19050">
+            <a:solidFill>
+              <a:srgbClr val="06B6D4"/>
+            </a:solidFill>
+          </a:ln>
+        </p:spPr>
+        <p:style>
+          <a:lnRef idx="1">
+            <a:schemeClr val="accent1"/>
+          </a:lnRef>
+          <a:fillRef idx="3">
+            <a:schemeClr val="accent1"/>
+          </a:fillRef>
+          <a:effectRef idx="2">
+            <a:schemeClr val="accent1"/>
+          </a:effectRef>
+          <a:fontRef idx="minor">
+            <a:schemeClr val="lt1"/>
+          </a:fontRef>
+        </p:style>
+        <p:txBody>
+          <a:bodyPr rtlCol="0" anchor="ctr" wrap="square"/>
+          <a:lstStyle/>
+          <a:p>
+            <a:pPr algn="ctr">
+              <a:defRPr sz="1600" b="1">
+                <a:solidFill>
+                  <a:srgbClr val="06B6D4"/>
+                </a:solidFill>
+                <a:latin typeface="Arial"/>
+              </a:defRPr>
+            </a:pPr>
+            <a:r>
+              <a:t>1. Alert</a:t>
+            </a:r>
+          </a:p>
+          <a:p>
+            <a:pPr>
+              <a:spcBef>
+                <a:spcPts val="1500"/>
+              </a:spcBef>
+              <a:defRPr sz="1100">
+                <a:solidFill>
+                  <a:srgbClr val="9CA3AF"/>
+                </a:solidFill>
+                <a:latin typeface="Arial"/>
+              </a:defRPr>
+            </a:pPr>
+            <a:r>
+              <a:t>Critical triage ticket generated at S-02.</a:t>
+            </a:r>
+          </a:p>
+        </p:txBody>
+      </p:sp>
+      <p:sp>
+        <p:nvSpPr>
+          <p:cNvPr id="5" name="Right Arrow 4"/>
+          <p:cNvSpPr/>
+          <p:nvPr/>
+        </p:nvSpPr>
+        <p:spPr>
+          <a:xfrm>
+            <a:off x="2697480" y="3749039"/>
+            <a:ext cx="182880" cy="365760"/>
+          </a:xfrm>
+          <a:prstGeom prst="rightArrow">
+            <a:avLst/>
+          </a:prstGeom>
+          <a:solidFill>
+            <a:srgbClr val="06B6D4"/>
+          </a:solidFill>
+          <a:ln>
+            <a:noFill/>
+          </a:ln>
+        </p:spPr>
+        <p:style>
+          <a:lnRef idx="1">
+            <a:schemeClr val="accent1"/>
+          </a:lnRef>
+          <a:fillRef idx="3">
+            <a:schemeClr val="accent1"/>
+          </a:fillRef>
+          <a:effectRef idx="2">
+            <a:schemeClr val="accent1"/>
+          </a:effectRef>
+          <a:fontRef idx="minor">
+            <a:schemeClr val="lt1"/>
+          </a:fontRef>
+        </p:style>
+        <p:txBody>
+          <a:bodyPr rtlCol="0" anchor="ctr"/>
+          <a:lstStyle/>
+          <a:p>
+            <a:pPr algn="ctr"/>
+          </a:p>
+        </p:txBody>
+      </p:sp>
+      <p:sp>
+        <p:nvSpPr>
+          <p:cNvPr id="6" name="Rectangle 5"/>
+          <p:cNvSpPr/>
+          <p:nvPr/>
+        </p:nvSpPr>
+        <p:spPr>
+          <a:xfrm>
+            <a:off x="2880360" y="2377440"/>
+            <a:ext cx="2011680" cy="3200400"/>
+          </a:xfrm>
+          <a:prstGeom prst="rect">
+            <a:avLst/>
+          </a:prstGeom>
+          <a:solidFill>
+            <a:srgbClr val="111827"/>
+          </a:solidFill>
+          <a:ln w="19050">
+            <a:solidFill>
+              <a:srgbClr val="06B6D4"/>
+            </a:solidFill>
+          </a:ln>
+        </p:spPr>
+        <p:style>
+          <a:lnRef idx="1">
+            <a:schemeClr val="accent1"/>
+          </a:lnRef>
+          <a:fillRef idx="3">
+            <a:schemeClr val="accent1"/>
+          </a:fillRef>
+          <a:effectRef idx="2">
+            <a:schemeClr val="accent1"/>
+          </a:effectRef>
+          <a:fontRef idx="minor">
+            <a:schemeClr val="lt1"/>
+          </a:fontRef>
+        </p:style>
+        <p:txBody>
+          <a:bodyPr rtlCol="0" anchor="ctr" wrap="square"/>
+          <a:lstStyle/>
+          <a:p>
+            <a:pPr algn="ctr">
+              <a:defRPr sz="1600" b="1">
+                <a:solidFill>
+                  <a:srgbClr val="06B6D4"/>
+                </a:solidFill>
+                <a:latin typeface="Arial"/>
+              </a:defRPr>
+            </a:pPr>
+            <a:r>
+              <a:t>2. Analysis</a:t>
+            </a:r>
+          </a:p>
+          <a:p>
+            <a:pPr>
+              <a:spcBef>
+                <a:spcPts val="1500"/>
+              </a:spcBef>
+              <a:defRPr sz="1100">
+                <a:solidFill>
+                  <a:srgbClr val="9CA3AF"/>
+                </a:solidFill>
+                <a:latin typeface="Arial"/>
+              </a:defRPr>
+            </a:pPr>
+            <a:r>
+              <a:t>Threat index assessed, SLA target: 4.5m.</a:t>
+            </a:r>
+          </a:p>
+        </p:txBody>
+      </p:sp>
+      <p:sp>
+        <p:nvSpPr>
+          <p:cNvPr id="7" name="Right Arrow 6"/>
+          <p:cNvSpPr/>
+          <p:nvPr/>
+        </p:nvSpPr>
+        <p:spPr>
+          <a:xfrm>
+            <a:off x="4892040" y="3749039"/>
+            <a:ext cx="182880" cy="365760"/>
+          </a:xfrm>
+          <a:prstGeom prst="rightArrow">
+            <a:avLst/>
+          </a:prstGeom>
+          <a:solidFill>
+            <a:srgbClr val="06B6D4"/>
+          </a:solidFill>
+          <a:ln>
+            <a:noFill/>
+          </a:ln>
+        </p:spPr>
+        <p:style>
+          <a:lnRef idx="1">
+            <a:schemeClr val="accent1"/>
+          </a:lnRef>
+          <a:fillRef idx="3">
+            <a:schemeClr val="accent1"/>
+          </a:fillRef>
+          <a:effectRef idx="2">
+            <a:schemeClr val="accent1"/>
+          </a:effectRef>
+          <a:fontRef idx="minor">
+            <a:schemeClr val="lt1"/>
+          </a:fontRef>
+        </p:style>
+        <p:txBody>
+          <a:bodyPr rtlCol="0" anchor="ctr"/>
+          <a:lstStyle/>
+          <a:p>
+            <a:pPr algn="ctr"/>
+          </a:p>
+        </p:txBody>
+      </p:sp>
+      <p:sp>
+        <p:nvSpPr>
+          <p:cNvPr id="8" name="Rectangle 7"/>
+          <p:cNvSpPr/>
+          <p:nvPr/>
+        </p:nvSpPr>
+        <p:spPr>
+          <a:xfrm>
+            <a:off x="5074920" y="2377440"/>
+            <a:ext cx="2011680" cy="3200400"/>
+          </a:xfrm>
+          <a:prstGeom prst="rect">
+            <a:avLst/>
+          </a:prstGeom>
+          <a:solidFill>
+            <a:srgbClr val="111827"/>
+          </a:solidFill>
+          <a:ln w="19050">
+            <a:solidFill>
+              <a:srgbClr val="06B6D4"/>
+            </a:solidFill>
+          </a:ln>
+        </p:spPr>
+        <p:style>
+          <a:lnRef idx="1">
+            <a:schemeClr val="accent1"/>
+          </a:lnRef>
+          <a:fillRef idx="3">
+            <a:schemeClr val="accent1"/>
+          </a:fillRef>
+          <a:effectRef idx="2">
+            <a:schemeClr val="accent1"/>
+          </a:effectRef>
+          <a:fontRef idx="minor">
+            <a:schemeClr val="lt1"/>
+          </a:fontRef>
+        </p:style>
+        <p:txBody>
+          <a:bodyPr rtlCol="0" anchor="ctr" wrap="square"/>
+          <a:lstStyle/>
+          <a:p>
+            <a:pPr algn="ctr">
+              <a:defRPr sz="1600" b="1">
+                <a:solidFill>
+                  <a:srgbClr val="06B6D4"/>
+                </a:solidFill>
+                <a:latin typeface="Arial"/>
+              </a:defRPr>
+            </a:pPr>
+            <a:r>
+              <a:t>3. Match</a:t>
+            </a:r>
+          </a:p>
+          <a:p>
+            <a:pPr>
+              <a:spcBef>
+                <a:spcPts val="1500"/>
+              </a:spcBef>
+              <a:defRPr sz="1100">
+                <a:solidFill>
+                  <a:srgbClr val="9CA3AF"/>
+                </a:solidFill>
+                <a:latin typeface="Arial"/>
+              </a:defRPr>
+            </a:pPr>
+            <a:r>
+              <a:t>Solver selects रोहित कुमार (First aid certified).</a:t>
+            </a:r>
+          </a:p>
+        </p:txBody>
+      </p:sp>
+      <p:sp>
+        <p:nvSpPr>
+          <p:cNvPr id="9" name="Right Arrow 8"/>
+          <p:cNvSpPr/>
+          <p:nvPr/>
+        </p:nvSpPr>
+        <p:spPr>
+          <a:xfrm>
+            <a:off x="7086600" y="3749039"/>
+            <a:ext cx="182880" cy="365760"/>
+          </a:xfrm>
+          <a:prstGeom prst="rightArrow">
+            <a:avLst/>
+          </a:prstGeom>
+          <a:solidFill>
+            <a:srgbClr val="06B6D4"/>
+          </a:solidFill>
+          <a:ln>
+            <a:noFill/>
+          </a:ln>
+        </p:spPr>
+        <p:style>
+          <a:lnRef idx="1">
+            <a:schemeClr val="accent1"/>
+          </a:lnRef>
+          <a:fillRef idx="3">
+            <a:schemeClr val="accent1"/>
+          </a:fillRef>
+          <a:effectRef idx="2">
+            <a:schemeClr val="accent1"/>
+          </a:effectRef>
+          <a:fontRef idx="minor">
+            <a:schemeClr val="lt1"/>
+          </a:fontRef>
+        </p:style>
+        <p:txBody>
+          <a:bodyPr rtlCol="0" anchor="ctr"/>
+          <a:lstStyle/>
+          <a:p>
+            <a:pPr algn="ctr"/>
+          </a:p>
+        </p:txBody>
+      </p:sp>
+      <p:sp>
+        <p:nvSpPr>
+          <p:cNvPr id="10" name="Rectangle 9"/>
+          <p:cNvSpPr/>
+          <p:nvPr/>
+        </p:nvSpPr>
+        <p:spPr>
+          <a:xfrm>
+            <a:off x="7269479" y="2377440"/>
+            <a:ext cx="2011680" cy="3200400"/>
+          </a:xfrm>
+          <a:prstGeom prst="rect">
+            <a:avLst/>
+          </a:prstGeom>
+          <a:solidFill>
+            <a:srgbClr val="111827"/>
+          </a:solidFill>
+          <a:ln w="19050">
+            <a:solidFill>
+              <a:srgbClr val="06B6D4"/>
+            </a:solidFill>
+          </a:ln>
+        </p:spPr>
+        <p:style>
+          <a:lnRef idx="1">
+            <a:schemeClr val="accent1"/>
+          </a:lnRef>
+          <a:fillRef idx="3">
+            <a:schemeClr val="accent1"/>
+          </a:fillRef>
+          <a:effectRef idx="2">
+            <a:schemeClr val="accent1"/>
+          </a:effectRef>
+          <a:fontRef idx="minor">
+            <a:schemeClr val="lt1"/>
+          </a:fontRef>
+        </p:style>
+        <p:txBody>
+          <a:bodyPr rtlCol="0" anchor="ctr" wrap="square"/>
+          <a:lstStyle/>
+          <a:p>
+            <a:pPr algn="ctr">
+              <a:defRPr sz="1600" b="1">
+                <a:solidFill>
+                  <a:srgbClr val="06B6D4"/>
+                </a:solidFill>
+                <a:latin typeface="Arial"/>
+              </a:defRPr>
+            </a:pPr>
+            <a:r>
+              <a:t>4. Dispatch</a:t>
+            </a:r>
+          </a:p>
+          <a:p>
+            <a:pPr>
+              <a:spcBef>
+                <a:spcPts val="1500"/>
+              </a:spcBef>
+              <a:defRPr sz="1100">
+                <a:solidFill>
+                  <a:srgbClr val="9CA3AF"/>
+                </a:solidFill>
+                <a:latin typeface="Arial"/>
+              </a:defRPr>
+            </a:pPr>
+            <a:r>
+              <a:t>One-click authorization routing command.</a:t>
+            </a:r>
+          </a:p>
+        </p:txBody>
+      </p:sp>
+      <p:sp>
+        <p:nvSpPr>
+          <p:cNvPr id="11" name="Right Arrow 10"/>
+          <p:cNvSpPr/>
+          <p:nvPr/>
+        </p:nvSpPr>
+        <p:spPr>
+          <a:xfrm>
+            <a:off x="9281159" y="3749039"/>
+            <a:ext cx="182880" cy="365760"/>
+          </a:xfrm>
+          <a:prstGeom prst="rightArrow">
+            <a:avLst/>
+          </a:prstGeom>
+          <a:solidFill>
+            <a:srgbClr val="06B6D4"/>
+          </a:solidFill>
+          <a:ln>
+            <a:noFill/>
+          </a:ln>
+        </p:spPr>
+        <p:style>
+          <a:lnRef idx="1">
+            <a:schemeClr val="accent1"/>
+          </a:lnRef>
+          <a:fillRef idx="3">
+            <a:schemeClr val="accent1"/>
+          </a:fillRef>
+          <a:effectRef idx="2">
+            <a:schemeClr val="accent1"/>
+          </a:effectRef>
+          <a:fontRef idx="minor">
+            <a:schemeClr val="lt1"/>
+          </a:fontRef>
+        </p:style>
+        <p:txBody>
+          <a:bodyPr rtlCol="0" anchor="ctr"/>
+          <a:lstStyle/>
+          <a:p>
+            <a:pPr algn="ctr"/>
+          </a:p>
+        </p:txBody>
+      </p:sp>
+      <p:sp>
+        <p:nvSpPr>
+          <p:cNvPr id="12" name="Rectangle 11"/>
+          <p:cNvSpPr/>
+          <p:nvPr/>
+        </p:nvSpPr>
+        <p:spPr>
+          <a:xfrm>
+            <a:off x="9464040" y="2377440"/>
+            <a:ext cx="2011680" cy="3200400"/>
+          </a:xfrm>
+          <a:prstGeom prst="rect">
+            <a:avLst/>
+          </a:prstGeom>
+          <a:solidFill>
+            <a:srgbClr val="111827"/>
+          </a:solidFill>
+          <a:ln w="19050">
+            <a:solidFill>
+              <a:srgbClr val="10B981"/>
+            </a:solidFill>
+          </a:ln>
+        </p:spPr>
+        <p:style>
+          <a:lnRef idx="1">
+            <a:schemeClr val="accent1"/>
+          </a:lnRef>
+          <a:fillRef idx="3">
+            <a:schemeClr val="accent1"/>
+          </a:fillRef>
+          <a:effectRef idx="2">
+            <a:schemeClr val="accent1"/>
+          </a:effectRef>
+          <a:fontRef idx="minor">
+            <a:schemeClr val="lt1"/>
+          </a:fontRef>
+        </p:style>
+        <p:txBody>
+          <a:bodyPr rtlCol="0" anchor="ctr" wrap="square"/>
+          <a:lstStyle/>
+          <a:p>
+            <a:pPr algn="ctr">
+              <a:defRPr sz="1600" b="1">
+                <a:solidFill>
+                  <a:srgbClr val="10B981"/>
+                </a:solidFill>
+                <a:latin typeface="Arial"/>
+              </a:defRPr>
+            </a:pPr>
+            <a:r>
+              <a:t>5. Done</a:t>
+            </a:r>
+          </a:p>
+          <a:p>
+            <a:pPr>
+              <a:spcBef>
+                <a:spcPts val="1500"/>
+              </a:spcBef>
+              <a:defRPr sz="1100">
+                <a:solidFill>
+                  <a:srgbClr val="9CA3AF"/>
+                </a:solidFill>
+                <a:latin typeface="Arial"/>
+              </a:defRPr>
+            </a:pPr>
+            <a:r>
+              <a:t>Incident resolved within 3.8 minutes.</a:t>
             </a:r>
           </a:p>
         </p:txBody>
@@ -3347,44 +3884,8 @@
         </p:nvSpPr>
         <p:spPr>
           <a:xfrm>
-            <a:off x="685800" y="457200"/>
-            <a:ext cx="10817352" cy="914400"/>
-          </a:xfrm>
-          <a:prstGeom prst="rect">
-            <a:avLst/>
-          </a:prstGeom>
-          <a:noFill/>
-        </p:spPr>
-        <p:txBody>
-          <a:bodyPr wrap="square" lIns="0" tIns="0">
-            <a:spAutoFit/>
-          </a:bodyPr>
-          <a:lstStyle/>
-          <a:p>
-            <a:pPr>
-              <a:defRPr sz="3600" b="1">
-                <a:solidFill>
-                  <a:srgbClr val="06B6D4"/>
-                </a:solidFill>
-                <a:latin typeface="Arial"/>
-              </a:defRPr>
-            </a:pPr>
-            <a:r>
-              <a:t>Projected Operational Outcomes</a:t>
-            </a:r>
-          </a:p>
-        </p:txBody>
-      </p:sp>
-      <p:sp>
-        <p:nvSpPr>
-          <p:cNvPr id="3" name="TextBox 2"/>
-          <p:cNvSpPr txBox="1"/>
-          <p:nvPr/>
-        </p:nvSpPr>
-        <p:spPr>
-          <a:xfrm>
-            <a:off x="685800" y="1645920"/>
-            <a:ext cx="10817352" cy="4389120"/>
+            <a:off x="685800" y="365760"/>
+            <a:ext cx="10817352" cy="365760"/>
           </a:xfrm>
           <a:prstGeom prst="rect">
             <a:avLst/>
@@ -3398,10 +3899,43 @@
           <a:lstStyle/>
           <a:p>
             <a:pPr>
-              <a:spcAft>
-                <a:spcPts val="2000"/>
-              </a:spcAft>
-              <a:defRPr sz="2000">
+              <a:defRPr sz="1000" b="1">
+                <a:solidFill>
+                  <a:srgbClr val="06B6D4"/>
+                </a:solidFill>
+                <a:latin typeface="Arial"/>
+              </a:defRPr>
+            </a:pPr>
+            <a:r>
+              <a:t>MULTI-CLOUD DEPLOYMENT ARCHITECTURE</a:t>
+            </a:r>
+          </a:p>
+        </p:txBody>
+      </p:sp>
+      <p:sp>
+        <p:nvSpPr>
+          <p:cNvPr id="3" name="TextBox 2"/>
+          <p:cNvSpPr txBox="1"/>
+          <p:nvPr/>
+        </p:nvSpPr>
+        <p:spPr>
+          <a:xfrm>
+            <a:off x="685800" y="640080"/>
+            <a:ext cx="10817352" cy="731520"/>
+          </a:xfrm>
+          <a:prstGeom prst="rect">
+            <a:avLst/>
+          </a:prstGeom>
+          <a:noFill/>
+        </p:spPr>
+        <p:txBody>
+          <a:bodyPr wrap="square">
+            <a:spAutoFit/>
+          </a:bodyPr>
+          <a:lstStyle/>
+          <a:p>
+            <a:pPr>
+              <a:defRPr sz="2800" b="1">
                 <a:solidFill>
                   <a:srgbClr val="F3F4F6"/>
                 </a:solidFill>
@@ -3409,15 +3943,70 @@
               </a:defRPr>
             </a:pPr>
             <a:r>
-              <a:t>• Placement Rates: Volunteer deployment success increased from 62% to 94%.</a:t>
-            </a:r>
-          </a:p>
-          <a:p>
-            <a:pPr>
-              <a:spcAft>
-                <a:spcPts val="2000"/>
-              </a:spcAft>
-              <a:defRPr sz="2000">
+              <a:t>Infrastructure &amp; Live Production Stack</a:t>
+            </a:r>
+          </a:p>
+        </p:txBody>
+      </p:sp>
+      <p:sp>
+        <p:nvSpPr>
+          <p:cNvPr id="4" name="Rectangle 3"/>
+          <p:cNvSpPr/>
+          <p:nvPr/>
+        </p:nvSpPr>
+        <p:spPr>
+          <a:xfrm>
+            <a:off x="685800" y="2011680"/>
+            <a:ext cx="2468880" cy="4114800"/>
+          </a:xfrm>
+          <a:prstGeom prst="rect">
+            <a:avLst/>
+          </a:prstGeom>
+          <a:solidFill>
+            <a:srgbClr val="111827"/>
+          </a:solidFill>
+          <a:ln w="25400">
+            <a:solidFill>
+              <a:srgbClr val="06B6D4"/>
+            </a:solidFill>
+          </a:ln>
+        </p:spPr>
+        <p:style>
+          <a:lnRef idx="1">
+            <a:schemeClr val="accent1"/>
+          </a:lnRef>
+          <a:fillRef idx="3">
+            <a:schemeClr val="accent1"/>
+          </a:fillRef>
+          <a:effectRef idx="2">
+            <a:schemeClr val="accent1"/>
+          </a:effectRef>
+          <a:fontRef idx="minor">
+            <a:schemeClr val="lt1"/>
+          </a:fontRef>
+        </p:style>
+        <p:txBody>
+          <a:bodyPr rtlCol="0" anchor="ctr" wrap="square"/>
+          <a:lstStyle/>
+          <a:p>
+            <a:pPr algn="ctr">
+              <a:defRPr sz="1100" b="1">
+                <a:solidFill>
+                  <a:srgbClr val="06B6D4"/>
+                </a:solidFill>
+                <a:latin typeface="Arial"/>
+              </a:defRPr>
+            </a:pPr>
+            <a:r>
+              <a:t>FRONTEND</a:t>
+            </a:r>
+          </a:p>
+          <a:p>
+            <a:pPr>
+              <a:spcBef>
+                <a:spcPts val="1000"/>
+              </a:spcBef>
+              <a:defRPr sz="2000" b="1">
                 <a:solidFill>
                   <a:srgbClr val="F3F4F6"/>
                 </a:solidFill>
@@ -3425,15 +4014,98 @@
               </a:defRPr>
             </a:pPr>
             <a:r>
-              <a:t>• Response Latency: Average dispatch latency reduced from 14.5 minutes to 6.2 minutes (-57%).</a:t>
-            </a:r>
-          </a:p>
-          <a:p>
-            <a:pPr>
-              <a:spcAft>
-                <a:spcPts val="2000"/>
-              </a:spcAft>
-              <a:defRPr sz="2000">
+              <a:t>Vercel Cloud</a:t>
+            </a:r>
+          </a:p>
+          <a:p>
+            <a:pPr>
+              <a:spcBef>
+                <a:spcPts val="1500"/>
+              </a:spcBef>
+              <a:defRPr sz="1100">
+                <a:solidFill>
+                  <a:srgbClr val="9CA3AF"/>
+                </a:solidFill>
+                <a:latin typeface="Arial"/>
+              </a:defRPr>
+            </a:pPr>
+            <a:r>
+              <a:t>Next.js 15 app router</a:t>
+            </a:r>
+            <a:br/>
+            <a:r>
+              <a:t>Tailwind CSS styling</a:t>
+            </a:r>
+            <a:br/>
+            <a:r>
+              <a:t>Header status badges</a:t>
+            </a:r>
+            <a:br/>
+            <a:r>
+              <a:t>Offline fallbacks</a:t>
+            </a:r>
+          </a:p>
+        </p:txBody>
+      </p:sp>
+      <p:sp>
+        <p:nvSpPr>
+          <p:cNvPr id="5" name="Rectangle 4"/>
+          <p:cNvSpPr/>
+          <p:nvPr/>
+        </p:nvSpPr>
+        <p:spPr>
+          <a:xfrm>
+            <a:off x="3429000" y="2011680"/>
+            <a:ext cx="2468880" cy="4114800"/>
+          </a:xfrm>
+          <a:prstGeom prst="rect">
+            <a:avLst/>
+          </a:prstGeom>
+          <a:solidFill>
+            <a:srgbClr val="111827"/>
+          </a:solidFill>
+          <a:ln w="25400">
+            <a:solidFill>
+              <a:srgbClr val="06B6D4"/>
+            </a:solidFill>
+          </a:ln>
+        </p:spPr>
+        <p:style>
+          <a:lnRef idx="1">
+            <a:schemeClr val="accent1"/>
+          </a:lnRef>
+          <a:fillRef idx="3">
+            <a:schemeClr val="accent1"/>
+          </a:fillRef>
+          <a:effectRef idx="2">
+            <a:schemeClr val="accent1"/>
+          </a:effectRef>
+          <a:fontRef idx="minor">
+            <a:schemeClr val="lt1"/>
+          </a:fontRef>
+        </p:style>
+        <p:txBody>
+          <a:bodyPr rtlCol="0" anchor="ctr" wrap="square"/>
+          <a:lstStyle/>
+          <a:p>
+            <a:pPr algn="ctr">
+              <a:defRPr sz="1100" b="1">
+                <a:solidFill>
+                  <a:srgbClr val="06B6D4"/>
+                </a:solidFill>
+                <a:latin typeface="Arial"/>
+              </a:defRPr>
+            </a:pPr>
+            <a:r>
+              <a:t>BACKEND</a:t>
+            </a:r>
+          </a:p>
+          <a:p>
+            <a:pPr>
+              <a:spcBef>
+                <a:spcPts val="1000"/>
+              </a:spcBef>
+              <a:defRPr sz="2000" b="1">
                 <a:solidFill>
                   <a:srgbClr val="F3F4F6"/>
                 </a:solidFill>
@@ -3441,15 +4113,98 @@
               </a:defRPr>
             </a:pPr>
             <a:r>
-              <a:t>• Safety Gaps: Floodplain safety coverage raised from 71% to 95%.</a:t>
-            </a:r>
-          </a:p>
-          <a:p>
-            <a:pPr>
-              <a:spcAft>
-                <a:spcPts val="2000"/>
-              </a:spcAft>
-              <a:defRPr sz="2000">
+              <a:t>Render Cloud</a:t>
+            </a:r>
+          </a:p>
+          <a:p>
+            <a:pPr>
+              <a:spcBef>
+                <a:spcPts val="1500"/>
+              </a:spcBef>
+              <a:defRPr sz="1100">
+                <a:solidFill>
+                  <a:srgbClr val="9CA3AF"/>
+                </a:solidFill>
+                <a:latin typeface="Arial"/>
+              </a:defRPr>
+            </a:pPr>
+            <a:r>
+              <a:t>FastAPI Python ASGI</a:t>
+            </a:r>
+            <a:br/>
+            <a:r>
+              <a:t>Uvicorn startup engine</a:t>
+            </a:r>
+            <a:br/>
+            <a:r>
+              <a:t>Auto-deploy hooks</a:t>
+            </a:r>
+            <a:br/>
+            <a:r>
+              <a:t>Official /health monitor</a:t>
+            </a:r>
+          </a:p>
+        </p:txBody>
+      </p:sp>
+      <p:sp>
+        <p:nvSpPr>
+          <p:cNvPr id="6" name="Rectangle 5"/>
+          <p:cNvSpPr/>
+          <p:nvPr/>
+        </p:nvSpPr>
+        <p:spPr>
+          <a:xfrm>
+            <a:off x="6172200" y="2011680"/>
+            <a:ext cx="2468880" cy="4114800"/>
+          </a:xfrm>
+          <a:prstGeom prst="rect">
+            <a:avLst/>
+          </a:prstGeom>
+          <a:solidFill>
+            <a:srgbClr val="111827"/>
+          </a:solidFill>
+          <a:ln w="25400">
+            <a:solidFill>
+              <a:srgbClr val="06B6D4"/>
+            </a:solidFill>
+          </a:ln>
+        </p:spPr>
+        <p:style>
+          <a:lnRef idx="1">
+            <a:schemeClr val="accent1"/>
+          </a:lnRef>
+          <a:fillRef idx="3">
+            <a:schemeClr val="accent1"/>
+          </a:fillRef>
+          <a:effectRef idx="2">
+            <a:schemeClr val="accent1"/>
+          </a:effectRef>
+          <a:fontRef idx="minor">
+            <a:schemeClr val="lt1"/>
+          </a:fontRef>
+        </p:style>
+        <p:txBody>
+          <a:bodyPr rtlCol="0" anchor="ctr" wrap="square"/>
+          <a:lstStyle/>
+          <a:p>
+            <a:pPr algn="ctr">
+              <a:defRPr sz="1100" b="1">
+                <a:solidFill>
+                  <a:srgbClr val="06B6D4"/>
+                </a:solidFill>
+                <a:latin typeface="Arial"/>
+              </a:defRPr>
+            </a:pPr>
+            <a:r>
+              <a:t>DATABASE</a:t>
+            </a:r>
+          </a:p>
+          <a:p>
+            <a:pPr>
+              <a:spcBef>
+                <a:spcPts val="1000"/>
+              </a:spcBef>
+              <a:defRPr sz="2000" b="1">
                 <a:solidFill>
                   <a:srgbClr val="F3F4F6"/>
                 </a:solidFill>
@@ -3457,7 +4212,134 @@
               </a:defRPr>
             </a:pPr>
             <a:r>
-              <a:t>• Crowd Bottlenecks: Projected crowd surge risks decreased by 46% across target checkpoints.</a:t>
+              <a:t>SQLite Layer</a:t>
+            </a:r>
+          </a:p>
+          <a:p>
+            <a:pPr>
+              <a:spcBef>
+                <a:spcPts val="1500"/>
+              </a:spcBef>
+              <a:defRPr sz="1100">
+                <a:solidFill>
+                  <a:srgbClr val="9CA3AF"/>
+                </a:solidFill>
+                <a:latin typeface="Arial"/>
+              </a:defRPr>
+            </a:pPr>
+            <a:r>
+              <a:t>Auto schema generator</a:t>
+            </a:r>
+            <a:br/>
+            <a:r>
+              <a:t>SQLAlchemy ORM</a:t>
+            </a:r>
+            <a:br/>
+            <a:r>
+              <a:t>Incident metrics tables</a:t>
+            </a:r>
+            <a:br/>
+            <a:r>
+              <a:t>User registry store</a:t>
+            </a:r>
+          </a:p>
+        </p:txBody>
+      </p:sp>
+      <p:sp>
+        <p:nvSpPr>
+          <p:cNvPr id="7" name="Rectangle 6"/>
+          <p:cNvSpPr/>
+          <p:nvPr/>
+        </p:nvSpPr>
+        <p:spPr>
+          <a:xfrm>
+            <a:off x="8915400" y="2011680"/>
+            <a:ext cx="2468880" cy="4114800"/>
+          </a:xfrm>
+          <a:prstGeom prst="rect">
+            <a:avLst/>
+          </a:prstGeom>
+          <a:solidFill>
+            <a:srgbClr val="111827"/>
+          </a:solidFill>
+          <a:ln w="25400">
+            <a:solidFill>
+              <a:srgbClr val="10B981"/>
+            </a:solidFill>
+          </a:ln>
+        </p:spPr>
+        <p:style>
+          <a:lnRef idx="1">
+            <a:schemeClr val="accent1"/>
+          </a:lnRef>
+          <a:fillRef idx="3">
+            <a:schemeClr val="accent1"/>
+          </a:fillRef>
+          <a:effectRef idx="2">
+            <a:schemeClr val="accent1"/>
+          </a:effectRef>
+          <a:fontRef idx="minor">
+            <a:schemeClr val="lt1"/>
+          </a:fontRef>
+        </p:style>
+        <p:txBody>
+          <a:bodyPr rtlCol="0" anchor="ctr" wrap="square"/>
+          <a:lstStyle/>
+          <a:p>
+            <a:pPr algn="ctr">
+              <a:defRPr sz="1100" b="1">
+                <a:solidFill>
+                  <a:srgbClr val="10B981"/>
+                </a:solidFill>
+                <a:latin typeface="Arial"/>
+              </a:defRPr>
+            </a:pPr>
+            <a:r>
+              <a:t>INTEGRATIONS</a:t>
+            </a:r>
+          </a:p>
+          <a:p>
+            <a:pPr>
+              <a:spcBef>
+                <a:spcPts val="1000"/>
+              </a:spcBef>
+              <a:defRPr sz="2000" b="1">
+                <a:solidFill>
+                  <a:srgbClr val="F3F4F6"/>
+                </a:solidFill>
+                <a:latin typeface="Arial"/>
+              </a:defRPr>
+            </a:pPr>
+            <a:r>
+              <a:t>Operations Platform</a:t>
+            </a:r>
+          </a:p>
+          <a:p>
+            <a:pPr>
+              <a:spcBef>
+                <a:spcPts val="1500"/>
+              </a:spcBef>
+              <a:defRPr sz="1100">
+                <a:solidFill>
+                  <a:srgbClr val="9CA3AF"/>
+                </a:solidFill>
+                <a:latin typeface="Arial"/>
+              </a:defRPr>
+            </a:pPr>
+            <a:r>
+              <a:t>Swagger API docs</a:t>
+            </a:r>
+            <a:br/>
+            <a:r>
+              <a:t>GitHub VCS repository</a:t>
+            </a:r>
+            <a:br/>
+            <a:r>
+              <a:t>Full stack connected</a:t>
+            </a:r>
+            <a:br/>
+            <a:r>
+              <a:t>Demonstrable live HUD</a:t>
             </a:r>
           </a:p>
         </p:txBody>
@@ -3496,44 +4378,8 @@
         </p:nvSpPr>
         <p:spPr>
           <a:xfrm>
-            <a:off x="685800" y="457200"/>
-            <a:ext cx="10817352" cy="914400"/>
-          </a:xfrm>
-          <a:prstGeom prst="rect">
-            <a:avLst/>
-          </a:prstGeom>
-          <a:noFill/>
-        </p:spPr>
-        <p:txBody>
-          <a:bodyPr wrap="square" lIns="0" tIns="0">
-            <a:spAutoFit/>
-          </a:bodyPr>
-          <a:lstStyle/>
-          <a:p>
-            <a:pPr>
-              <a:defRPr sz="3600" b="1">
-                <a:solidFill>
-                  <a:srgbClr val="06B6D4"/>
-                </a:solidFill>
-                <a:latin typeface="Arial"/>
-              </a:defRPr>
-            </a:pPr>
-            <a:r>
-              <a:t>Comparative Advantage Matrix</a:t>
-            </a:r>
-          </a:p>
-        </p:txBody>
-      </p:sp>
-      <p:sp>
-        <p:nvSpPr>
-          <p:cNvPr id="3" name="TextBox 2"/>
-          <p:cNvSpPr txBox="1"/>
-          <p:nvPr/>
-        </p:nvSpPr>
-        <p:spPr>
-          <a:xfrm>
-            <a:off x="685800" y="1645920"/>
-            <a:ext cx="10817352" cy="4389120"/>
+            <a:off x="685800" y="365760"/>
+            <a:ext cx="10817352" cy="365760"/>
           </a:xfrm>
           <a:prstGeom prst="rect">
             <a:avLst/>
@@ -3547,10 +4393,43 @@
           <a:lstStyle/>
           <a:p>
             <a:pPr>
-              <a:spcAft>
-                <a:spcPts val="2000"/>
-              </a:spcAft>
-              <a:defRPr sz="2000">
+              <a:defRPr sz="1000" b="1">
+                <a:solidFill>
+                  <a:srgbClr val="06B6D4"/>
+                </a:solidFill>
+                <a:latin typeface="Arial"/>
+              </a:defRPr>
+            </a:pPr>
+            <a:r>
+              <a:t>CORE FUNCTIONAL DIMENSIONS</a:t>
+            </a:r>
+          </a:p>
+        </p:txBody>
+      </p:sp>
+      <p:sp>
+        <p:nvSpPr>
+          <p:cNvPr id="3" name="TextBox 2"/>
+          <p:cNvSpPr txBox="1"/>
+          <p:nvPr/>
+        </p:nvSpPr>
+        <p:spPr>
+          <a:xfrm>
+            <a:off x="685800" y="640080"/>
+            <a:ext cx="10817352" cy="731520"/>
+          </a:xfrm>
+          <a:prstGeom prst="rect">
+            <a:avLst/>
+          </a:prstGeom>
+          <a:noFill/>
+        </p:spPr>
+        <p:txBody>
+          <a:bodyPr wrap="square">
+            <a:spAutoFit/>
+          </a:bodyPr>
+          <a:lstStyle/>
+          <a:p>
+            <a:pPr>
+              <a:defRPr sz="2800" b="1">
                 <a:solidFill>
                   <a:srgbClr val="F3F4F6"/>
                 </a:solidFill>
@@ -3558,15 +4437,96 @@
               </a:defRPr>
             </a:pPr>
             <a:r>
-              <a:t>• Live 12-Sector Twin vs. spreadsheets: Static rows vs. real-time dynamic visual telemetry.</a:t>
-            </a:r>
-          </a:p>
-          <a:p>
-            <a:pPr>
-              <a:spcAft>
-                <a:spcPts val="2000"/>
-              </a:spcAft>
-              <a:defRPr sz="2000">
+              <a:t>Platform Capabilities</a:t>
+            </a:r>
+          </a:p>
+        </p:txBody>
+      </p:sp>
+      <p:sp>
+        <p:nvSpPr>
+          <p:cNvPr id="4" name="Rectangle 3"/>
+          <p:cNvSpPr/>
+          <p:nvPr/>
+        </p:nvSpPr>
+        <p:spPr>
+          <a:xfrm>
+            <a:off x="685800" y="2011680"/>
+            <a:ext cx="3383280" cy="1828800"/>
+          </a:xfrm>
+          <a:prstGeom prst="rect">
+            <a:avLst/>
+          </a:prstGeom>
+          <a:solidFill>
+            <a:srgbClr val="111827"/>
+          </a:solidFill>
+          <a:ln w="19050">
+            <a:solidFill>
+              <a:srgbClr val="10B981"/>
+            </a:solidFill>
+          </a:ln>
+        </p:spPr>
+        <p:style>
+          <a:lnRef idx="1">
+            <a:schemeClr val="accent1"/>
+          </a:lnRef>
+          <a:fillRef idx="3">
+            <a:schemeClr val="accent1"/>
+          </a:fillRef>
+          <a:effectRef idx="2">
+            <a:schemeClr val="accent1"/>
+          </a:effectRef>
+          <a:fontRef idx="minor">
+            <a:schemeClr val="lt1"/>
+          </a:fontRef>
+        </p:style>
+        <p:txBody>
+          <a:bodyPr rtlCol="0" anchor="ctr"/>
+          <a:lstStyle/>
+          <a:p>
+            <a:pPr algn="ctr"/>
+          </a:p>
+        </p:txBody>
+      </p:sp>
+      <p:sp>
+        <p:nvSpPr>
+          <p:cNvPr id="5" name="TextBox 4"/>
+          <p:cNvSpPr txBox="1"/>
+          <p:nvPr/>
+        </p:nvSpPr>
+        <p:spPr>
+          <a:xfrm>
+            <a:off x="822960" y="2148840"/>
+            <a:ext cx="3108960" cy="1554480"/>
+          </a:xfrm>
+          <a:prstGeom prst="rect">
+            <a:avLst/>
+          </a:prstGeom>
+          <a:noFill/>
+        </p:spPr>
+        <p:txBody>
+          <a:bodyPr wrap="square">
+            <a:spAutoFit/>
+          </a:bodyPr>
+          <a:lstStyle/>
+          <a:p>
+            <a:pPr>
+              <a:defRPr sz="1100" b="1">
+                <a:solidFill>
+                  <a:srgbClr val="10B981"/>
+                </a:solidFill>
+                <a:latin typeface="Arial"/>
+              </a:defRPr>
+            </a:pPr>
+            <a:r>
+              <a:t>✓ PREDICTIVE STAFFING</a:t>
+            </a:r>
+          </a:p>
+          <a:p>
+            <a:pPr>
+              <a:spcBef>
+                <a:spcPts val="800"/>
+              </a:spcBef>
+              <a:defRPr sz="2400" b="1">
                 <a:solidFill>
                   <a:srgbClr val="F3F4F6"/>
                 </a:solidFill>
@@ -3574,15 +4534,112 @@
               </a:defRPr>
             </a:pPr>
             <a:r>
-              <a:t>• Constraint Solver vs. basic scheduling: Proximity, skill, and fatigue computed dynamically.</a:t>
-            </a:r>
-          </a:p>
-          <a:p>
-            <a:pPr>
-              <a:spcAft>
-                <a:spcPts val="2000"/>
-              </a:spcAft>
-              <a:defRPr sz="2000">
+              <a:t>Capability</a:t>
+            </a:r>
+          </a:p>
+          <a:p>
+            <a:pPr>
+              <a:spcBef>
+                <a:spcPts val="800"/>
+              </a:spcBef>
+              <a:defRPr sz="1100">
+                <a:solidFill>
+                  <a:srgbClr val="9CA3AF"/>
+                </a:solidFill>
+                <a:latin typeface="Arial"/>
+              </a:defRPr>
+            </a:pPr>
+            <a:r>
+              <a:t>Anticipate crowd volume anomalies &amp; volunteer shortages.</a:t>
+            </a:r>
+          </a:p>
+        </p:txBody>
+      </p:sp>
+      <p:sp>
+        <p:nvSpPr>
+          <p:cNvPr id="6" name="Rectangle 5"/>
+          <p:cNvSpPr/>
+          <p:nvPr/>
+        </p:nvSpPr>
+        <p:spPr>
+          <a:xfrm>
+            <a:off x="4343400" y="2011680"/>
+            <a:ext cx="3383280" cy="1828800"/>
+          </a:xfrm>
+          <a:prstGeom prst="rect">
+            <a:avLst/>
+          </a:prstGeom>
+          <a:solidFill>
+            <a:srgbClr val="111827"/>
+          </a:solidFill>
+          <a:ln w="19050">
+            <a:solidFill>
+              <a:srgbClr val="10B981"/>
+            </a:solidFill>
+          </a:ln>
+        </p:spPr>
+        <p:style>
+          <a:lnRef idx="1">
+            <a:schemeClr val="accent1"/>
+          </a:lnRef>
+          <a:fillRef idx="3">
+            <a:schemeClr val="accent1"/>
+          </a:fillRef>
+          <a:effectRef idx="2">
+            <a:schemeClr val="accent1"/>
+          </a:effectRef>
+          <a:fontRef idx="minor">
+            <a:schemeClr val="lt1"/>
+          </a:fontRef>
+        </p:style>
+        <p:txBody>
+          <a:bodyPr rtlCol="0" anchor="ctr"/>
+          <a:lstStyle/>
+          <a:p>
+            <a:pPr algn="ctr"/>
+          </a:p>
+        </p:txBody>
+      </p:sp>
+      <p:sp>
+        <p:nvSpPr>
+          <p:cNvPr id="7" name="TextBox 6"/>
+          <p:cNvSpPr txBox="1"/>
+          <p:nvPr/>
+        </p:nvSpPr>
+        <p:spPr>
+          <a:xfrm>
+            <a:off x="4480560" y="2148840"/>
+            <a:ext cx="3108960" cy="1554480"/>
+          </a:xfrm>
+          <a:prstGeom prst="rect">
+            <a:avLst/>
+          </a:prstGeom>
+          <a:noFill/>
+        </p:spPr>
+        <p:txBody>
+          <a:bodyPr wrap="square">
+            <a:spAutoFit/>
+          </a:bodyPr>
+          <a:lstStyle/>
+          <a:p>
+            <a:pPr>
+              <a:defRPr sz="1100" b="1">
+                <a:solidFill>
+                  <a:srgbClr val="10B981"/>
+                </a:solidFill>
+                <a:latin typeface="Arial"/>
+              </a:defRPr>
+            </a:pPr>
+            <a:r>
+              <a:t>✓ DIGITAL COMMAND TWIN</a:t>
+            </a:r>
+          </a:p>
+          <a:p>
+            <a:pPr>
+              <a:spcBef>
+                <a:spcPts val="800"/>
+              </a:spcBef>
+              <a:defRPr sz="2400" b="1">
                 <a:solidFill>
                   <a:srgbClr val="F3F4F6"/>
                 </a:solidFill>
@@ -3590,7 +4647,475 @@
               </a:defRPr>
             </a:pPr>
             <a:r>
-              <a:t>• Predictive Sandbox vs. reactive dispatch: Proactive trend graphs vs. late crisis management.</a:t>
+              <a:t>Capability</a:t>
+            </a:r>
+          </a:p>
+          <a:p>
+            <a:pPr>
+              <a:spcBef>
+                <a:spcPts val="800"/>
+              </a:spcBef>
+              <a:defRPr sz="1100">
+                <a:solidFill>
+                  <a:srgbClr val="9CA3AF"/>
+                </a:solidFill>
+                <a:latin typeface="Arial"/>
+              </a:defRPr>
+            </a:pPr>
+            <a:r>
+              <a:t>12-sector matrix visual telemetry HUD.</a:t>
+            </a:r>
+          </a:p>
+        </p:txBody>
+      </p:sp>
+      <p:sp>
+        <p:nvSpPr>
+          <p:cNvPr id="8" name="Rectangle 7"/>
+          <p:cNvSpPr/>
+          <p:nvPr/>
+        </p:nvSpPr>
+        <p:spPr>
+          <a:xfrm>
+            <a:off x="8001000" y="2011680"/>
+            <a:ext cx="3383280" cy="1828800"/>
+          </a:xfrm>
+          <a:prstGeom prst="rect">
+            <a:avLst/>
+          </a:prstGeom>
+          <a:solidFill>
+            <a:srgbClr val="111827"/>
+          </a:solidFill>
+          <a:ln w="19050">
+            <a:solidFill>
+              <a:srgbClr val="10B981"/>
+            </a:solidFill>
+          </a:ln>
+        </p:spPr>
+        <p:style>
+          <a:lnRef idx="1">
+            <a:schemeClr val="accent1"/>
+          </a:lnRef>
+          <a:fillRef idx="3">
+            <a:schemeClr val="accent1"/>
+          </a:fillRef>
+          <a:effectRef idx="2">
+            <a:schemeClr val="accent1"/>
+          </a:effectRef>
+          <a:fontRef idx="minor">
+            <a:schemeClr val="lt1"/>
+          </a:fontRef>
+        </p:style>
+        <p:txBody>
+          <a:bodyPr rtlCol="0" anchor="ctr"/>
+          <a:lstStyle/>
+          <a:p>
+            <a:pPr algn="ctr"/>
+          </a:p>
+        </p:txBody>
+      </p:sp>
+      <p:sp>
+        <p:nvSpPr>
+          <p:cNvPr id="9" name="TextBox 8"/>
+          <p:cNvSpPr txBox="1"/>
+          <p:nvPr/>
+        </p:nvSpPr>
+        <p:spPr>
+          <a:xfrm>
+            <a:off x="8138160" y="2148840"/>
+            <a:ext cx="3108960" cy="1554480"/>
+          </a:xfrm>
+          <a:prstGeom prst="rect">
+            <a:avLst/>
+          </a:prstGeom>
+          <a:noFill/>
+        </p:spPr>
+        <p:txBody>
+          <a:bodyPr wrap="square">
+            <a:spAutoFit/>
+          </a:bodyPr>
+          <a:lstStyle/>
+          <a:p>
+            <a:pPr>
+              <a:defRPr sz="1100" b="1">
+                <a:solidFill>
+                  <a:srgbClr val="10B981"/>
+                </a:solidFill>
+                <a:latin typeface="Arial"/>
+              </a:defRPr>
+            </a:pPr>
+            <a:r>
+              <a:t>✓ AI COPILOT ASSISTANT</a:t>
+            </a:r>
+          </a:p>
+          <a:p>
+            <a:pPr>
+              <a:spcBef>
+                <a:spcPts val="800"/>
+              </a:spcBef>
+              <a:defRPr sz="2400" b="1">
+                <a:solidFill>
+                  <a:srgbClr val="F3F4F6"/>
+                </a:solidFill>
+                <a:latin typeface="Arial"/>
+              </a:defRPr>
+            </a:pPr>
+            <a:r>
+              <a:t>Capability</a:t>
+            </a:r>
+          </a:p>
+          <a:p>
+            <a:pPr>
+              <a:spcBef>
+                <a:spcPts val="800"/>
+              </a:spcBef>
+              <a:defRPr sz="1100">
+                <a:solidFill>
+                  <a:srgbClr val="9CA3AF"/>
+                </a:solidFill>
+                <a:latin typeface="Arial"/>
+              </a:defRPr>
+            </a:pPr>
+            <a:r>
+              <a:t>Conversational CLI decision triggers &amp; citations.</a:t>
+            </a:r>
+          </a:p>
+        </p:txBody>
+      </p:sp>
+      <p:sp>
+        <p:nvSpPr>
+          <p:cNvPr id="10" name="Rectangle 9"/>
+          <p:cNvSpPr/>
+          <p:nvPr/>
+        </p:nvSpPr>
+        <p:spPr>
+          <a:xfrm>
+            <a:off x="685800" y="4114800"/>
+            <a:ext cx="3383280" cy="1828800"/>
+          </a:xfrm>
+          <a:prstGeom prst="rect">
+            <a:avLst/>
+          </a:prstGeom>
+          <a:solidFill>
+            <a:srgbClr val="111827"/>
+          </a:solidFill>
+          <a:ln w="19050">
+            <a:solidFill>
+              <a:srgbClr val="10B981"/>
+            </a:solidFill>
+          </a:ln>
+        </p:spPr>
+        <p:style>
+          <a:lnRef idx="1">
+            <a:schemeClr val="accent1"/>
+          </a:lnRef>
+          <a:fillRef idx="3">
+            <a:schemeClr val="accent1"/>
+          </a:fillRef>
+          <a:effectRef idx="2">
+            <a:schemeClr val="accent1"/>
+          </a:effectRef>
+          <a:fontRef idx="minor">
+            <a:schemeClr val="lt1"/>
+          </a:fontRef>
+        </p:style>
+        <p:txBody>
+          <a:bodyPr rtlCol="0" anchor="ctr"/>
+          <a:lstStyle/>
+          <a:p>
+            <a:pPr algn="ctr"/>
+          </a:p>
+        </p:txBody>
+      </p:sp>
+      <p:sp>
+        <p:nvSpPr>
+          <p:cNvPr id="11" name="TextBox 10"/>
+          <p:cNvSpPr txBox="1"/>
+          <p:nvPr/>
+        </p:nvSpPr>
+        <p:spPr>
+          <a:xfrm>
+            <a:off x="822960" y="4251960"/>
+            <a:ext cx="3108960" cy="1554480"/>
+          </a:xfrm>
+          <a:prstGeom prst="rect">
+            <a:avLst/>
+          </a:prstGeom>
+          <a:noFill/>
+        </p:spPr>
+        <p:txBody>
+          <a:bodyPr wrap="square">
+            <a:spAutoFit/>
+          </a:bodyPr>
+          <a:lstStyle/>
+          <a:p>
+            <a:pPr>
+              <a:defRPr sz="1100" b="1">
+                <a:solidFill>
+                  <a:srgbClr val="10B981"/>
+                </a:solidFill>
+                <a:latin typeface="Arial"/>
+              </a:defRPr>
+            </a:pPr>
+            <a:r>
+              <a:t>✓ WORKFORCE OPTIMIZATION</a:t>
+            </a:r>
+          </a:p>
+          <a:p>
+            <a:pPr>
+              <a:spcBef>
+                <a:spcPts val="800"/>
+              </a:spcBef>
+              <a:defRPr sz="2400" b="1">
+                <a:solidFill>
+                  <a:srgbClr val="F3F4F6"/>
+                </a:solidFill>
+                <a:latin typeface="Arial"/>
+              </a:defRPr>
+            </a:pPr>
+            <a:r>
+              <a:t>Capability</a:t>
+            </a:r>
+          </a:p>
+          <a:p>
+            <a:pPr>
+              <a:spcBef>
+                <a:spcPts val="800"/>
+              </a:spcBef>
+              <a:defRPr sz="1100">
+                <a:solidFill>
+                  <a:srgbClr val="9CA3AF"/>
+                </a:solidFill>
+                <a:latin typeface="Arial"/>
+              </a:defRPr>
+            </a:pPr>
+            <a:r>
+              <a:t>Constraint solver routing proximity &amp; fatigue.</a:t>
+            </a:r>
+          </a:p>
+        </p:txBody>
+      </p:sp>
+      <p:sp>
+        <p:nvSpPr>
+          <p:cNvPr id="12" name="Rectangle 11"/>
+          <p:cNvSpPr/>
+          <p:nvPr/>
+        </p:nvSpPr>
+        <p:spPr>
+          <a:xfrm>
+            <a:off x="4343400" y="4114800"/>
+            <a:ext cx="3383280" cy="1828800"/>
+          </a:xfrm>
+          <a:prstGeom prst="rect">
+            <a:avLst/>
+          </a:prstGeom>
+          <a:solidFill>
+            <a:srgbClr val="111827"/>
+          </a:solidFill>
+          <a:ln w="19050">
+            <a:solidFill>
+              <a:srgbClr val="10B981"/>
+            </a:solidFill>
+          </a:ln>
+        </p:spPr>
+        <p:style>
+          <a:lnRef idx="1">
+            <a:schemeClr val="accent1"/>
+          </a:lnRef>
+          <a:fillRef idx="3">
+            <a:schemeClr val="accent1"/>
+          </a:fillRef>
+          <a:effectRef idx="2">
+            <a:schemeClr val="accent1"/>
+          </a:effectRef>
+          <a:fontRef idx="minor">
+            <a:schemeClr val="lt1"/>
+          </a:fontRef>
+        </p:style>
+        <p:txBody>
+          <a:bodyPr rtlCol="0" anchor="ctr"/>
+          <a:lstStyle/>
+          <a:p>
+            <a:pPr algn="ctr"/>
+          </a:p>
+        </p:txBody>
+      </p:sp>
+      <p:sp>
+        <p:nvSpPr>
+          <p:cNvPr id="13" name="TextBox 12"/>
+          <p:cNvSpPr txBox="1"/>
+          <p:nvPr/>
+        </p:nvSpPr>
+        <p:spPr>
+          <a:xfrm>
+            <a:off x="4480560" y="4251960"/>
+            <a:ext cx="3108960" cy="1554480"/>
+          </a:xfrm>
+          <a:prstGeom prst="rect">
+            <a:avLst/>
+          </a:prstGeom>
+          <a:noFill/>
+        </p:spPr>
+        <p:txBody>
+          <a:bodyPr wrap="square">
+            <a:spAutoFit/>
+          </a:bodyPr>
+          <a:lstStyle/>
+          <a:p>
+            <a:pPr>
+              <a:defRPr sz="1100" b="1">
+                <a:solidFill>
+                  <a:srgbClr val="10B981"/>
+                </a:solidFill>
+                <a:latin typeface="Arial"/>
+              </a:defRPr>
+            </a:pPr>
+            <a:r>
+              <a:t>✓ SCENARIO SIMULATOR</a:t>
+            </a:r>
+          </a:p>
+          <a:p>
+            <a:pPr>
+              <a:spcBef>
+                <a:spcPts val="800"/>
+              </a:spcBef>
+              <a:defRPr sz="2400" b="1">
+                <a:solidFill>
+                  <a:srgbClr val="F3F4F6"/>
+                </a:solidFill>
+                <a:latin typeface="Arial"/>
+              </a:defRPr>
+            </a:pPr>
+            <a:r>
+              <a:t>Capability</a:t>
+            </a:r>
+          </a:p>
+          <a:p>
+            <a:pPr>
+              <a:spcBef>
+                <a:spcPts val="800"/>
+              </a:spcBef>
+              <a:defRPr sz="1100">
+                <a:solidFill>
+                  <a:srgbClr val="9CA3AF"/>
+                </a:solidFill>
+                <a:latin typeface="Arial"/>
+              </a:defRPr>
+            </a:pPr>
+            <a:r>
+              <a:t>Stress-test sandbox with presets &amp; SVG trend charts.</a:t>
+            </a:r>
+          </a:p>
+        </p:txBody>
+      </p:sp>
+      <p:sp>
+        <p:nvSpPr>
+          <p:cNvPr id="14" name="Rectangle 13"/>
+          <p:cNvSpPr/>
+          <p:nvPr/>
+        </p:nvSpPr>
+        <p:spPr>
+          <a:xfrm>
+            <a:off x="8001000" y="4114800"/>
+            <a:ext cx="3383280" cy="1828800"/>
+          </a:xfrm>
+          <a:prstGeom prst="rect">
+            <a:avLst/>
+          </a:prstGeom>
+          <a:solidFill>
+            <a:srgbClr val="111827"/>
+          </a:solidFill>
+          <a:ln w="19050">
+            <a:solidFill>
+              <a:srgbClr val="10B981"/>
+            </a:solidFill>
+          </a:ln>
+        </p:spPr>
+        <p:style>
+          <a:lnRef idx="1">
+            <a:schemeClr val="accent1"/>
+          </a:lnRef>
+          <a:fillRef idx="3">
+            <a:schemeClr val="accent1"/>
+          </a:fillRef>
+          <a:effectRef idx="2">
+            <a:schemeClr val="accent1"/>
+          </a:effectRef>
+          <a:fontRef idx="minor">
+            <a:schemeClr val="lt1"/>
+          </a:fontRef>
+        </p:style>
+        <p:txBody>
+          <a:bodyPr rtlCol="0" anchor="ctr"/>
+          <a:lstStyle/>
+          <a:p>
+            <a:pPr algn="ctr"/>
+          </a:p>
+        </p:txBody>
+      </p:sp>
+      <p:sp>
+        <p:nvSpPr>
+          <p:cNvPr id="15" name="TextBox 14"/>
+          <p:cNvSpPr txBox="1"/>
+          <p:nvPr/>
+        </p:nvSpPr>
+        <p:spPr>
+          <a:xfrm>
+            <a:off x="8138160" y="4251960"/>
+            <a:ext cx="3108960" cy="1554480"/>
+          </a:xfrm>
+          <a:prstGeom prst="rect">
+            <a:avLst/>
+          </a:prstGeom>
+          <a:noFill/>
+        </p:spPr>
+        <p:txBody>
+          <a:bodyPr wrap="square">
+            <a:spAutoFit/>
+          </a:bodyPr>
+          <a:lstStyle/>
+          <a:p>
+            <a:pPr>
+              <a:defRPr sz="1100" b="1">
+                <a:solidFill>
+                  <a:srgbClr val="10B981"/>
+                </a:solidFill>
+                <a:latin typeface="Arial"/>
+              </a:defRPr>
+            </a:pPr>
+            <a:r>
+              <a:t>✓ FULL STACK INTEGRATION</a:t>
+            </a:r>
+          </a:p>
+          <a:p>
+            <a:pPr>
+              <a:spcBef>
+                <a:spcPts val="800"/>
+              </a:spcBef>
+              <a:defRPr sz="2400" b="1">
+                <a:solidFill>
+                  <a:srgbClr val="F3F4F6"/>
+                </a:solidFill>
+                <a:latin typeface="Arial"/>
+              </a:defRPr>
+            </a:pPr>
+            <a:r>
+              <a:t>Capability</a:t>
+            </a:r>
+          </a:p>
+          <a:p>
+            <a:pPr>
+              <a:spcBef>
+                <a:spcPts val="800"/>
+              </a:spcBef>
+              <a:defRPr sz="1100">
+                <a:solidFill>
+                  <a:srgbClr val="9CA3AF"/>
+                </a:solidFill>
+                <a:latin typeface="Arial"/>
+              </a:defRPr>
+            </a:pPr>
+            <a:r>
+              <a:t>Live REST API server with client offline fallbacks.</a:t>
             </a:r>
           </a:p>
         </p:txBody>
@@ -3629,44 +5154,8 @@
         </p:nvSpPr>
         <p:spPr>
           <a:xfrm>
-            <a:off x="685800" y="457200"/>
-            <a:ext cx="10817352" cy="914400"/>
-          </a:xfrm>
-          <a:prstGeom prst="rect">
-            <a:avLst/>
-          </a:prstGeom>
-          <a:noFill/>
-        </p:spPr>
-        <p:txBody>
-          <a:bodyPr wrap="square" lIns="0" tIns="0">
-            <a:spAutoFit/>
-          </a:bodyPr>
-          <a:lstStyle/>
-          <a:p>
-            <a:pPr>
-              <a:defRPr sz="3600" b="1">
-                <a:solidFill>
-                  <a:srgbClr val="06B6D4"/>
-                </a:solidFill>
-                <a:latin typeface="Arial"/>
-              </a:defRPr>
-            </a:pPr>
-            <a:r>
-              <a:t>Thank You</a:t>
-            </a:r>
-          </a:p>
-        </p:txBody>
-      </p:sp>
-      <p:sp>
-        <p:nvSpPr>
-          <p:cNvPr id="3" name="TextBox 2"/>
-          <p:cNvSpPr txBox="1"/>
-          <p:nvPr/>
-        </p:nvSpPr>
-        <p:spPr>
-          <a:xfrm>
-            <a:off x="685800" y="1645920"/>
-            <a:ext cx="10817352" cy="4389120"/>
+            <a:off x="685800" y="365760"/>
+            <a:ext cx="10817352" cy="365760"/>
           </a:xfrm>
           <a:prstGeom prst="rect">
             <a:avLst/>
@@ -3680,10 +5169,43 @@
           <a:lstStyle/>
           <a:p>
             <a:pPr>
-              <a:spcAft>
-                <a:spcPts val="2000"/>
-              </a:spcAft>
-              <a:defRPr sz="2000">
+              <a:defRPr sz="1000" b="1">
+                <a:solidFill>
+                  <a:srgbClr val="06B6D4"/>
+                </a:solidFill>
+                <a:latin typeface="Arial"/>
+              </a:defRPr>
+            </a:pPr>
+            <a:r>
+              <a:t>CONTACT &amp; REPOSITORY CREDENTIALS</a:t>
+            </a:r>
+          </a:p>
+        </p:txBody>
+      </p:sp>
+      <p:sp>
+        <p:nvSpPr>
+          <p:cNvPr id="3" name="TextBox 2"/>
+          <p:cNvSpPr txBox="1"/>
+          <p:nvPr/>
+        </p:nvSpPr>
+        <p:spPr>
+          <a:xfrm>
+            <a:off x="685800" y="640080"/>
+            <a:ext cx="10817352" cy="731520"/>
+          </a:xfrm>
+          <a:prstGeom prst="rect">
+            <a:avLst/>
+          </a:prstGeom>
+          <a:noFill/>
+        </p:spPr>
+        <p:txBody>
+          <a:bodyPr wrap="square">
+            <a:spAutoFit/>
+          </a:bodyPr>
+          <a:lstStyle/>
+          <a:p>
+            <a:pPr>
+              <a:defRPr sz="2800" b="1">
                 <a:solidFill>
                   <a:srgbClr val="F3F4F6"/>
                 </a:solidFill>
@@ -3691,55 +5213,195 @@
               </a:defRPr>
             </a:pPr>
             <a:r>
-              <a:t>• KumbhForce AI: Autonomous Volunteer Operations Command Center</a:t>
-            </a:r>
-          </a:p>
-          <a:p>
-            <a:pPr>
-              <a:spcAft>
-                <a:spcPts val="2000"/>
-              </a:spcAft>
-              <a:defRPr sz="2000">
+              <a:t>Synchronizing Humanity at Scale</a:t>
+            </a:r>
+          </a:p>
+        </p:txBody>
+      </p:sp>
+      <p:sp>
+        <p:nvSpPr>
+          <p:cNvPr id="4" name="Rectangle 3"/>
+          <p:cNvSpPr/>
+          <p:nvPr/>
+        </p:nvSpPr>
+        <p:spPr>
+          <a:xfrm>
+            <a:off x="914400" y="2011680"/>
+            <a:ext cx="4114800" cy="3840480"/>
+          </a:xfrm>
+          <a:prstGeom prst="rect">
+            <a:avLst/>
+          </a:prstGeom>
+          <a:solidFill>
+            <a:srgbClr val="0C1423"/>
+          </a:solidFill>
+          <a:ln w="19050">
+            <a:solidFill>
+              <a:srgbClr val="06B6D4"/>
+            </a:solidFill>
+          </a:ln>
+        </p:spPr>
+        <p:style>
+          <a:lnRef idx="1">
+            <a:schemeClr val="accent1"/>
+          </a:lnRef>
+          <a:fillRef idx="3">
+            <a:schemeClr val="accent1"/>
+          </a:fillRef>
+          <a:effectRef idx="2">
+            <a:schemeClr val="accent1"/>
+          </a:effectRef>
+          <a:fontRef idx="minor">
+            <a:schemeClr val="lt1"/>
+          </a:fontRef>
+        </p:style>
+        <p:txBody>
+          <a:bodyPr rtlCol="0" anchor="ctr"/>
+          <a:lstStyle/>
+          <a:p>
+            <a:pPr algn="ctr">
+              <a:defRPr sz="1300">
+                <a:solidFill>
+                  <a:srgbClr val="9CA3AF"/>
+                </a:solidFill>
+              </a:defRPr>
+            </a:pPr>
+            <a:r>
+              <a:t>[ QR CODE MOCKUP ]</a:t>
+            </a:r>
+            <a:br/>
+            <a:br/>
+            <a:r>
+              <a:t>Scan to access live platform deployment and GitHub code files.</a:t>
+            </a:r>
+          </a:p>
+        </p:txBody>
+      </p:sp>
+      <p:sp>
+        <p:nvSpPr>
+          <p:cNvPr id="5" name="Rectangle 4"/>
+          <p:cNvSpPr/>
+          <p:nvPr/>
+        </p:nvSpPr>
+        <p:spPr>
+          <a:xfrm>
+            <a:off x="5486400" y="2011680"/>
+            <a:ext cx="5788152" cy="3840480"/>
+          </a:xfrm>
+          <a:prstGeom prst="rect">
+            <a:avLst/>
+          </a:prstGeom>
+          <a:solidFill>
+            <a:srgbClr val="111827"/>
+          </a:solidFill>
+          <a:ln w="19050">
+            <a:solidFill>
+              <a:srgbClr val="06B6D4"/>
+            </a:solidFill>
+          </a:ln>
+        </p:spPr>
+        <p:style>
+          <a:lnRef idx="1">
+            <a:schemeClr val="accent1"/>
+          </a:lnRef>
+          <a:fillRef idx="3">
+            <a:schemeClr val="accent1"/>
+          </a:fillRef>
+          <a:effectRef idx="2">
+            <a:schemeClr val="accent1"/>
+          </a:effectRef>
+          <a:fontRef idx="minor">
+            <a:schemeClr val="lt1"/>
+          </a:fontRef>
+        </p:style>
+        <p:txBody>
+          <a:bodyPr rtlCol="0" anchor="ctr" wrap="square"/>
+          <a:lstStyle/>
+          <a:p>
+            <a:pPr algn="ctr">
+              <a:defRPr sz="1100" b="1">
+                <a:solidFill>
+                  <a:srgbClr val="06B6D4"/>
+                </a:solidFill>
+              </a:defRPr>
+            </a:pPr>
+            <a:r>
+              <a:t>DEMO PLATFORM URL:</a:t>
+            </a:r>
+          </a:p>
+          <a:p>
+            <a:pPr>
+              <a:spcBef>
+                <a:spcPts val="400"/>
+              </a:spcBef>
+              <a:defRPr sz="1800" b="1">
                 <a:solidFill>
                   <a:srgbClr val="F3F4F6"/>
                 </a:solidFill>
-                <a:latin typeface="Arial"/>
-              </a:defRPr>
-            </a:pPr>
-            <a:r>
-              <a:t>• Lead Creator: Aditya Pandey</a:t>
-            </a:r>
-          </a:p>
-          <a:p>
-            <a:pPr>
-              <a:spcAft>
-                <a:spcPts val="2000"/>
-              </a:spcAft>
-              <a:defRPr sz="2000">
+              </a:defRPr>
+            </a:pPr>
+            <a:r>
+              <a:t>kumbhforce-ai.vercel.app</a:t>
+            </a:r>
+          </a:p>
+          <a:p>
+            <a:pPr>
+              <a:spcBef>
+                <a:spcPts val="1500"/>
+              </a:spcBef>
+              <a:defRPr sz="1100" b="1">
+                <a:solidFill>
+                  <a:srgbClr val="06B6D4"/>
+                </a:solidFill>
+              </a:defRPr>
+            </a:pPr>
+            <a:r>
+              <a:t>GITHUB REPOSITORY:</a:t>
+            </a:r>
+          </a:p>
+          <a:p>
+            <a:pPr>
+              <a:spcBef>
+                <a:spcPts val="400"/>
+              </a:spcBef>
+              <a:defRPr sz="1800" b="1">
                 <a:solidFill>
                   <a:srgbClr val="F3F4F6"/>
                 </a:solidFill>
-                <a:latin typeface="Arial"/>
-              </a:defRPr>
-            </a:pPr>
-            <a:r>
-              <a:t>• Web Demo: kumbhforce-ai.vercel.app</a:t>
-            </a:r>
-          </a:p>
-          <a:p>
-            <a:pPr>
-              <a:spcAft>
-                <a:spcPts val="2000"/>
-              </a:spcAft>
-              <a:defRPr sz="2000">
-                <a:solidFill>
-                  <a:srgbClr val="F3F4F6"/>
-                </a:solidFill>
-                <a:latin typeface="Arial"/>
-              </a:defRPr>
-            </a:pPr>
-            <a:r>
-              <a:t>• GitHub Repository: github.com/ADITYA-PANDEY99/KumbhForce-AI</a:t>
+              </a:defRPr>
+            </a:pPr>
+            <a:r>
+              <a:t>github.com/ADITYA-PANDEY99/KumbhForce-AI</a:t>
+            </a:r>
+          </a:p>
+          <a:p>
+            <a:pPr>
+              <a:spcBef>
+                <a:spcPts val="1500"/>
+              </a:spcBef>
+              <a:defRPr sz="1100" b="1">
+                <a:solidFill>
+                  <a:srgbClr val="06B6D4"/>
+                </a:solidFill>
+              </a:defRPr>
+            </a:pPr>
+            <a:r>
+              <a:t>CREATOR DETAILS:</a:t>
+            </a:r>
+          </a:p>
+          <a:p>
+            <a:pPr>
+              <a:spcBef>
+                <a:spcPts val="400"/>
+              </a:spcBef>
+              <a:defRPr sz="1400" b="1">
+                <a:solidFill>
+                  <a:srgbClr val="10B981"/>
+                </a:solidFill>
+              </a:defRPr>
+            </a:pPr>
+            <a:r>
+              <a:t>Aditya Pandey  ·  aditya@kumbhforce.ai</a:t>
             </a:r>
           </a:p>
         </p:txBody>
@@ -3778,44 +5440,8 @@
         </p:nvSpPr>
         <p:spPr>
           <a:xfrm>
-            <a:off x="685800" y="457200"/>
-            <a:ext cx="10817352" cy="914400"/>
-          </a:xfrm>
-          <a:prstGeom prst="rect">
-            <a:avLst/>
-          </a:prstGeom>
-          <a:noFill/>
-        </p:spPr>
-        <p:txBody>
-          <a:bodyPr wrap="square" lIns="0" tIns="0">
-            <a:spAutoFit/>
-          </a:bodyPr>
-          <a:lstStyle/>
-          <a:p>
-            <a:pPr>
-              <a:defRPr sz="3600" b="1">
-                <a:solidFill>
-                  <a:srgbClr val="06B6D4"/>
-                </a:solidFill>
-                <a:latin typeface="Arial"/>
-              </a:defRPr>
-            </a:pPr>
-            <a:r>
-              <a:t>Operating at the Limits of Human Scale</a:t>
-            </a:r>
-          </a:p>
-        </p:txBody>
-      </p:sp>
-      <p:sp>
-        <p:nvSpPr>
-          <p:cNvPr id="3" name="TextBox 2"/>
-          <p:cNvSpPr txBox="1"/>
-          <p:nvPr/>
-        </p:nvSpPr>
-        <p:spPr>
-          <a:xfrm>
-            <a:off x="685800" y="1645920"/>
-            <a:ext cx="10817352" cy="4389120"/>
+            <a:off x="685800" y="365760"/>
+            <a:ext cx="10817352" cy="365760"/>
           </a:xfrm>
           <a:prstGeom prst="rect">
             <a:avLst/>
@@ -3829,10 +5455,43 @@
           <a:lstStyle/>
           <a:p>
             <a:pPr>
-              <a:spcAft>
-                <a:spcPts val="2000"/>
-              </a:spcAft>
-              <a:defRPr sz="2000">
+              <a:defRPr sz="1000" b="1">
+                <a:solidFill>
+                  <a:srgbClr val="06B6D4"/>
+                </a:solidFill>
+                <a:latin typeface="Arial"/>
+              </a:defRPr>
+            </a:pPr>
+            <a:r>
+              <a:t>FLOODPLAIN CONSTRAINTS</a:t>
+            </a:r>
+          </a:p>
+        </p:txBody>
+      </p:sp>
+      <p:sp>
+        <p:nvSpPr>
+          <p:cNvPr id="3" name="TextBox 2"/>
+          <p:cNvSpPr txBox="1"/>
+          <p:nvPr/>
+        </p:nvSpPr>
+        <p:spPr>
+          <a:xfrm>
+            <a:off x="685800" y="640080"/>
+            <a:ext cx="10817352" cy="731520"/>
+          </a:xfrm>
+          <a:prstGeom prst="rect">
+            <a:avLst/>
+          </a:prstGeom>
+          <a:noFill/>
+        </p:spPr>
+        <p:txBody>
+          <a:bodyPr wrap="square">
+            <a:spAutoFit/>
+          </a:bodyPr>
+          <a:lstStyle/>
+          <a:p>
+            <a:pPr>
+              <a:defRPr sz="2800" b="1">
                 <a:solidFill>
                   <a:srgbClr val="F3F4F6"/>
                 </a:solidFill>
@@ -3840,15 +5499,96 @@
               </a:defRPr>
             </a:pPr>
             <a:r>
-              <a:t>• 120 Million+ Pilgrims: Population size larger than most European nations, shifting daily.</a:t>
-            </a:r>
-          </a:p>
-          <a:p>
-            <a:pPr>
-              <a:spcAft>
-                <a:spcPts val="2000"/>
-              </a:spcAft>
-              <a:defRPr sz="2000">
+              <a:t>Scale of the Problem</a:t>
+            </a:r>
+          </a:p>
+        </p:txBody>
+      </p:sp>
+      <p:sp>
+        <p:nvSpPr>
+          <p:cNvPr id="4" name="Rectangle 3"/>
+          <p:cNvSpPr/>
+          <p:nvPr/>
+        </p:nvSpPr>
+        <p:spPr>
+          <a:xfrm>
+            <a:off x="914400" y="2011680"/>
+            <a:ext cx="3200400" cy="3840480"/>
+          </a:xfrm>
+          <a:prstGeom prst="rect">
+            <a:avLst/>
+          </a:prstGeom>
+          <a:solidFill>
+            <a:srgbClr val="111827"/>
+          </a:solidFill>
+          <a:ln w="19050">
+            <a:solidFill>
+              <a:srgbClr val="06B6D4"/>
+            </a:solidFill>
+          </a:ln>
+        </p:spPr>
+        <p:style>
+          <a:lnRef idx="1">
+            <a:schemeClr val="accent1"/>
+          </a:lnRef>
+          <a:fillRef idx="3">
+            <a:schemeClr val="accent1"/>
+          </a:fillRef>
+          <a:effectRef idx="2">
+            <a:schemeClr val="accent1"/>
+          </a:effectRef>
+          <a:fontRef idx="minor">
+            <a:schemeClr val="lt1"/>
+          </a:fontRef>
+        </p:style>
+        <p:txBody>
+          <a:bodyPr rtlCol="0" anchor="ctr"/>
+          <a:lstStyle/>
+          <a:p>
+            <a:pPr algn="ctr"/>
+          </a:p>
+        </p:txBody>
+      </p:sp>
+      <p:sp>
+        <p:nvSpPr>
+          <p:cNvPr id="5" name="TextBox 4"/>
+          <p:cNvSpPr txBox="1"/>
+          <p:nvPr/>
+        </p:nvSpPr>
+        <p:spPr>
+          <a:xfrm>
+            <a:off x="1051560" y="2148840"/>
+            <a:ext cx="2926080" cy="3566160"/>
+          </a:xfrm>
+          <a:prstGeom prst="rect">
+            <a:avLst/>
+          </a:prstGeom>
+          <a:noFill/>
+        </p:spPr>
+        <p:txBody>
+          <a:bodyPr wrap="square">
+            <a:spAutoFit/>
+          </a:bodyPr>
+          <a:lstStyle/>
+          <a:p>
+            <a:pPr>
+              <a:defRPr sz="1100" b="1">
+                <a:solidFill>
+                  <a:srgbClr val="06B6D4"/>
+                </a:solidFill>
+                <a:latin typeface="Arial"/>
+              </a:defRPr>
+            </a:pPr>
+            <a:r>
+              <a:t>DEMOGRAPHICS</a:t>
+            </a:r>
+          </a:p>
+          <a:p>
+            <a:pPr>
+              <a:spcBef>
+                <a:spcPts val="800"/>
+              </a:spcBef>
+              <a:defRPr sz="2400" b="1">
                 <a:solidFill>
                   <a:srgbClr val="F3F4F6"/>
                 </a:solidFill>
@@ -3856,15 +5596,112 @@
               </a:defRPr>
             </a:pPr>
             <a:r>
-              <a:t>• Dynamic Floodplain Grid: Temporary pontoon bridges and riverbanks shifting dynamically.</a:t>
-            </a:r>
-          </a:p>
-          <a:p>
-            <a:pPr>
-              <a:spcAft>
-                <a:spcPts val="2000"/>
-              </a:spcAft>
-              <a:defRPr sz="2000">
+              <a:t>120M+ Pilgrims</a:t>
+            </a:r>
+          </a:p>
+          <a:p>
+            <a:pPr>
+              <a:spcBef>
+                <a:spcPts val="800"/>
+              </a:spcBef>
+              <a:defRPr sz="1100">
+                <a:solidFill>
+                  <a:srgbClr val="9CA3AF"/>
+                </a:solidFill>
+                <a:latin typeface="Arial"/>
+              </a:defRPr>
+            </a:pPr>
+            <a:r>
+              <a:t>Largest human gathering on Earth. Larger population footprint than most European nations transit daily.</a:t>
+            </a:r>
+          </a:p>
+        </p:txBody>
+      </p:sp>
+      <p:sp>
+        <p:nvSpPr>
+          <p:cNvPr id="6" name="Rectangle 5"/>
+          <p:cNvSpPr/>
+          <p:nvPr/>
+        </p:nvSpPr>
+        <p:spPr>
+          <a:xfrm>
+            <a:off x="4480560" y="2011680"/>
+            <a:ext cx="3200400" cy="3840480"/>
+          </a:xfrm>
+          <a:prstGeom prst="rect">
+            <a:avLst/>
+          </a:prstGeom>
+          <a:solidFill>
+            <a:srgbClr val="111827"/>
+          </a:solidFill>
+          <a:ln w="19050">
+            <a:solidFill>
+              <a:srgbClr val="06B6D4"/>
+            </a:solidFill>
+          </a:ln>
+        </p:spPr>
+        <p:style>
+          <a:lnRef idx="1">
+            <a:schemeClr val="accent1"/>
+          </a:lnRef>
+          <a:fillRef idx="3">
+            <a:schemeClr val="accent1"/>
+          </a:fillRef>
+          <a:effectRef idx="2">
+            <a:schemeClr val="accent1"/>
+          </a:effectRef>
+          <a:fontRef idx="minor">
+            <a:schemeClr val="lt1"/>
+          </a:fontRef>
+        </p:style>
+        <p:txBody>
+          <a:bodyPr rtlCol="0" anchor="ctr"/>
+          <a:lstStyle/>
+          <a:p>
+            <a:pPr algn="ctr"/>
+          </a:p>
+        </p:txBody>
+      </p:sp>
+      <p:sp>
+        <p:nvSpPr>
+          <p:cNvPr id="7" name="TextBox 6"/>
+          <p:cNvSpPr txBox="1"/>
+          <p:nvPr/>
+        </p:nvSpPr>
+        <p:spPr>
+          <a:xfrm>
+            <a:off x="4617720" y="2148840"/>
+            <a:ext cx="2926080" cy="3566160"/>
+          </a:xfrm>
+          <a:prstGeom prst="rect">
+            <a:avLst/>
+          </a:prstGeom>
+          <a:noFill/>
+        </p:spPr>
+        <p:txBody>
+          <a:bodyPr wrap="square">
+            <a:spAutoFit/>
+          </a:bodyPr>
+          <a:lstStyle/>
+          <a:p>
+            <a:pPr>
+              <a:defRPr sz="1100" b="1">
+                <a:solidFill>
+                  <a:srgbClr val="06B6D4"/>
+                </a:solidFill>
+                <a:latin typeface="Arial"/>
+              </a:defRPr>
+            </a:pPr>
+            <a:r>
+              <a:t>TOPOGRAPHY</a:t>
+            </a:r>
+          </a:p>
+          <a:p>
+            <a:pPr>
+              <a:spcBef>
+                <a:spcPts val="800"/>
+              </a:spcBef>
+              <a:defRPr sz="2400" b="1">
                 <a:solidFill>
                   <a:srgbClr val="F3F4F6"/>
                 </a:solidFill>
@@ -3872,7 +5709,136 @@
               </a:defRPr>
             </a:pPr>
             <a:r>
-              <a:t>• Density Crises: Pilgrim density exceeding 4 people/sqm at transition gates and rail hubs.</a:t>
+              <a:t>Dynamic Grid</a:t>
+            </a:r>
+          </a:p>
+          <a:p>
+            <a:pPr>
+              <a:spcBef>
+                <a:spcPts val="800"/>
+              </a:spcBef>
+              <a:defRPr sz="1100">
+                <a:solidFill>
+                  <a:srgbClr val="9CA3AF"/>
+                </a:solidFill>
+                <a:latin typeface="Arial"/>
+              </a:defRPr>
+            </a:pPr>
+            <a:r>
+              <a:t>Floodplain structures, pathways, and pontoon bridges change shape dynamically based on seasonal water levels.</a:t>
+            </a:r>
+          </a:p>
+        </p:txBody>
+      </p:sp>
+      <p:sp>
+        <p:nvSpPr>
+          <p:cNvPr id="8" name="Rectangle 7"/>
+          <p:cNvSpPr/>
+          <p:nvPr/>
+        </p:nvSpPr>
+        <p:spPr>
+          <a:xfrm>
+            <a:off x="8046720" y="2011680"/>
+            <a:ext cx="3200400" cy="3840480"/>
+          </a:xfrm>
+          <a:prstGeom prst="rect">
+            <a:avLst/>
+          </a:prstGeom>
+          <a:solidFill>
+            <a:srgbClr val="111827"/>
+          </a:solidFill>
+          <a:ln w="19050">
+            <a:solidFill>
+              <a:srgbClr val="EF4444"/>
+            </a:solidFill>
+          </a:ln>
+        </p:spPr>
+        <p:style>
+          <a:lnRef idx="1">
+            <a:schemeClr val="accent1"/>
+          </a:lnRef>
+          <a:fillRef idx="3">
+            <a:schemeClr val="accent1"/>
+          </a:fillRef>
+          <a:effectRef idx="2">
+            <a:schemeClr val="accent1"/>
+          </a:effectRef>
+          <a:fontRef idx="minor">
+            <a:schemeClr val="lt1"/>
+          </a:fontRef>
+        </p:style>
+        <p:txBody>
+          <a:bodyPr rtlCol="0" anchor="ctr"/>
+          <a:lstStyle/>
+          <a:p>
+            <a:pPr algn="ctr"/>
+          </a:p>
+        </p:txBody>
+      </p:sp>
+      <p:sp>
+        <p:nvSpPr>
+          <p:cNvPr id="9" name="TextBox 8"/>
+          <p:cNvSpPr txBox="1"/>
+          <p:nvPr/>
+        </p:nvSpPr>
+        <p:spPr>
+          <a:xfrm>
+            <a:off x="8183880" y="2148840"/>
+            <a:ext cx="2926080" cy="3566160"/>
+          </a:xfrm>
+          <a:prstGeom prst="rect">
+            <a:avLst/>
+          </a:prstGeom>
+          <a:noFill/>
+        </p:spPr>
+        <p:txBody>
+          <a:bodyPr wrap="square">
+            <a:spAutoFit/>
+          </a:bodyPr>
+          <a:lstStyle/>
+          <a:p>
+            <a:pPr>
+              <a:defRPr sz="1100" b="1">
+                <a:solidFill>
+                  <a:srgbClr val="EF4444"/>
+                </a:solidFill>
+                <a:latin typeface="Arial"/>
+              </a:defRPr>
+            </a:pPr>
+            <a:r>
+              <a:t>SLA BOTTLENECK</a:t>
+            </a:r>
+          </a:p>
+          <a:p>
+            <a:pPr>
+              <a:spcBef>
+                <a:spcPts val="800"/>
+              </a:spcBef>
+              <a:defRPr sz="2400" b="1">
+                <a:solidFill>
+                  <a:srgbClr val="F3F4F6"/>
+                </a:solidFill>
+                <a:latin typeface="Arial"/>
+              </a:defRPr>
+            </a:pPr>
+            <a:r>
+              <a:t>Density Crisis</a:t>
+            </a:r>
+          </a:p>
+          <a:p>
+            <a:pPr>
+              <a:spcBef>
+                <a:spcPts val="800"/>
+              </a:spcBef>
+              <a:defRPr sz="1100">
+                <a:solidFill>
+                  <a:srgbClr val="9CA3AF"/>
+                </a:solidFill>
+                <a:latin typeface="Arial"/>
+              </a:defRPr>
+            </a:pPr>
+            <a:r>
+              <a:t>Bathing gates and transit terminals exceed 4 people/sqm, triggering extreme crowd surge risks.</a:t>
             </a:r>
           </a:p>
         </p:txBody>
@@ -3911,44 +5877,8 @@
         </p:nvSpPr>
         <p:spPr>
           <a:xfrm>
-            <a:off x="685800" y="457200"/>
-            <a:ext cx="10817352" cy="914400"/>
-          </a:xfrm>
-          <a:prstGeom prst="rect">
-            <a:avLst/>
-          </a:prstGeom>
-          <a:noFill/>
-        </p:spPr>
-        <p:txBody>
-          <a:bodyPr wrap="square" lIns="0" tIns="0">
-            <a:spAutoFit/>
-          </a:bodyPr>
-          <a:lstStyle/>
-          <a:p>
-            <a:pPr>
-              <a:defRPr sz="3600" b="1">
-                <a:solidFill>
-                  <a:srgbClr val="06B6D4"/>
-                </a:solidFill>
-                <a:latin typeface="Arial"/>
-              </a:defRPr>
-            </a:pPr>
-            <a:r>
-              <a:t>Why Traditional Management Fails</a:t>
-            </a:r>
-          </a:p>
-        </p:txBody>
-      </p:sp>
-      <p:sp>
-        <p:nvSpPr>
-          <p:cNvPr id="3" name="TextBox 2"/>
-          <p:cNvSpPr txBox="1"/>
-          <p:nvPr/>
-        </p:nvSpPr>
-        <p:spPr>
-          <a:xfrm>
-            <a:off x="685800" y="1645920"/>
-            <a:ext cx="10817352" cy="4389120"/>
+            <a:off x="685800" y="365760"/>
+            <a:ext cx="10817352" cy="365760"/>
           </a:xfrm>
           <a:prstGeom prst="rect">
             <a:avLst/>
@@ -3962,10 +5892,43 @@
           <a:lstStyle/>
           <a:p>
             <a:pPr>
-              <a:spcAft>
-                <a:spcPts val="2000"/>
-              </a:spcAft>
-              <a:defRPr sz="2000">
+              <a:defRPr sz="1000" b="1">
+                <a:solidFill>
+                  <a:srgbClr val="06B6D4"/>
+                </a:solidFill>
+                <a:latin typeface="Arial"/>
+              </a:defRPr>
+            </a:pPr>
+            <a:r>
+              <a:t>OPERATIONS PARADIGM SHIFT</a:t>
+            </a:r>
+          </a:p>
+        </p:txBody>
+      </p:sp>
+      <p:sp>
+        <p:nvSpPr>
+          <p:cNvPr id="3" name="TextBox 2"/>
+          <p:cNvSpPr txBox="1"/>
+          <p:nvPr/>
+        </p:nvSpPr>
+        <p:spPr>
+          <a:xfrm>
+            <a:off x="685800" y="640080"/>
+            <a:ext cx="10817352" cy="731520"/>
+          </a:xfrm>
+          <a:prstGeom prst="rect">
+            <a:avLst/>
+          </a:prstGeom>
+          <a:noFill/>
+        </p:spPr>
+        <p:txBody>
+          <a:bodyPr wrap="square">
+            <a:spAutoFit/>
+          </a:bodyPr>
+          <a:lstStyle/>
+          <a:p>
+            <a:pPr>
+              <a:defRPr sz="2800" b="1">
                 <a:solidFill>
                   <a:srgbClr val="F3F4F6"/>
                 </a:solidFill>
@@ -3973,31 +5936,148 @@
               </a:defRPr>
             </a:pPr>
             <a:r>
-              <a:t>• Roster Blindness: Static volunteer shifts with no live location, skill, or fatigue tracking.</a:t>
-            </a:r>
-          </a:p>
-          <a:p>
-            <a:pPr>
-              <a:spcAft>
-                <a:spcPts val="2000"/>
-              </a:spcAft>
-              <a:defRPr sz="2000">
+              <a:t>Traditional Management vs. KumbhForce AI</a:t>
+            </a:r>
+          </a:p>
+        </p:txBody>
+      </p:sp>
+      <p:sp>
+        <p:nvSpPr>
+          <p:cNvPr id="4" name="Rounded Rectangle 3"/>
+          <p:cNvSpPr/>
+          <p:nvPr/>
+        </p:nvSpPr>
+        <p:spPr>
+          <a:xfrm>
+            <a:off x="914400" y="1828800"/>
+            <a:ext cx="10332720" cy="365760"/>
+          </a:xfrm>
+          <a:prstGeom prst="roundRect">
+            <a:avLst/>
+          </a:prstGeom>
+          <a:solidFill>
+            <a:srgbClr val="EF4444"/>
+          </a:solidFill>
+          <a:ln>
+            <a:noFill/>
+          </a:ln>
+        </p:spPr>
+        <p:style>
+          <a:lnRef idx="1">
+            <a:schemeClr val="accent1"/>
+          </a:lnRef>
+          <a:fillRef idx="3">
+            <a:schemeClr val="accent1"/>
+          </a:fillRef>
+          <a:effectRef idx="2">
+            <a:schemeClr val="accent1"/>
+          </a:effectRef>
+          <a:fontRef idx="minor">
+            <a:schemeClr val="lt1"/>
+          </a:fontRef>
+        </p:style>
+        <p:txBody>
+          <a:bodyPr rtlCol="0" anchor="ctr"/>
+          <a:lstStyle/>
+          <a:p>
+            <a:pPr algn="ctr">
+              <a:defRPr sz="1100" b="1">
                 <a:solidFill>
                   <a:srgbClr val="F3F4F6"/>
                 </a:solidFill>
-                <a:latin typeface="Arial"/>
-              </a:defRPr>
-            </a:pPr>
-            <a:r>
-              <a:t>• Response Latency: Cascade communication or radio delays introduce a 15+ minute response gap.</a:t>
-            </a:r>
-          </a:p>
-          <a:p>
-            <a:pPr>
-              <a:spcAft>
-                <a:spcPts val="2000"/>
-              </a:spcAft>
-              <a:defRPr sz="2000">
+              </a:defRPr>
+            </a:pPr>
+            <a:r>
+              <a:t>TRADITIONAL REACTIVE LOGISTICS</a:t>
+            </a:r>
+          </a:p>
+        </p:txBody>
+      </p:sp>
+      <p:sp>
+        <p:nvSpPr>
+          <p:cNvPr id="5" name="Rectangle 4"/>
+          <p:cNvSpPr/>
+          <p:nvPr/>
+        </p:nvSpPr>
+        <p:spPr>
+          <a:xfrm>
+            <a:off x="914400" y="2377440"/>
+            <a:ext cx="3200400" cy="1463040"/>
+          </a:xfrm>
+          <a:prstGeom prst="rect">
+            <a:avLst/>
+          </a:prstGeom>
+          <a:solidFill>
+            <a:srgbClr val="111827"/>
+          </a:solidFill>
+          <a:ln w="19050">
+            <a:solidFill>
+              <a:srgbClr val="EF4444"/>
+            </a:solidFill>
+          </a:ln>
+        </p:spPr>
+        <p:style>
+          <a:lnRef idx="1">
+            <a:schemeClr val="accent1"/>
+          </a:lnRef>
+          <a:fillRef idx="3">
+            <a:schemeClr val="accent1"/>
+          </a:fillRef>
+          <a:effectRef idx="2">
+            <a:schemeClr val="accent1"/>
+          </a:effectRef>
+          <a:fontRef idx="minor">
+            <a:schemeClr val="lt1"/>
+          </a:fontRef>
+        </p:style>
+        <p:txBody>
+          <a:bodyPr rtlCol="0" anchor="ctr"/>
+          <a:lstStyle/>
+          <a:p>
+            <a:pPr algn="ctr"/>
+          </a:p>
+        </p:txBody>
+      </p:sp>
+      <p:sp>
+        <p:nvSpPr>
+          <p:cNvPr id="6" name="TextBox 5"/>
+          <p:cNvSpPr txBox="1"/>
+          <p:nvPr/>
+        </p:nvSpPr>
+        <p:spPr>
+          <a:xfrm>
+            <a:off x="1051560" y="2514600"/>
+            <a:ext cx="2926080" cy="1188720"/>
+          </a:xfrm>
+          <a:prstGeom prst="rect">
+            <a:avLst/>
+          </a:prstGeom>
+          <a:noFill/>
+        </p:spPr>
+        <p:txBody>
+          <a:bodyPr wrap="square">
+            <a:spAutoFit/>
+          </a:bodyPr>
+          <a:lstStyle/>
+          <a:p>
+            <a:pPr>
+              <a:defRPr sz="1100" b="1">
+                <a:solidFill>
+                  <a:srgbClr val="EF4444"/>
+                </a:solidFill>
+                <a:latin typeface="Arial"/>
+              </a:defRPr>
+            </a:pPr>
+            <a:r>
+              <a:t>ROSTER BLINDNESS</a:t>
+            </a:r>
+          </a:p>
+          <a:p>
+            <a:pPr>
+              <a:spcBef>
+                <a:spcPts val="800"/>
+              </a:spcBef>
+              <a:defRPr sz="2400" b="1">
                 <a:solidFill>
                   <a:srgbClr val="F3F4F6"/>
                 </a:solidFill>
@@ -4005,7 +6085,812 @@
               </a:defRPr>
             </a:pPr>
             <a:r>
-              <a:t>• Reactive Posture: Command centers react to crises only after bottlenecks materialize.</a:t>
+              <a:t>Static Shifts</a:t>
+            </a:r>
+          </a:p>
+          <a:p>
+            <a:pPr>
+              <a:spcBef>
+                <a:spcPts val="800"/>
+              </a:spcBef>
+              <a:defRPr sz="1100">
+                <a:solidFill>
+                  <a:srgbClr val="9CA3AF"/>
+                </a:solidFill>
+                <a:latin typeface="Arial"/>
+              </a:defRPr>
+            </a:pPr>
+            <a:r>
+              <a:t>No tracking of fatigue, location, or active responder skill levels.</a:t>
+            </a:r>
+          </a:p>
+        </p:txBody>
+      </p:sp>
+      <p:sp>
+        <p:nvSpPr>
+          <p:cNvPr id="7" name="Right Arrow 6"/>
+          <p:cNvSpPr/>
+          <p:nvPr/>
+        </p:nvSpPr>
+        <p:spPr>
+          <a:xfrm>
+            <a:off x="4206240" y="2926080"/>
+            <a:ext cx="182880" cy="365760"/>
+          </a:xfrm>
+          <a:prstGeom prst="rightArrow">
+            <a:avLst/>
+          </a:prstGeom>
+          <a:solidFill>
+            <a:srgbClr val="EF4444"/>
+          </a:solidFill>
+          <a:ln>
+            <a:noFill/>
+          </a:ln>
+        </p:spPr>
+        <p:style>
+          <a:lnRef idx="1">
+            <a:schemeClr val="accent1"/>
+          </a:lnRef>
+          <a:fillRef idx="3">
+            <a:schemeClr val="accent1"/>
+          </a:fillRef>
+          <a:effectRef idx="2">
+            <a:schemeClr val="accent1"/>
+          </a:effectRef>
+          <a:fontRef idx="minor">
+            <a:schemeClr val="lt1"/>
+          </a:fontRef>
+        </p:style>
+        <p:txBody>
+          <a:bodyPr rtlCol="0" anchor="ctr"/>
+          <a:lstStyle/>
+          <a:p>
+            <a:pPr algn="ctr"/>
+          </a:p>
+        </p:txBody>
+      </p:sp>
+      <p:sp>
+        <p:nvSpPr>
+          <p:cNvPr id="8" name="Rectangle 7"/>
+          <p:cNvSpPr/>
+          <p:nvPr/>
+        </p:nvSpPr>
+        <p:spPr>
+          <a:xfrm>
+            <a:off x="4480560" y="2377440"/>
+            <a:ext cx="3200400" cy="1463040"/>
+          </a:xfrm>
+          <a:prstGeom prst="rect">
+            <a:avLst/>
+          </a:prstGeom>
+          <a:solidFill>
+            <a:srgbClr val="111827"/>
+          </a:solidFill>
+          <a:ln w="19050">
+            <a:solidFill>
+              <a:srgbClr val="EF4444"/>
+            </a:solidFill>
+          </a:ln>
+        </p:spPr>
+        <p:style>
+          <a:lnRef idx="1">
+            <a:schemeClr val="accent1"/>
+          </a:lnRef>
+          <a:fillRef idx="3">
+            <a:schemeClr val="accent1"/>
+          </a:fillRef>
+          <a:effectRef idx="2">
+            <a:schemeClr val="accent1"/>
+          </a:effectRef>
+          <a:fontRef idx="minor">
+            <a:schemeClr val="lt1"/>
+          </a:fontRef>
+        </p:style>
+        <p:txBody>
+          <a:bodyPr rtlCol="0" anchor="ctr"/>
+          <a:lstStyle/>
+          <a:p>
+            <a:pPr algn="ctr"/>
+          </a:p>
+        </p:txBody>
+      </p:sp>
+      <p:sp>
+        <p:nvSpPr>
+          <p:cNvPr id="9" name="TextBox 8"/>
+          <p:cNvSpPr txBox="1"/>
+          <p:nvPr/>
+        </p:nvSpPr>
+        <p:spPr>
+          <a:xfrm>
+            <a:off x="4617720" y="2514600"/>
+            <a:ext cx="2926080" cy="1188720"/>
+          </a:xfrm>
+          <a:prstGeom prst="rect">
+            <a:avLst/>
+          </a:prstGeom>
+          <a:noFill/>
+        </p:spPr>
+        <p:txBody>
+          <a:bodyPr wrap="square">
+            <a:spAutoFit/>
+          </a:bodyPr>
+          <a:lstStyle/>
+          <a:p>
+            <a:pPr>
+              <a:defRPr sz="1100" b="1">
+                <a:solidFill>
+                  <a:srgbClr val="EF4444"/>
+                </a:solidFill>
+                <a:latin typeface="Arial"/>
+              </a:defRPr>
+            </a:pPr>
+            <a:r>
+              <a:t>COMMUNICATION GAP</a:t>
+            </a:r>
+          </a:p>
+          <a:p>
+            <a:pPr>
+              <a:spcBef>
+                <a:spcPts val="800"/>
+              </a:spcBef>
+              <a:defRPr sz="2400" b="1">
+                <a:solidFill>
+                  <a:srgbClr val="F3F4F6"/>
+                </a:solidFill>
+                <a:latin typeface="Arial"/>
+              </a:defRPr>
+            </a:pPr>
+            <a:r>
+              <a:t>Radio Delays</a:t>
+            </a:r>
+          </a:p>
+          <a:p>
+            <a:pPr>
+              <a:spcBef>
+                <a:spcPts val="800"/>
+              </a:spcBef>
+              <a:defRPr sz="1100">
+                <a:solidFill>
+                  <a:srgbClr val="9CA3AF"/>
+                </a:solidFill>
+                <a:latin typeface="Arial"/>
+              </a:defRPr>
+            </a:pPr>
+            <a:r>
+              <a:t>15+ minute dispatch gaps via voice calls and cascading radio trees.</a:t>
+            </a:r>
+          </a:p>
+        </p:txBody>
+      </p:sp>
+      <p:sp>
+        <p:nvSpPr>
+          <p:cNvPr id="10" name="Right Arrow 9"/>
+          <p:cNvSpPr/>
+          <p:nvPr/>
+        </p:nvSpPr>
+        <p:spPr>
+          <a:xfrm>
+            <a:off x="7772400" y="2926080"/>
+            <a:ext cx="182880" cy="365760"/>
+          </a:xfrm>
+          <a:prstGeom prst="rightArrow">
+            <a:avLst/>
+          </a:prstGeom>
+          <a:solidFill>
+            <a:srgbClr val="EF4444"/>
+          </a:solidFill>
+          <a:ln>
+            <a:noFill/>
+          </a:ln>
+        </p:spPr>
+        <p:style>
+          <a:lnRef idx="1">
+            <a:schemeClr val="accent1"/>
+          </a:lnRef>
+          <a:fillRef idx="3">
+            <a:schemeClr val="accent1"/>
+          </a:fillRef>
+          <a:effectRef idx="2">
+            <a:schemeClr val="accent1"/>
+          </a:effectRef>
+          <a:fontRef idx="minor">
+            <a:schemeClr val="lt1"/>
+          </a:fontRef>
+        </p:style>
+        <p:txBody>
+          <a:bodyPr rtlCol="0" anchor="ctr"/>
+          <a:lstStyle/>
+          <a:p>
+            <a:pPr algn="ctr"/>
+          </a:p>
+        </p:txBody>
+      </p:sp>
+      <p:sp>
+        <p:nvSpPr>
+          <p:cNvPr id="11" name="Rectangle 10"/>
+          <p:cNvSpPr/>
+          <p:nvPr/>
+        </p:nvSpPr>
+        <p:spPr>
+          <a:xfrm>
+            <a:off x="8046720" y="2377440"/>
+            <a:ext cx="3200400" cy="1463040"/>
+          </a:xfrm>
+          <a:prstGeom prst="rect">
+            <a:avLst/>
+          </a:prstGeom>
+          <a:solidFill>
+            <a:srgbClr val="111827"/>
+          </a:solidFill>
+          <a:ln w="19050">
+            <a:solidFill>
+              <a:srgbClr val="EF4444"/>
+            </a:solidFill>
+          </a:ln>
+        </p:spPr>
+        <p:style>
+          <a:lnRef idx="1">
+            <a:schemeClr val="accent1"/>
+          </a:lnRef>
+          <a:fillRef idx="3">
+            <a:schemeClr val="accent1"/>
+          </a:fillRef>
+          <a:effectRef idx="2">
+            <a:schemeClr val="accent1"/>
+          </a:effectRef>
+          <a:fontRef idx="minor">
+            <a:schemeClr val="lt1"/>
+          </a:fontRef>
+        </p:style>
+        <p:txBody>
+          <a:bodyPr rtlCol="0" anchor="ctr"/>
+          <a:lstStyle/>
+          <a:p>
+            <a:pPr algn="ctr"/>
+          </a:p>
+        </p:txBody>
+      </p:sp>
+      <p:sp>
+        <p:nvSpPr>
+          <p:cNvPr id="12" name="TextBox 11"/>
+          <p:cNvSpPr txBox="1"/>
+          <p:nvPr/>
+        </p:nvSpPr>
+        <p:spPr>
+          <a:xfrm>
+            <a:off x="8183880" y="2514600"/>
+            <a:ext cx="2926080" cy="1188720"/>
+          </a:xfrm>
+          <a:prstGeom prst="rect">
+            <a:avLst/>
+          </a:prstGeom>
+          <a:noFill/>
+        </p:spPr>
+        <p:txBody>
+          <a:bodyPr wrap="square">
+            <a:spAutoFit/>
+          </a:bodyPr>
+          <a:lstStyle/>
+          <a:p>
+            <a:pPr>
+              <a:defRPr sz="1100" b="1">
+                <a:solidFill>
+                  <a:srgbClr val="EF4444"/>
+                </a:solidFill>
+                <a:latin typeface="Arial"/>
+              </a:defRPr>
+            </a:pPr>
+            <a:r>
+              <a:t>CRISIS RESPONSE</a:t>
+            </a:r>
+          </a:p>
+          <a:p>
+            <a:pPr>
+              <a:spcBef>
+                <a:spcPts val="800"/>
+              </a:spcBef>
+              <a:defRPr sz="2400" b="1">
+                <a:solidFill>
+                  <a:srgbClr val="F3F4F6"/>
+                </a:solidFill>
+                <a:latin typeface="Arial"/>
+              </a:defRPr>
+            </a:pPr>
+            <a:r>
+              <a:t>Reactive Mode</a:t>
+            </a:r>
+          </a:p>
+          <a:p>
+            <a:pPr>
+              <a:spcBef>
+                <a:spcPts val="800"/>
+              </a:spcBef>
+              <a:defRPr sz="1100">
+                <a:solidFill>
+                  <a:srgbClr val="9CA3AF"/>
+                </a:solidFill>
+                <a:latin typeface="Arial"/>
+              </a:defRPr>
+            </a:pPr>
+            <a:r>
+              <a:t>Personnel deployed only after safety bottlenecks or medical emergencies materialize.</a:t>
+            </a:r>
+          </a:p>
+        </p:txBody>
+      </p:sp>
+      <p:sp>
+        <p:nvSpPr>
+          <p:cNvPr id="13" name="Rounded Rectangle 12"/>
+          <p:cNvSpPr/>
+          <p:nvPr/>
+        </p:nvSpPr>
+        <p:spPr>
+          <a:xfrm>
+            <a:off x="914400" y="4206240"/>
+            <a:ext cx="10332720" cy="365760"/>
+          </a:xfrm>
+          <a:prstGeom prst="roundRect">
+            <a:avLst/>
+          </a:prstGeom>
+          <a:solidFill>
+            <a:srgbClr val="10B981"/>
+          </a:solidFill>
+          <a:ln>
+            <a:noFill/>
+          </a:ln>
+        </p:spPr>
+        <p:style>
+          <a:lnRef idx="1">
+            <a:schemeClr val="accent1"/>
+          </a:lnRef>
+          <a:fillRef idx="3">
+            <a:schemeClr val="accent1"/>
+          </a:fillRef>
+          <a:effectRef idx="2">
+            <a:schemeClr val="accent1"/>
+          </a:effectRef>
+          <a:fontRef idx="minor">
+            <a:schemeClr val="lt1"/>
+          </a:fontRef>
+        </p:style>
+        <p:txBody>
+          <a:bodyPr rtlCol="0" anchor="ctr"/>
+          <a:lstStyle/>
+          <a:p>
+            <a:pPr algn="ctr">
+              <a:defRPr sz="1100" b="1">
+                <a:solidFill>
+                  <a:srgbClr val="F3F4F6"/>
+                </a:solidFill>
+              </a:defRPr>
+            </a:pPr>
+            <a:r>
+              <a:t>KUMBHFORCE AI PROACTIVE INTELLIGENCE</a:t>
+            </a:r>
+          </a:p>
+        </p:txBody>
+      </p:sp>
+      <p:sp>
+        <p:nvSpPr>
+          <p:cNvPr id="14" name="Rectangle 13"/>
+          <p:cNvSpPr/>
+          <p:nvPr/>
+        </p:nvSpPr>
+        <p:spPr>
+          <a:xfrm>
+            <a:off x="914400" y="4754880"/>
+            <a:ext cx="3200400" cy="1463040"/>
+          </a:xfrm>
+          <a:prstGeom prst="rect">
+            <a:avLst/>
+          </a:prstGeom>
+          <a:solidFill>
+            <a:srgbClr val="111827"/>
+          </a:solidFill>
+          <a:ln w="19050">
+            <a:solidFill>
+              <a:srgbClr val="10B981"/>
+            </a:solidFill>
+          </a:ln>
+        </p:spPr>
+        <p:style>
+          <a:lnRef idx="1">
+            <a:schemeClr val="accent1"/>
+          </a:lnRef>
+          <a:fillRef idx="3">
+            <a:schemeClr val="accent1"/>
+          </a:fillRef>
+          <a:effectRef idx="2">
+            <a:schemeClr val="accent1"/>
+          </a:effectRef>
+          <a:fontRef idx="minor">
+            <a:schemeClr val="lt1"/>
+          </a:fontRef>
+        </p:style>
+        <p:txBody>
+          <a:bodyPr rtlCol="0" anchor="ctr"/>
+          <a:lstStyle/>
+          <a:p>
+            <a:pPr algn="ctr"/>
+          </a:p>
+        </p:txBody>
+      </p:sp>
+      <p:sp>
+        <p:nvSpPr>
+          <p:cNvPr id="15" name="TextBox 14"/>
+          <p:cNvSpPr txBox="1"/>
+          <p:nvPr/>
+        </p:nvSpPr>
+        <p:spPr>
+          <a:xfrm>
+            <a:off x="1051560" y="4892040"/>
+            <a:ext cx="2926080" cy="1188720"/>
+          </a:xfrm>
+          <a:prstGeom prst="rect">
+            <a:avLst/>
+          </a:prstGeom>
+          <a:noFill/>
+        </p:spPr>
+        <p:txBody>
+          <a:bodyPr wrap="square">
+            <a:spAutoFit/>
+          </a:bodyPr>
+          <a:lstStyle/>
+          <a:p>
+            <a:pPr>
+              <a:defRPr sz="1100" b="1">
+                <a:solidFill>
+                  <a:srgbClr val="10B981"/>
+                </a:solidFill>
+                <a:latin typeface="Arial"/>
+              </a:defRPr>
+            </a:pPr>
+            <a:r>
+              <a:t>UNIFIED HUD</a:t>
+            </a:r>
+          </a:p>
+          <a:p>
+            <a:pPr>
+              <a:spcBef>
+                <a:spcPts val="800"/>
+              </a:spcBef>
+              <a:defRPr sz="2400" b="1">
+                <a:solidFill>
+                  <a:srgbClr val="F3F4F6"/>
+                </a:solidFill>
+                <a:latin typeface="Arial"/>
+              </a:defRPr>
+            </a:pPr>
+            <a:r>
+              <a:t>Digital Twin</a:t>
+            </a:r>
+          </a:p>
+          <a:p>
+            <a:pPr>
+              <a:spcBef>
+                <a:spcPts val="800"/>
+              </a:spcBef>
+              <a:defRPr sz="1100">
+                <a:solidFill>
+                  <a:srgbClr val="9CA3AF"/>
+                </a:solidFill>
+                <a:latin typeface="Arial"/>
+              </a:defRPr>
+            </a:pPr>
+            <a:r>
+              <a:t>Live spatial visualization of 12 sectors with active telemetry.</a:t>
+            </a:r>
+          </a:p>
+        </p:txBody>
+      </p:sp>
+      <p:sp>
+        <p:nvSpPr>
+          <p:cNvPr id="16" name="Right Arrow 15"/>
+          <p:cNvSpPr/>
+          <p:nvPr/>
+        </p:nvSpPr>
+        <p:spPr>
+          <a:xfrm>
+            <a:off x="4206240" y="5303520"/>
+            <a:ext cx="182880" cy="365760"/>
+          </a:xfrm>
+          <a:prstGeom prst="rightArrow">
+            <a:avLst/>
+          </a:prstGeom>
+          <a:solidFill>
+            <a:srgbClr val="10B981"/>
+          </a:solidFill>
+          <a:ln>
+            <a:noFill/>
+          </a:ln>
+        </p:spPr>
+        <p:style>
+          <a:lnRef idx="1">
+            <a:schemeClr val="accent1"/>
+          </a:lnRef>
+          <a:fillRef idx="3">
+            <a:schemeClr val="accent1"/>
+          </a:fillRef>
+          <a:effectRef idx="2">
+            <a:schemeClr val="accent1"/>
+          </a:effectRef>
+          <a:fontRef idx="minor">
+            <a:schemeClr val="lt1"/>
+          </a:fontRef>
+        </p:style>
+        <p:txBody>
+          <a:bodyPr rtlCol="0" anchor="ctr"/>
+          <a:lstStyle/>
+          <a:p>
+            <a:pPr algn="ctr"/>
+          </a:p>
+        </p:txBody>
+      </p:sp>
+      <p:sp>
+        <p:nvSpPr>
+          <p:cNvPr id="17" name="Rectangle 16"/>
+          <p:cNvSpPr/>
+          <p:nvPr/>
+        </p:nvSpPr>
+        <p:spPr>
+          <a:xfrm>
+            <a:off x="4480560" y="4754880"/>
+            <a:ext cx="3200400" cy="1463040"/>
+          </a:xfrm>
+          <a:prstGeom prst="rect">
+            <a:avLst/>
+          </a:prstGeom>
+          <a:solidFill>
+            <a:srgbClr val="111827"/>
+          </a:solidFill>
+          <a:ln w="19050">
+            <a:solidFill>
+              <a:srgbClr val="10B981"/>
+            </a:solidFill>
+          </a:ln>
+        </p:spPr>
+        <p:style>
+          <a:lnRef idx="1">
+            <a:schemeClr val="accent1"/>
+          </a:lnRef>
+          <a:fillRef idx="3">
+            <a:schemeClr val="accent1"/>
+          </a:fillRef>
+          <a:effectRef idx="2">
+            <a:schemeClr val="accent1"/>
+          </a:effectRef>
+          <a:fontRef idx="minor">
+            <a:schemeClr val="lt1"/>
+          </a:fontRef>
+        </p:style>
+        <p:txBody>
+          <a:bodyPr rtlCol="0" anchor="ctr"/>
+          <a:lstStyle/>
+          <a:p>
+            <a:pPr algn="ctr"/>
+          </a:p>
+        </p:txBody>
+      </p:sp>
+      <p:sp>
+        <p:nvSpPr>
+          <p:cNvPr id="18" name="TextBox 17"/>
+          <p:cNvSpPr txBox="1"/>
+          <p:nvPr/>
+        </p:nvSpPr>
+        <p:spPr>
+          <a:xfrm>
+            <a:off x="4617720" y="4892040"/>
+            <a:ext cx="2926080" cy="1188720"/>
+          </a:xfrm>
+          <a:prstGeom prst="rect">
+            <a:avLst/>
+          </a:prstGeom>
+          <a:noFill/>
+        </p:spPr>
+        <p:txBody>
+          <a:bodyPr wrap="square">
+            <a:spAutoFit/>
+          </a:bodyPr>
+          <a:lstStyle/>
+          <a:p>
+            <a:pPr>
+              <a:defRPr sz="1100" b="1">
+                <a:solidFill>
+                  <a:srgbClr val="10B981"/>
+                </a:solidFill>
+                <a:latin typeface="Arial"/>
+              </a:defRPr>
+            </a:pPr>
+            <a:r>
+              <a:t>ROSTER OPTIMIZATION</a:t>
+            </a:r>
+          </a:p>
+          <a:p>
+            <a:pPr>
+              <a:spcBef>
+                <a:spcPts val="800"/>
+              </a:spcBef>
+              <a:defRPr sz="2400" b="1">
+                <a:solidFill>
+                  <a:srgbClr val="F3F4F6"/>
+                </a:solidFill>
+                <a:latin typeface="Arial"/>
+              </a:defRPr>
+            </a:pPr>
+            <a:r>
+              <a:t>Linear Program</a:t>
+            </a:r>
+          </a:p>
+          <a:p>
+            <a:pPr>
+              <a:spcBef>
+                <a:spcPts val="800"/>
+              </a:spcBef>
+              <a:defRPr sz="1100">
+                <a:solidFill>
+                  <a:srgbClr val="9CA3AF"/>
+                </a:solidFill>
+                <a:latin typeface="Arial"/>
+              </a:defRPr>
+            </a:pPr>
+            <a:r>
+              <a:t>Constraint matching solver balances proximity, skills, and fatigue.</a:t>
+            </a:r>
+          </a:p>
+        </p:txBody>
+      </p:sp>
+      <p:sp>
+        <p:nvSpPr>
+          <p:cNvPr id="19" name="Right Arrow 18"/>
+          <p:cNvSpPr/>
+          <p:nvPr/>
+        </p:nvSpPr>
+        <p:spPr>
+          <a:xfrm>
+            <a:off x="7772400" y="5303520"/>
+            <a:ext cx="182880" cy="365760"/>
+          </a:xfrm>
+          <a:prstGeom prst="rightArrow">
+            <a:avLst/>
+          </a:prstGeom>
+          <a:solidFill>
+            <a:srgbClr val="10B981"/>
+          </a:solidFill>
+          <a:ln>
+            <a:noFill/>
+          </a:ln>
+        </p:spPr>
+        <p:style>
+          <a:lnRef idx="1">
+            <a:schemeClr val="accent1"/>
+          </a:lnRef>
+          <a:fillRef idx="3">
+            <a:schemeClr val="accent1"/>
+          </a:fillRef>
+          <a:effectRef idx="2">
+            <a:schemeClr val="accent1"/>
+          </a:effectRef>
+          <a:fontRef idx="minor">
+            <a:schemeClr val="lt1"/>
+          </a:fontRef>
+        </p:style>
+        <p:txBody>
+          <a:bodyPr rtlCol="0" anchor="ctr"/>
+          <a:lstStyle/>
+          <a:p>
+            <a:pPr algn="ctr"/>
+          </a:p>
+        </p:txBody>
+      </p:sp>
+      <p:sp>
+        <p:nvSpPr>
+          <p:cNvPr id="20" name="Rectangle 19"/>
+          <p:cNvSpPr/>
+          <p:nvPr/>
+        </p:nvSpPr>
+        <p:spPr>
+          <a:xfrm>
+            <a:off x="8046720" y="4754880"/>
+            <a:ext cx="3200400" cy="1463040"/>
+          </a:xfrm>
+          <a:prstGeom prst="rect">
+            <a:avLst/>
+          </a:prstGeom>
+          <a:solidFill>
+            <a:srgbClr val="111827"/>
+          </a:solidFill>
+          <a:ln w="19050">
+            <a:solidFill>
+              <a:srgbClr val="10B981"/>
+            </a:solidFill>
+          </a:ln>
+        </p:spPr>
+        <p:style>
+          <a:lnRef idx="1">
+            <a:schemeClr val="accent1"/>
+          </a:lnRef>
+          <a:fillRef idx="3">
+            <a:schemeClr val="accent1"/>
+          </a:fillRef>
+          <a:effectRef idx="2">
+            <a:schemeClr val="accent1"/>
+          </a:effectRef>
+          <a:fontRef idx="minor">
+            <a:schemeClr val="lt1"/>
+          </a:fontRef>
+        </p:style>
+        <p:txBody>
+          <a:bodyPr rtlCol="0" anchor="ctr"/>
+          <a:lstStyle/>
+          <a:p>
+            <a:pPr algn="ctr"/>
+          </a:p>
+        </p:txBody>
+      </p:sp>
+      <p:sp>
+        <p:nvSpPr>
+          <p:cNvPr id="21" name="TextBox 20"/>
+          <p:cNvSpPr txBox="1"/>
+          <p:nvPr/>
+        </p:nvSpPr>
+        <p:spPr>
+          <a:xfrm>
+            <a:off x="8183880" y="4892040"/>
+            <a:ext cx="2926080" cy="1188720"/>
+          </a:xfrm>
+          <a:prstGeom prst="rect">
+            <a:avLst/>
+          </a:prstGeom>
+          <a:noFill/>
+        </p:spPr>
+        <p:txBody>
+          <a:bodyPr wrap="square">
+            <a:spAutoFit/>
+          </a:bodyPr>
+          <a:lstStyle/>
+          <a:p>
+            <a:pPr>
+              <a:defRPr sz="1100" b="1">
+                <a:solidFill>
+                  <a:srgbClr val="10B981"/>
+                </a:solidFill>
+                <a:latin typeface="Arial"/>
+              </a:defRPr>
+            </a:pPr>
+            <a:r>
+              <a:t>RISK MITIGATION</a:t>
+            </a:r>
+          </a:p>
+          <a:p>
+            <a:pPr>
+              <a:spcBef>
+                <a:spcPts val="800"/>
+              </a:spcBef>
+              <a:defRPr sz="2400" b="1">
+                <a:solidFill>
+                  <a:srgbClr val="F3F4F6"/>
+                </a:solidFill>
+                <a:latin typeface="Arial"/>
+              </a:defRPr>
+            </a:pPr>
+            <a:r>
+              <a:t>Predictive Prevention</a:t>
+            </a:r>
+          </a:p>
+          <a:p>
+            <a:pPr>
+              <a:spcBef>
+                <a:spcPts val="800"/>
+              </a:spcBef>
+              <a:defRPr sz="1100">
+                <a:solidFill>
+                  <a:srgbClr val="9CA3AF"/>
+                </a:solidFill>
+                <a:latin typeface="Arial"/>
+              </a:defRPr>
+            </a:pPr>
+            <a:r>
+              <a:t>Simulation sandbox tracks risk indices to deploy help before issues rise.</a:t>
             </a:r>
           </a:p>
         </p:txBody>
@@ -4044,44 +6929,8 @@
         </p:nvSpPr>
         <p:spPr>
           <a:xfrm>
-            <a:off x="685800" y="457200"/>
-            <a:ext cx="10817352" cy="914400"/>
-          </a:xfrm>
-          <a:prstGeom prst="rect">
-            <a:avLst/>
-          </a:prstGeom>
-          <a:noFill/>
-        </p:spPr>
-        <p:txBody>
-          <a:bodyPr wrap="square" lIns="0" tIns="0">
-            <a:spAutoFit/>
-          </a:bodyPr>
-          <a:lstStyle/>
-          <a:p>
-            <a:pPr>
-              <a:defRPr sz="3600" b="1">
-                <a:solidFill>
-                  <a:srgbClr val="06B6D4"/>
-                </a:solidFill>
-                <a:latin typeface="Arial"/>
-              </a:defRPr>
-            </a:pPr>
-            <a:r>
-              <a:t>KumbhForce AI: Command Redefined</a:t>
-            </a:r>
-          </a:p>
-        </p:txBody>
-      </p:sp>
-      <p:sp>
-        <p:nvSpPr>
-          <p:cNvPr id="3" name="TextBox 2"/>
-          <p:cNvSpPr txBox="1"/>
-          <p:nvPr/>
-        </p:nvSpPr>
-        <p:spPr>
-          <a:xfrm>
-            <a:off x="685800" y="1645920"/>
-            <a:ext cx="10817352" cy="4389120"/>
+            <a:off x="685800" y="365760"/>
+            <a:ext cx="10817352" cy="365760"/>
           </a:xfrm>
           <a:prstGeom prst="rect">
             <a:avLst/>
@@ -4095,10 +6944,43 @@
           <a:lstStyle/>
           <a:p>
             <a:pPr>
-              <a:spcAft>
-                <a:spcPts val="2000"/>
-              </a:spcAft>
-              <a:defRPr sz="2000">
+              <a:defRPr sz="1000" b="1">
+                <a:solidFill>
+                  <a:srgbClr val="06B6D4"/>
+                </a:solidFill>
+                <a:latin typeface="Arial"/>
+              </a:defRPr>
+            </a:pPr>
+            <a:r>
+              <a:t>DATA INGESTION &amp; OPTIMIZATION FLOW</a:t>
+            </a:r>
+          </a:p>
+        </p:txBody>
+      </p:sp>
+      <p:sp>
+        <p:nvSpPr>
+          <p:cNvPr id="3" name="TextBox 2"/>
+          <p:cNvSpPr txBox="1"/>
+          <p:nvPr/>
+        </p:nvSpPr>
+        <p:spPr>
+          <a:xfrm>
+            <a:off x="685800" y="640080"/>
+            <a:ext cx="10817352" cy="731520"/>
+          </a:xfrm>
+          <a:prstGeom prst="rect">
+            <a:avLst/>
+          </a:prstGeom>
+          <a:noFill/>
+        </p:spPr>
+        <p:txBody>
+          <a:bodyPr wrap="square">
+            <a:spAutoFit/>
+          </a:bodyPr>
+          <a:lstStyle/>
+          <a:p>
+            <a:pPr>
+              <a:defRPr sz="2800" b="1">
                 <a:solidFill>
                   <a:srgbClr val="F3F4F6"/>
                 </a:solidFill>
@@ -4106,15 +6988,54 @@
               </a:defRPr>
             </a:pPr>
             <a:r>
-              <a:t>• Digital Twin Telemetry: Live spatial tracking of all 12 active sectors of the Mahakumbh floodplain.</a:t>
-            </a:r>
-          </a:p>
-          <a:p>
-            <a:pPr>
-              <a:spcAft>
-                <a:spcPts val="2000"/>
-              </a:spcAft>
-              <a:defRPr sz="2000">
+              <a:t>Operations System Architecture Pipeline</a:t>
+            </a:r>
+          </a:p>
+        </p:txBody>
+      </p:sp>
+      <p:sp>
+        <p:nvSpPr>
+          <p:cNvPr id="4" name="Rectangle 3"/>
+          <p:cNvSpPr/>
+          <p:nvPr/>
+        </p:nvSpPr>
+        <p:spPr>
+          <a:xfrm>
+            <a:off x="1371600" y="1828800"/>
+            <a:ext cx="9445752" cy="731520"/>
+          </a:xfrm>
+          <a:prstGeom prst="rect">
+            <a:avLst/>
+          </a:prstGeom>
+          <a:solidFill>
+            <a:srgbClr val="111827"/>
+          </a:solidFill>
+          <a:ln w="19050">
+            <a:solidFill>
+              <a:srgbClr val="06B6D4"/>
+            </a:solidFill>
+          </a:ln>
+        </p:spPr>
+        <p:style>
+          <a:lnRef idx="1">
+            <a:schemeClr val="accent1"/>
+          </a:lnRef>
+          <a:fillRef idx="3">
+            <a:schemeClr val="accent1"/>
+          </a:fillRef>
+          <a:effectRef idx="2">
+            <a:schemeClr val="accent1"/>
+          </a:effectRef>
+          <a:fontRef idx="minor">
+            <a:schemeClr val="lt1"/>
+          </a:fontRef>
+        </p:style>
+        <p:txBody>
+          <a:bodyPr rtlCol="0" anchor="ctr" wrap="square"/>
+          <a:lstStyle/>
+          <a:p>
+            <a:pPr algn="ctr">
+              <a:defRPr sz="1400" b="1">
                 <a:solidFill>
                   <a:srgbClr val="F3F4F6"/>
                 </a:solidFill>
@@ -4122,15 +7043,97 @@
               </a:defRPr>
             </a:pPr>
             <a:r>
-              <a:t>• Constraint-Aware Solver: Linear program matching volunteers by proximity, skillsets, and fatigue.</a:t>
-            </a:r>
-          </a:p>
-          <a:p>
-            <a:pPr>
-              <a:spcAft>
-                <a:spcPts val="2000"/>
-              </a:spcAft>
-              <a:defRPr sz="2000">
+              <a:t>1. TELEMETRY INGRESS  ·  GPS coordinates, pilgrim density sensors, and incident triggers</a:t>
+            </a:r>
+          </a:p>
+        </p:txBody>
+      </p:sp>
+      <p:sp>
+        <p:nvSpPr>
+          <p:cNvPr id="5" name="Down Arrow 4"/>
+          <p:cNvSpPr/>
+          <p:nvPr/>
+        </p:nvSpPr>
+        <p:spPr>
+          <a:xfrm>
+            <a:off x="5852160" y="2560320"/>
+            <a:ext cx="457200" cy="411480"/>
+          </a:xfrm>
+          <a:prstGeom prst="downArrow">
+            <a:avLst/>
+          </a:prstGeom>
+          <a:solidFill>
+            <a:srgbClr val="06B6D4"/>
+          </a:solidFill>
+          <a:ln>
+            <a:noFill/>
+          </a:ln>
+        </p:spPr>
+        <p:style>
+          <a:lnRef idx="1">
+            <a:schemeClr val="accent1"/>
+          </a:lnRef>
+          <a:fillRef idx="3">
+            <a:schemeClr val="accent1"/>
+          </a:fillRef>
+          <a:effectRef idx="2">
+            <a:schemeClr val="accent1"/>
+          </a:effectRef>
+          <a:fontRef idx="minor">
+            <a:schemeClr val="lt1"/>
+          </a:fontRef>
+        </p:style>
+        <p:txBody>
+          <a:bodyPr rtlCol="0" anchor="ctr"/>
+          <a:lstStyle/>
+          <a:p>
+            <a:pPr algn="ctr"/>
+          </a:p>
+        </p:txBody>
+      </p:sp>
+      <p:sp>
+        <p:nvSpPr>
+          <p:cNvPr id="6" name="Rectangle 5"/>
+          <p:cNvSpPr/>
+          <p:nvPr/>
+        </p:nvSpPr>
+        <p:spPr>
+          <a:xfrm>
+            <a:off x="1371600" y="2971800"/>
+            <a:ext cx="9445752" cy="731520"/>
+          </a:xfrm>
+          <a:prstGeom prst="rect">
+            <a:avLst/>
+          </a:prstGeom>
+          <a:solidFill>
+            <a:srgbClr val="111827"/>
+          </a:solidFill>
+          <a:ln w="19050">
+            <a:solidFill>
+              <a:srgbClr val="06B6D4"/>
+            </a:solidFill>
+          </a:ln>
+        </p:spPr>
+        <p:style>
+          <a:lnRef idx="1">
+            <a:schemeClr val="accent1"/>
+          </a:lnRef>
+          <a:fillRef idx="3">
+            <a:schemeClr val="accent1"/>
+          </a:fillRef>
+          <a:effectRef idx="2">
+            <a:schemeClr val="accent1"/>
+          </a:effectRef>
+          <a:fontRef idx="minor">
+            <a:schemeClr val="lt1"/>
+          </a:fontRef>
+        </p:style>
+        <p:txBody>
+          <a:bodyPr rtlCol="0" anchor="ctr" wrap="square"/>
+          <a:lstStyle/>
+          <a:p>
+            <a:pPr algn="ctr">
+              <a:defRPr sz="1400" b="1">
                 <a:solidFill>
                   <a:srgbClr val="F3F4F6"/>
                 </a:solidFill>
@@ -4138,7 +7141,203 @@
               </a:defRPr>
             </a:pPr>
             <a:r>
-              <a:t>• Simulation Sandbox: Run Monte Carlo scenarios to stress-test capacity and generate briefings.</a:t>
+              <a:t>2. AI DECISION LAYER  ·  Threat score calculator and sector priority ranker</a:t>
+            </a:r>
+          </a:p>
+        </p:txBody>
+      </p:sp>
+      <p:sp>
+        <p:nvSpPr>
+          <p:cNvPr id="7" name="Down Arrow 6"/>
+          <p:cNvSpPr/>
+          <p:nvPr/>
+        </p:nvSpPr>
+        <p:spPr>
+          <a:xfrm>
+            <a:off x="5852160" y="3703320"/>
+            <a:ext cx="457200" cy="411480"/>
+          </a:xfrm>
+          <a:prstGeom prst="downArrow">
+            <a:avLst/>
+          </a:prstGeom>
+          <a:solidFill>
+            <a:srgbClr val="06B6D4"/>
+          </a:solidFill>
+          <a:ln>
+            <a:noFill/>
+          </a:ln>
+        </p:spPr>
+        <p:style>
+          <a:lnRef idx="1">
+            <a:schemeClr val="accent1"/>
+          </a:lnRef>
+          <a:fillRef idx="3">
+            <a:schemeClr val="accent1"/>
+          </a:fillRef>
+          <a:effectRef idx="2">
+            <a:schemeClr val="accent1"/>
+          </a:effectRef>
+          <a:fontRef idx="minor">
+            <a:schemeClr val="lt1"/>
+          </a:fontRef>
+        </p:style>
+        <p:txBody>
+          <a:bodyPr rtlCol="0" anchor="ctr"/>
+          <a:lstStyle/>
+          <a:p>
+            <a:pPr algn="ctr"/>
+          </a:p>
+        </p:txBody>
+      </p:sp>
+      <p:sp>
+        <p:nvSpPr>
+          <p:cNvPr id="8" name="Rectangle 7"/>
+          <p:cNvSpPr/>
+          <p:nvPr/>
+        </p:nvSpPr>
+        <p:spPr>
+          <a:xfrm>
+            <a:off x="1371600" y="4114800"/>
+            <a:ext cx="9445752" cy="731520"/>
+          </a:xfrm>
+          <a:prstGeom prst="rect">
+            <a:avLst/>
+          </a:prstGeom>
+          <a:solidFill>
+            <a:srgbClr val="111827"/>
+          </a:solidFill>
+          <a:ln w="19050">
+            <a:solidFill>
+              <a:srgbClr val="06B6D4"/>
+            </a:solidFill>
+          </a:ln>
+        </p:spPr>
+        <p:style>
+          <a:lnRef idx="1">
+            <a:schemeClr val="accent1"/>
+          </a:lnRef>
+          <a:fillRef idx="3">
+            <a:schemeClr val="accent1"/>
+          </a:fillRef>
+          <a:effectRef idx="2">
+            <a:schemeClr val="accent1"/>
+          </a:effectRef>
+          <a:fontRef idx="minor">
+            <a:schemeClr val="lt1"/>
+          </a:fontRef>
+        </p:style>
+        <p:txBody>
+          <a:bodyPr rtlCol="0" anchor="ctr" wrap="square"/>
+          <a:lstStyle/>
+          <a:p>
+            <a:pPr algn="ctr">
+              <a:defRPr sz="1400" b="1">
+                <a:solidFill>
+                  <a:srgbClr val="F3F4F6"/>
+                </a:solidFill>
+                <a:latin typeface="Arial"/>
+              </a:defRPr>
+            </a:pPr>
+            <a:r>
+              <a:t>3. OPTIMIZATION ENGINE  ·  Constraint matching solver mapping skills, distance, and fatigue</a:t>
+            </a:r>
+          </a:p>
+        </p:txBody>
+      </p:sp>
+      <p:sp>
+        <p:nvSpPr>
+          <p:cNvPr id="9" name="Down Arrow 8"/>
+          <p:cNvSpPr/>
+          <p:nvPr/>
+        </p:nvSpPr>
+        <p:spPr>
+          <a:xfrm>
+            <a:off x="5852160" y="4846320"/>
+            <a:ext cx="457200" cy="411480"/>
+          </a:xfrm>
+          <a:prstGeom prst="downArrow">
+            <a:avLst/>
+          </a:prstGeom>
+          <a:solidFill>
+            <a:srgbClr val="06B6D4"/>
+          </a:solidFill>
+          <a:ln>
+            <a:noFill/>
+          </a:ln>
+        </p:spPr>
+        <p:style>
+          <a:lnRef idx="1">
+            <a:schemeClr val="accent1"/>
+          </a:lnRef>
+          <a:fillRef idx="3">
+            <a:schemeClr val="accent1"/>
+          </a:fillRef>
+          <a:effectRef idx="2">
+            <a:schemeClr val="accent1"/>
+          </a:effectRef>
+          <a:fontRef idx="minor">
+            <a:schemeClr val="lt1"/>
+          </a:fontRef>
+        </p:style>
+        <p:txBody>
+          <a:bodyPr rtlCol="0" anchor="ctr"/>
+          <a:lstStyle/>
+          <a:p>
+            <a:pPr algn="ctr"/>
+          </a:p>
+        </p:txBody>
+      </p:sp>
+      <p:sp>
+        <p:nvSpPr>
+          <p:cNvPr id="10" name="Rectangle 9"/>
+          <p:cNvSpPr/>
+          <p:nvPr/>
+        </p:nvSpPr>
+        <p:spPr>
+          <a:xfrm>
+            <a:off x="1371600" y="5257800"/>
+            <a:ext cx="9445752" cy="731520"/>
+          </a:xfrm>
+          <a:prstGeom prst="rect">
+            <a:avLst/>
+          </a:prstGeom>
+          <a:solidFill>
+            <a:srgbClr val="111827"/>
+          </a:solidFill>
+          <a:ln w="19050">
+            <a:solidFill>
+              <a:srgbClr val="06B6D4"/>
+            </a:solidFill>
+          </a:ln>
+        </p:spPr>
+        <p:style>
+          <a:lnRef idx="1">
+            <a:schemeClr val="accent1"/>
+          </a:lnRef>
+          <a:fillRef idx="3">
+            <a:schemeClr val="accent1"/>
+          </a:fillRef>
+          <a:effectRef idx="2">
+            <a:schemeClr val="accent1"/>
+          </a:effectRef>
+          <a:fontRef idx="minor">
+            <a:schemeClr val="lt1"/>
+          </a:fontRef>
+        </p:style>
+        <p:txBody>
+          <a:bodyPr rtlCol="0" anchor="ctr" wrap="square"/>
+          <a:lstStyle/>
+          <a:p>
+            <a:pPr algn="ctr">
+              <a:defRPr sz="1400" b="1">
+                <a:solidFill>
+                  <a:srgbClr val="F3F4F6"/>
+                </a:solidFill>
+                <a:latin typeface="Arial"/>
+              </a:defRPr>
+            </a:pPr>
+            <a:r>
+              <a:t>4. DIGITAL TWIN CENTER  ·  Unified HUD visualizer mapping 12-sector health matrices</a:t>
             </a:r>
           </a:p>
         </p:txBody>
@@ -4177,44 +7376,8 @@
         </p:nvSpPr>
         <p:spPr>
           <a:xfrm>
-            <a:off x="685800" y="457200"/>
-            <a:ext cx="10817352" cy="914400"/>
-          </a:xfrm>
-          <a:prstGeom prst="rect">
-            <a:avLst/>
-          </a:prstGeom>
-          <a:noFill/>
-        </p:spPr>
-        <p:txBody>
-          <a:bodyPr wrap="square" lIns="0" tIns="0">
-            <a:spAutoFit/>
-          </a:bodyPr>
-          <a:lstStyle/>
-          <a:p>
-            <a:pPr>
-              <a:defRPr sz="3600" b="1">
-                <a:solidFill>
-                  <a:srgbClr val="06B6D4"/>
-                </a:solidFill>
-                <a:latin typeface="Arial"/>
-              </a:defRPr>
-            </a:pPr>
-            <a:r>
-              <a:t>Intelligent Operations Pipeline</a:t>
-            </a:r>
-          </a:p>
-        </p:txBody>
-      </p:sp>
-      <p:sp>
-        <p:nvSpPr>
-          <p:cNvPr id="3" name="TextBox 2"/>
-          <p:cNvSpPr txBox="1"/>
-          <p:nvPr/>
-        </p:nvSpPr>
-        <p:spPr>
-          <a:xfrm>
-            <a:off x="685800" y="1645920"/>
-            <a:ext cx="10817352" cy="4389120"/>
+            <a:off x="685800" y="365760"/>
+            <a:ext cx="10817352" cy="365760"/>
           </a:xfrm>
           <a:prstGeom prst="rect">
             <a:avLst/>
@@ -4228,10 +7391,43 @@
           <a:lstStyle/>
           <a:p>
             <a:pPr>
-              <a:spcAft>
-                <a:spcPts val="2000"/>
-              </a:spcAft>
-              <a:defRPr sz="2000">
+              <a:defRPr sz="1000" b="1">
+                <a:solidFill>
+                  <a:srgbClr val="06B6D4"/>
+                </a:solidFill>
+                <a:latin typeface="Arial"/>
+              </a:defRPr>
+            </a:pPr>
+            <a:r>
+              <a:t>LIVE SPATIAL TWIN MATRIX</a:t>
+            </a:r>
+          </a:p>
+        </p:txBody>
+      </p:sp>
+      <p:sp>
+        <p:nvSpPr>
+          <p:cNvPr id="3" name="TextBox 2"/>
+          <p:cNvSpPr txBox="1"/>
+          <p:nvPr/>
+        </p:nvSpPr>
+        <p:spPr>
+          <a:xfrm>
+            <a:off x="685800" y="640080"/>
+            <a:ext cx="10817352" cy="731520"/>
+          </a:xfrm>
+          <a:prstGeom prst="rect">
+            <a:avLst/>
+          </a:prstGeom>
+          <a:noFill/>
+        </p:spPr>
+        <p:txBody>
+          <a:bodyPr wrap="square">
+            <a:spAutoFit/>
+          </a:bodyPr>
+          <a:lstStyle/>
+          <a:p>
+            <a:pPr>
+              <a:defRPr sz="2800" b="1">
                 <a:solidFill>
                   <a:srgbClr val="F3F4F6"/>
                 </a:solidFill>
@@ -4239,15 +7435,155 @@
               </a:defRPr>
             </a:pPr>
             <a:r>
-              <a:t>• 1. Telemetry Ingress: Live pilgrim density metrics, GPS feeds, and incident triggers.</a:t>
-            </a:r>
-          </a:p>
-          <a:p>
-            <a:pPr>
-              <a:spcAft>
-                <a:spcPts val="2000"/>
-              </a:spcAft>
-              <a:defRPr sz="2000">
+              <a:t>Digital Command Center HUD</a:t>
+            </a:r>
+          </a:p>
+        </p:txBody>
+      </p:sp>
+      <p:sp>
+        <p:nvSpPr>
+          <p:cNvPr id="4" name="Rectangle 3"/>
+          <p:cNvSpPr/>
+          <p:nvPr/>
+        </p:nvSpPr>
+        <p:spPr>
+          <a:xfrm>
+            <a:off x="914400" y="2011680"/>
+            <a:ext cx="6858000" cy="3840480"/>
+          </a:xfrm>
+          <a:prstGeom prst="rect">
+            <a:avLst/>
+          </a:prstGeom>
+          <a:solidFill>
+            <a:srgbClr val="0C1423"/>
+          </a:solidFill>
+          <a:ln w="25400">
+            <a:solidFill>
+              <a:srgbClr val="06B6D4"/>
+            </a:solidFill>
+          </a:ln>
+        </p:spPr>
+        <p:style>
+          <a:lnRef idx="1">
+            <a:schemeClr val="accent1"/>
+          </a:lnRef>
+          <a:fillRef idx="3">
+            <a:schemeClr val="accent1"/>
+          </a:fillRef>
+          <a:effectRef idx="2">
+            <a:schemeClr val="accent1"/>
+          </a:effectRef>
+          <a:fontRef idx="minor">
+            <a:schemeClr val="lt1"/>
+          </a:fontRef>
+        </p:style>
+        <p:txBody>
+          <a:bodyPr rtlCol="0" anchor="ctr"/>
+          <a:lstStyle/>
+          <a:p>
+            <a:pPr algn="ctr">
+              <a:defRPr sz="1400">
+                <a:solidFill>
+                  <a:srgbClr val="9CA3AF"/>
+                </a:solidFill>
+              </a:defRPr>
+            </a:pPr>
+            <a:r>
+              <a:t>[ UI SCREENSHOT: DIGITAL TWIN 12-SECTOR GRID ]</a:t>
+            </a:r>
+            <a:br/>
+            <a:br/>
+            <a:r>
+              <a:t>Shows active telemetry, volunteer coverage indexes, explainability breakdowns, and category-filtered dispatcher logs.</a:t>
+            </a:r>
+          </a:p>
+        </p:txBody>
+      </p:sp>
+      <p:sp>
+        <p:nvSpPr>
+          <p:cNvPr id="5" name="Rectangle 4"/>
+          <p:cNvSpPr/>
+          <p:nvPr/>
+        </p:nvSpPr>
+        <p:spPr>
+          <a:xfrm>
+            <a:off x="8229600" y="2011680"/>
+            <a:ext cx="3017520" cy="1097280"/>
+          </a:xfrm>
+          <a:prstGeom prst="rect">
+            <a:avLst/>
+          </a:prstGeom>
+          <a:solidFill>
+            <a:srgbClr val="111827"/>
+          </a:solidFill>
+          <a:ln w="19050">
+            <a:solidFill>
+              <a:srgbClr val="06B6D4"/>
+            </a:solidFill>
+          </a:ln>
+        </p:spPr>
+        <p:style>
+          <a:lnRef idx="1">
+            <a:schemeClr val="accent1"/>
+          </a:lnRef>
+          <a:fillRef idx="3">
+            <a:schemeClr val="accent1"/>
+          </a:fillRef>
+          <a:effectRef idx="2">
+            <a:schemeClr val="accent1"/>
+          </a:effectRef>
+          <a:fontRef idx="minor">
+            <a:schemeClr val="lt1"/>
+          </a:fontRef>
+        </p:style>
+        <p:txBody>
+          <a:bodyPr rtlCol="0" anchor="ctr"/>
+          <a:lstStyle/>
+          <a:p>
+            <a:pPr algn="ctr"/>
+          </a:p>
+        </p:txBody>
+      </p:sp>
+      <p:sp>
+        <p:nvSpPr>
+          <p:cNvPr id="6" name="TextBox 5"/>
+          <p:cNvSpPr txBox="1"/>
+          <p:nvPr/>
+        </p:nvSpPr>
+        <p:spPr>
+          <a:xfrm>
+            <a:off x="8366760" y="2148840"/>
+            <a:ext cx="2743200" cy="822960"/>
+          </a:xfrm>
+          <a:prstGeom prst="rect">
+            <a:avLst/>
+          </a:prstGeom>
+          <a:noFill/>
+        </p:spPr>
+        <p:txBody>
+          <a:bodyPr wrap="square">
+            <a:spAutoFit/>
+          </a:bodyPr>
+          <a:lstStyle/>
+          <a:p>
+            <a:pPr>
+              <a:defRPr sz="1100" b="1">
+                <a:solidFill>
+                  <a:srgbClr val="06B6D4"/>
+                </a:solidFill>
+                <a:latin typeface="Arial"/>
+              </a:defRPr>
+            </a:pPr>
+            <a:r>
+              <a:t>COMPONENT 1</a:t>
+            </a:r>
+          </a:p>
+          <a:p>
+            <a:pPr>
+              <a:spcBef>
+                <a:spcPts val="800"/>
+              </a:spcBef>
+              <a:defRPr sz="2400" b="1">
                 <a:solidFill>
                   <a:srgbClr val="F3F4F6"/>
                 </a:solidFill>
@@ -4255,15 +7591,112 @@
               </a:defRPr>
             </a:pPr>
             <a:r>
-              <a:t>• 2. AI Decision Engine: Evaluates threat profiles and computes sector priorities.</a:t>
-            </a:r>
-          </a:p>
-          <a:p>
-            <a:pPr>
-              <a:spcAft>
-                <a:spcPts val="2000"/>
-              </a:spcAft>
-              <a:defRPr sz="2000">
+              <a:t>Live Telemetry</a:t>
+            </a:r>
+          </a:p>
+          <a:p>
+            <a:pPr>
+              <a:spcBef>
+                <a:spcPts val="800"/>
+              </a:spcBef>
+              <a:defRPr sz="1100">
+                <a:solidFill>
+                  <a:srgbClr val="9CA3AF"/>
+                </a:solidFill>
+                <a:latin typeface="Arial"/>
+              </a:defRPr>
+            </a:pPr>
+            <a:r>
+              <a:t>Streams GPS updates &amp; density index.</a:t>
+            </a:r>
+          </a:p>
+        </p:txBody>
+      </p:sp>
+      <p:sp>
+        <p:nvSpPr>
+          <p:cNvPr id="7" name="Rectangle 6"/>
+          <p:cNvSpPr/>
+          <p:nvPr/>
+        </p:nvSpPr>
+        <p:spPr>
+          <a:xfrm>
+            <a:off x="8229600" y="3383280"/>
+            <a:ext cx="3017520" cy="1097280"/>
+          </a:xfrm>
+          <a:prstGeom prst="rect">
+            <a:avLst/>
+          </a:prstGeom>
+          <a:solidFill>
+            <a:srgbClr val="111827"/>
+          </a:solidFill>
+          <a:ln w="19050">
+            <a:solidFill>
+              <a:srgbClr val="06B6D4"/>
+            </a:solidFill>
+          </a:ln>
+        </p:spPr>
+        <p:style>
+          <a:lnRef idx="1">
+            <a:schemeClr val="accent1"/>
+          </a:lnRef>
+          <a:fillRef idx="3">
+            <a:schemeClr val="accent1"/>
+          </a:fillRef>
+          <a:effectRef idx="2">
+            <a:schemeClr val="accent1"/>
+          </a:effectRef>
+          <a:fontRef idx="minor">
+            <a:schemeClr val="lt1"/>
+          </a:fontRef>
+        </p:style>
+        <p:txBody>
+          <a:bodyPr rtlCol="0" anchor="ctr"/>
+          <a:lstStyle/>
+          <a:p>
+            <a:pPr algn="ctr"/>
+          </a:p>
+        </p:txBody>
+      </p:sp>
+      <p:sp>
+        <p:nvSpPr>
+          <p:cNvPr id="8" name="TextBox 7"/>
+          <p:cNvSpPr txBox="1"/>
+          <p:nvPr/>
+        </p:nvSpPr>
+        <p:spPr>
+          <a:xfrm>
+            <a:off x="8366760" y="3520440"/>
+            <a:ext cx="2743200" cy="822960"/>
+          </a:xfrm>
+          <a:prstGeom prst="rect">
+            <a:avLst/>
+          </a:prstGeom>
+          <a:noFill/>
+        </p:spPr>
+        <p:txBody>
+          <a:bodyPr wrap="square">
+            <a:spAutoFit/>
+          </a:bodyPr>
+          <a:lstStyle/>
+          <a:p>
+            <a:pPr>
+              <a:defRPr sz="1100" b="1">
+                <a:solidFill>
+                  <a:srgbClr val="06B6D4"/>
+                </a:solidFill>
+                <a:latin typeface="Arial"/>
+              </a:defRPr>
+            </a:pPr>
+            <a:r>
+              <a:t>COMPONENT 2</a:t>
+            </a:r>
+          </a:p>
+          <a:p>
+            <a:pPr>
+              <a:spcBef>
+                <a:spcPts val="800"/>
+              </a:spcBef>
+              <a:defRPr sz="2400" b="1">
                 <a:solidFill>
                   <a:srgbClr val="F3F4F6"/>
                 </a:solidFill>
@@ -4271,15 +7704,112 @@
               </a:defRPr>
             </a:pPr>
             <a:r>
-              <a:t>• 3. Roster Optimization Solver: Distributes personnel to clear critical gaps and balance workloads.</a:t>
-            </a:r>
-          </a:p>
-          <a:p>
-            <a:pPr>
-              <a:spcAft>
-                <a:spcPts val="2000"/>
-              </a:spcAft>
-              <a:defRPr sz="2000">
+              <a:t>Sector Intel</a:t>
+            </a:r>
+          </a:p>
+          <a:p>
+            <a:pPr>
+              <a:spcBef>
+                <a:spcPts val="800"/>
+              </a:spcBef>
+              <a:defRPr sz="1100">
+                <a:solidFill>
+                  <a:srgbClr val="9CA3AF"/>
+                </a:solidFill>
+                <a:latin typeface="Arial"/>
+              </a:defRPr>
+            </a:pPr>
+            <a:r>
+              <a:t>Explainable skill/fatigue matrix.</a:t>
+            </a:r>
+          </a:p>
+        </p:txBody>
+      </p:sp>
+      <p:sp>
+        <p:nvSpPr>
+          <p:cNvPr id="9" name="Rectangle 8"/>
+          <p:cNvSpPr/>
+          <p:nvPr/>
+        </p:nvSpPr>
+        <p:spPr>
+          <a:xfrm>
+            <a:off x="8229600" y="4754880"/>
+            <a:ext cx="3017520" cy="1097280"/>
+          </a:xfrm>
+          <a:prstGeom prst="rect">
+            <a:avLst/>
+          </a:prstGeom>
+          <a:solidFill>
+            <a:srgbClr val="111827"/>
+          </a:solidFill>
+          <a:ln w="19050">
+            <a:solidFill>
+              <a:srgbClr val="10B981"/>
+            </a:solidFill>
+          </a:ln>
+        </p:spPr>
+        <p:style>
+          <a:lnRef idx="1">
+            <a:schemeClr val="accent1"/>
+          </a:lnRef>
+          <a:fillRef idx="3">
+            <a:schemeClr val="accent1"/>
+          </a:fillRef>
+          <a:effectRef idx="2">
+            <a:schemeClr val="accent1"/>
+          </a:effectRef>
+          <a:fontRef idx="minor">
+            <a:schemeClr val="lt1"/>
+          </a:fontRef>
+        </p:style>
+        <p:txBody>
+          <a:bodyPr rtlCol="0" anchor="ctr"/>
+          <a:lstStyle/>
+          <a:p>
+            <a:pPr algn="ctr"/>
+          </a:p>
+        </p:txBody>
+      </p:sp>
+      <p:sp>
+        <p:nvSpPr>
+          <p:cNvPr id="10" name="TextBox 9"/>
+          <p:cNvSpPr txBox="1"/>
+          <p:nvPr/>
+        </p:nvSpPr>
+        <p:spPr>
+          <a:xfrm>
+            <a:off x="8366760" y="4892040"/>
+            <a:ext cx="2743200" cy="822960"/>
+          </a:xfrm>
+          <a:prstGeom prst="rect">
+            <a:avLst/>
+          </a:prstGeom>
+          <a:noFill/>
+        </p:spPr>
+        <p:txBody>
+          <a:bodyPr wrap="square">
+            <a:spAutoFit/>
+          </a:bodyPr>
+          <a:lstStyle/>
+          <a:p>
+            <a:pPr>
+              <a:defRPr sz="1100" b="1">
+                <a:solidFill>
+                  <a:srgbClr val="10B981"/>
+                </a:solidFill>
+                <a:latin typeface="Arial"/>
+              </a:defRPr>
+            </a:pPr>
+            <a:r>
+              <a:t>COMPONENT 3</a:t>
+            </a:r>
+          </a:p>
+          <a:p>
+            <a:pPr>
+              <a:spcBef>
+                <a:spcPts val="800"/>
+              </a:spcBef>
+              <a:defRPr sz="2400" b="1">
                 <a:solidFill>
                   <a:srgbClr val="F3F4F6"/>
                 </a:solidFill>
@@ -4287,7 +7817,23 @@
               </a:defRPr>
             </a:pPr>
             <a:r>
-              <a:t>• 4. Interactive HUD: Streams live dispatcher alerts and explainable recommendation trails.</a:t>
+              <a:t>Incident Monitor</a:t>
+            </a:r>
+          </a:p>
+          <a:p>
+            <a:pPr>
+              <a:spcBef>
+                <a:spcPts val="800"/>
+              </a:spcBef>
+              <a:defRPr sz="1100">
+                <a:solidFill>
+                  <a:srgbClr val="9CA3AF"/>
+                </a:solidFill>
+                <a:latin typeface="Arial"/>
+              </a:defRPr>
+            </a:pPr>
+            <a:r>
+              <a:t>Triage ticketing and routing logs.</a:t>
             </a:r>
           </a:p>
         </p:txBody>
@@ -4326,44 +7872,8 @@
         </p:nvSpPr>
         <p:spPr>
           <a:xfrm>
-            <a:off x="685800" y="457200"/>
-            <a:ext cx="10817352" cy="914400"/>
-          </a:xfrm>
-          <a:prstGeom prst="rect">
-            <a:avLst/>
-          </a:prstGeom>
-          <a:noFill/>
-        </p:spPr>
-        <p:txBody>
-          <a:bodyPr wrap="square" lIns="0" tIns="0">
-            <a:spAutoFit/>
-          </a:bodyPr>
-          <a:lstStyle/>
-          <a:p>
-            <a:pPr>
-              <a:defRPr sz="3600" b="1">
-                <a:solidFill>
-                  <a:srgbClr val="06B6D4"/>
-                </a:solidFill>
-                <a:latin typeface="Arial"/>
-              </a:defRPr>
-            </a:pPr>
-            <a:r>
-              <a:t>Digital Command Center HUD</a:t>
-            </a:r>
-          </a:p>
-        </p:txBody>
-      </p:sp>
-      <p:sp>
-        <p:nvSpPr>
-          <p:cNvPr id="3" name="TextBox 2"/>
-          <p:cNvSpPr txBox="1"/>
-          <p:nvPr/>
-        </p:nvSpPr>
-        <p:spPr>
-          <a:xfrm>
-            <a:off x="685800" y="1645920"/>
-            <a:ext cx="10817352" cy="4389120"/>
+            <a:off x="685800" y="365760"/>
+            <a:ext cx="10817352" cy="365760"/>
           </a:xfrm>
           <a:prstGeom prst="rect">
             <a:avLst/>
@@ -4377,10 +7887,43 @@
           <a:lstStyle/>
           <a:p>
             <a:pPr>
-              <a:spcAft>
-                <a:spcPts val="2000"/>
-              </a:spcAft>
-              <a:defRPr sz="2000">
+              <a:defRPr sz="1000" b="1">
+                <a:solidFill>
+                  <a:srgbClr val="06B6D4"/>
+                </a:solidFill>
+                <a:latin typeface="Arial"/>
+              </a:defRPr>
+            </a:pPr>
+            <a:r>
+              <a:t>REAL-TIME CONSTRAINT DISPATCHER</a:t>
+            </a:r>
+          </a:p>
+        </p:txBody>
+      </p:sp>
+      <p:sp>
+        <p:nvSpPr>
+          <p:cNvPr id="3" name="TextBox 2"/>
+          <p:cNvSpPr txBox="1"/>
+          <p:nvPr/>
+        </p:nvSpPr>
+        <p:spPr>
+          <a:xfrm>
+            <a:off x="685800" y="640080"/>
+            <a:ext cx="10817352" cy="731520"/>
+          </a:xfrm>
+          <a:prstGeom prst="rect">
+            <a:avLst/>
+          </a:prstGeom>
+          <a:noFill/>
+        </p:spPr>
+        <p:txBody>
+          <a:bodyPr wrap="square">
+            <a:spAutoFit/>
+          </a:bodyPr>
+          <a:lstStyle/>
+          <a:p>
+            <a:pPr>
+              <a:defRPr sz="2800" b="1">
                 <a:solidFill>
                   <a:srgbClr val="F3F4F6"/>
                 </a:solidFill>
@@ -4388,39 +7931,330 @@
               </a:defRPr>
             </a:pPr>
             <a:r>
-              <a:t>• 12-Sector Twin Grid: Interactive matrix displaying sector health, crowd volumes, and staff counts.</a:t>
-            </a:r>
-          </a:p>
-          <a:p>
-            <a:pPr>
-              <a:spcAft>
-                <a:spcPts val="2000"/>
-              </a:spcAft>
-              <a:defRPr sz="2000">
+              <a:t>Workforce Optimizer Engine</a:t>
+            </a:r>
+          </a:p>
+        </p:txBody>
+      </p:sp>
+      <p:sp>
+        <p:nvSpPr>
+          <p:cNvPr id="4" name="Rectangle 3"/>
+          <p:cNvSpPr/>
+          <p:nvPr/>
+        </p:nvSpPr>
+        <p:spPr>
+          <a:xfrm>
+            <a:off x="914400" y="2011680"/>
+            <a:ext cx="6858000" cy="3840480"/>
+          </a:xfrm>
+          <a:prstGeom prst="rect">
+            <a:avLst/>
+          </a:prstGeom>
+          <a:solidFill>
+            <a:srgbClr val="0C1423"/>
+          </a:solidFill>
+          <a:ln w="25400">
+            <a:solidFill>
+              <a:srgbClr val="06B6D4"/>
+            </a:solidFill>
+          </a:ln>
+        </p:spPr>
+        <p:style>
+          <a:lnRef idx="1">
+            <a:schemeClr val="accent1"/>
+          </a:lnRef>
+          <a:fillRef idx="3">
+            <a:schemeClr val="accent1"/>
+          </a:fillRef>
+          <a:effectRef idx="2">
+            <a:schemeClr val="accent1"/>
+          </a:effectRef>
+          <a:fontRef idx="minor">
+            <a:schemeClr val="lt1"/>
+          </a:fontRef>
+        </p:style>
+        <p:txBody>
+          <a:bodyPr rtlCol="0" anchor="ctr"/>
+          <a:lstStyle/>
+          <a:p>
+            <a:pPr algn="ctr">
+              <a:defRPr sz="1400">
+                <a:solidFill>
+                  <a:srgbClr val="9CA3AF"/>
+                </a:solidFill>
+              </a:defRPr>
+            </a:pPr>
+            <a:r>
+              <a:t>[ UI SCREENSHOT: WORKFORCE OPTIMIZER ]</a:t>
+            </a:r>
+            <a:br/>
+            <a:br/>
+            <a:r>
+              <a:t>Contrasts volunteer profiles, distance thresholds, and fatigue indexes. Includes single-click Auto-Resolve buttons.</a:t>
+            </a:r>
+          </a:p>
+        </p:txBody>
+      </p:sp>
+      <p:sp>
+        <p:nvSpPr>
+          <p:cNvPr id="5" name="Rectangle 4"/>
+          <p:cNvSpPr/>
+          <p:nvPr/>
+        </p:nvSpPr>
+        <p:spPr>
+          <a:xfrm>
+            <a:off x="8229600" y="2011680"/>
+            <a:ext cx="3017520" cy="731520"/>
+          </a:xfrm>
+          <a:prstGeom prst="rect">
+            <a:avLst/>
+          </a:prstGeom>
+          <a:solidFill>
+            <a:srgbClr val="111827"/>
+          </a:solidFill>
+          <a:ln w="19050">
+            <a:solidFill>
+              <a:srgbClr val="06B6D4"/>
+            </a:solidFill>
+          </a:ln>
+        </p:spPr>
+        <p:style>
+          <a:lnRef idx="1">
+            <a:schemeClr val="accent1"/>
+          </a:lnRef>
+          <a:fillRef idx="3">
+            <a:schemeClr val="accent1"/>
+          </a:fillRef>
+          <a:effectRef idx="2">
+            <a:schemeClr val="accent1"/>
+          </a:effectRef>
+          <a:fontRef idx="minor">
+            <a:schemeClr val="lt1"/>
+          </a:fontRef>
+        </p:style>
+        <p:txBody>
+          <a:bodyPr rtlCol="0" anchor="ctr"/>
+          <a:lstStyle/>
+          <a:p>
+            <a:pPr algn="ctr">
+              <a:defRPr sz="1100" b="1">
+                <a:solidFill>
+                  <a:srgbClr val="06B6D4"/>
+                </a:solidFill>
+              </a:defRPr>
+            </a:pPr>
+            <a:r>
+              <a:t>1. SKILLS MATCH</a:t>
+            </a:r>
+          </a:p>
+          <a:p>
+            <a:pPr>
+              <a:defRPr sz="1000">
                 <a:solidFill>
                   <a:srgbClr val="F3F4F6"/>
                 </a:solidFill>
-                <a:latin typeface="Arial"/>
-              </a:defRPr>
-            </a:pPr>
-            <a:r>
-              <a:t>• Live Operations Feed: Real-time dispatcher activity stream tracking dispatches and rerouting.</a:t>
-            </a:r>
-          </a:p>
-          <a:p>
-            <a:pPr>
-              <a:spcAft>
-                <a:spcPts val="2000"/>
-              </a:spcAft>
-              <a:defRPr sz="2000">
+              </a:defRPr>
+            </a:pPr>
+            <a:r>
+              <a:t>First aid / Languages</a:t>
+            </a:r>
+          </a:p>
+        </p:txBody>
+      </p:sp>
+      <p:sp>
+        <p:nvSpPr>
+          <p:cNvPr id="6" name="Rectangle 5"/>
+          <p:cNvSpPr/>
+          <p:nvPr/>
+        </p:nvSpPr>
+        <p:spPr>
+          <a:xfrm>
+            <a:off x="8229600" y="2971800"/>
+            <a:ext cx="3017520" cy="731520"/>
+          </a:xfrm>
+          <a:prstGeom prst="rect">
+            <a:avLst/>
+          </a:prstGeom>
+          <a:solidFill>
+            <a:srgbClr val="111827"/>
+          </a:solidFill>
+          <a:ln w="19050">
+            <a:solidFill>
+              <a:srgbClr val="06B6D4"/>
+            </a:solidFill>
+          </a:ln>
+        </p:spPr>
+        <p:style>
+          <a:lnRef idx="1">
+            <a:schemeClr val="accent1"/>
+          </a:lnRef>
+          <a:fillRef idx="3">
+            <a:schemeClr val="accent1"/>
+          </a:fillRef>
+          <a:effectRef idx="2">
+            <a:schemeClr val="accent1"/>
+          </a:effectRef>
+          <a:fontRef idx="minor">
+            <a:schemeClr val="lt1"/>
+          </a:fontRef>
+        </p:style>
+        <p:txBody>
+          <a:bodyPr rtlCol="0" anchor="ctr"/>
+          <a:lstStyle/>
+          <a:p>
+            <a:pPr algn="ctr">
+              <a:defRPr sz="1100" b="1">
+                <a:solidFill>
+                  <a:srgbClr val="06B6D4"/>
+                </a:solidFill>
+              </a:defRPr>
+            </a:pPr>
+            <a:r>
+              <a:t>2. PROXIMITY</a:t>
+            </a:r>
+          </a:p>
+          <a:p>
+            <a:pPr>
+              <a:defRPr sz="1000">
                 <a:solidFill>
                   <a:srgbClr val="F3F4F6"/>
                 </a:solidFill>
-                <a:latin typeface="Arial"/>
-              </a:defRPr>
-            </a:pPr>
-            <a:r>
-              <a:t>• Explainability Panel: Instant breakdowns of volunteer skill matches, fatigue indexes, and distances.</a:t>
+              </a:defRPr>
+            </a:pPr>
+            <a:r>
+              <a:t>Physical distance math</a:t>
+            </a:r>
+          </a:p>
+        </p:txBody>
+      </p:sp>
+      <p:sp>
+        <p:nvSpPr>
+          <p:cNvPr id="7" name="Rectangle 6"/>
+          <p:cNvSpPr/>
+          <p:nvPr/>
+        </p:nvSpPr>
+        <p:spPr>
+          <a:xfrm>
+            <a:off x="8229600" y="3931920"/>
+            <a:ext cx="3017520" cy="731520"/>
+          </a:xfrm>
+          <a:prstGeom prst="rect">
+            <a:avLst/>
+          </a:prstGeom>
+          <a:solidFill>
+            <a:srgbClr val="111827"/>
+          </a:solidFill>
+          <a:ln w="19050">
+            <a:solidFill>
+              <a:srgbClr val="06B6D4"/>
+            </a:solidFill>
+          </a:ln>
+        </p:spPr>
+        <p:style>
+          <a:lnRef idx="1">
+            <a:schemeClr val="accent1"/>
+          </a:lnRef>
+          <a:fillRef idx="3">
+            <a:schemeClr val="accent1"/>
+          </a:fillRef>
+          <a:effectRef idx="2">
+            <a:schemeClr val="accent1"/>
+          </a:effectRef>
+          <a:fontRef idx="minor">
+            <a:schemeClr val="lt1"/>
+          </a:fontRef>
+        </p:style>
+        <p:txBody>
+          <a:bodyPr rtlCol="0" anchor="ctr"/>
+          <a:lstStyle/>
+          <a:p>
+            <a:pPr algn="ctr">
+              <a:defRPr sz="1100" b="1">
+                <a:solidFill>
+                  <a:srgbClr val="06B6D4"/>
+                </a:solidFill>
+              </a:defRPr>
+            </a:pPr>
+            <a:r>
+              <a:t>3. FATIGUE CAP</a:t>
+            </a:r>
+          </a:p>
+          <a:p>
+            <a:pPr>
+              <a:defRPr sz="1000">
+                <a:solidFill>
+                  <a:srgbClr val="F3F4F6"/>
+                </a:solidFill>
+              </a:defRPr>
+            </a:pPr>
+            <a:r>
+              <a:t>Duty cycle indexes</a:t>
+            </a:r>
+          </a:p>
+        </p:txBody>
+      </p:sp>
+      <p:sp>
+        <p:nvSpPr>
+          <p:cNvPr id="8" name="Rectangle 7"/>
+          <p:cNvSpPr/>
+          <p:nvPr/>
+        </p:nvSpPr>
+        <p:spPr>
+          <a:xfrm>
+            <a:off x="8229600" y="4892040"/>
+            <a:ext cx="3017520" cy="731520"/>
+          </a:xfrm>
+          <a:prstGeom prst="rect">
+            <a:avLst/>
+          </a:prstGeom>
+          <a:solidFill>
+            <a:srgbClr val="111827"/>
+          </a:solidFill>
+          <a:ln w="19050">
+            <a:solidFill>
+              <a:srgbClr val="10B981"/>
+            </a:solidFill>
+          </a:ln>
+        </p:spPr>
+        <p:style>
+          <a:lnRef idx="1">
+            <a:schemeClr val="accent1"/>
+          </a:lnRef>
+          <a:fillRef idx="3">
+            <a:schemeClr val="accent1"/>
+          </a:fillRef>
+          <a:effectRef idx="2">
+            <a:schemeClr val="accent1"/>
+          </a:effectRef>
+          <a:fontRef idx="minor">
+            <a:schemeClr val="lt1"/>
+          </a:fontRef>
+        </p:style>
+        <p:txBody>
+          <a:bodyPr rtlCol="0" anchor="ctr"/>
+          <a:lstStyle/>
+          <a:p>
+            <a:pPr algn="ctr">
+              <a:defRPr sz="1100" b="1">
+                <a:solidFill>
+                  <a:srgbClr val="10B981"/>
+                </a:solidFill>
+              </a:defRPr>
+            </a:pPr>
+            <a:r>
+              <a:t>4. OPTIMAL MATCH</a:t>
+            </a:r>
+          </a:p>
+          <a:p>
+            <a:pPr>
+              <a:defRPr sz="1000">
+                <a:solidFill>
+                  <a:srgbClr val="F3F4F6"/>
+                </a:solidFill>
+              </a:defRPr>
+            </a:pPr>
+            <a:r>
+              <a:t>Executed dispatch</a:t>
             </a:r>
           </a:p>
         </p:txBody>
@@ -4459,44 +8293,8 @@
         </p:nvSpPr>
         <p:spPr>
           <a:xfrm>
-            <a:off x="685800" y="457200"/>
-            <a:ext cx="10817352" cy="914400"/>
-          </a:xfrm>
-          <a:prstGeom prst="rect">
-            <a:avLst/>
-          </a:prstGeom>
-          <a:noFill/>
-        </p:spPr>
-        <p:txBody>
-          <a:bodyPr wrap="square" lIns="0" tIns="0">
-            <a:spAutoFit/>
-          </a:bodyPr>
-          <a:lstStyle/>
-          <a:p>
-            <a:pPr>
-              <a:defRPr sz="3600" b="1">
-                <a:solidFill>
-                  <a:srgbClr val="06B6D4"/>
-                </a:solidFill>
-                <a:latin typeface="Arial"/>
-              </a:defRPr>
-            </a:pPr>
-            <a:r>
-              <a:t>Workforce Optimizer Engine</a:t>
-            </a:r>
-          </a:p>
-        </p:txBody>
-      </p:sp>
-      <p:sp>
-        <p:nvSpPr>
-          <p:cNvPr id="3" name="TextBox 2"/>
-          <p:cNvSpPr txBox="1"/>
-          <p:nvPr/>
-        </p:nvSpPr>
-        <p:spPr>
-          <a:xfrm>
-            <a:off x="685800" y="1645920"/>
-            <a:ext cx="10817352" cy="4389120"/>
+            <a:off x="685800" y="365760"/>
+            <a:ext cx="10817352" cy="365760"/>
           </a:xfrm>
           <a:prstGeom prst="rect">
             <a:avLst/>
@@ -4510,10 +8308,43 @@
           <a:lstStyle/>
           <a:p>
             <a:pPr>
-              <a:spcAft>
-                <a:spcPts val="2000"/>
-              </a:spcAft>
-              <a:defRPr sz="2000">
+              <a:defRPr sz="1000" b="1">
+                <a:solidFill>
+                  <a:srgbClr val="06B6D4"/>
+                </a:solidFill>
+                <a:latin typeface="Arial"/>
+              </a:defRPr>
+            </a:pPr>
+            <a:r>
+              <a:t>WHAT-IF FORECASTING DASHBOARD</a:t>
+            </a:r>
+          </a:p>
+        </p:txBody>
+      </p:sp>
+      <p:sp>
+        <p:nvSpPr>
+          <p:cNvPr id="3" name="TextBox 2"/>
+          <p:cNvSpPr txBox="1"/>
+          <p:nvPr/>
+        </p:nvSpPr>
+        <p:spPr>
+          <a:xfrm>
+            <a:off x="685800" y="640080"/>
+            <a:ext cx="10817352" cy="731520"/>
+          </a:xfrm>
+          <a:prstGeom prst="rect">
+            <a:avLst/>
+          </a:prstGeom>
+          <a:noFill/>
+        </p:spPr>
+        <p:txBody>
+          <a:bodyPr wrap="square">
+            <a:spAutoFit/>
+          </a:bodyPr>
+          <a:lstStyle/>
+          <a:p>
+            <a:pPr>
+              <a:defRPr sz="2800" b="1">
                 <a:solidFill>
                   <a:srgbClr val="F3F4F6"/>
                 </a:solidFill>
@@ -4521,15 +8352,155 @@
               </a:defRPr>
             </a:pPr>
             <a:r>
-              <a:t>• Skill-Constraint Solver: Automatically allocates specialist volunteers (First Aid, Languages).</a:t>
-            </a:r>
-          </a:p>
-          <a:p>
-            <a:pPr>
-              <a:spcAft>
-                <a:spcPts val="2000"/>
-              </a:spcAft>
-              <a:defRPr sz="2000">
+              <a:t>Scenario Stress Simulator Sandbox</a:t>
+            </a:r>
+          </a:p>
+        </p:txBody>
+      </p:sp>
+      <p:sp>
+        <p:nvSpPr>
+          <p:cNvPr id="4" name="Rectangle 3"/>
+          <p:cNvSpPr/>
+          <p:nvPr/>
+        </p:nvSpPr>
+        <p:spPr>
+          <a:xfrm>
+            <a:off x="914400" y="2011680"/>
+            <a:ext cx="6858000" cy="3840480"/>
+          </a:xfrm>
+          <a:prstGeom prst="rect">
+            <a:avLst/>
+          </a:prstGeom>
+          <a:solidFill>
+            <a:srgbClr val="0C1423"/>
+          </a:solidFill>
+          <a:ln w="25400">
+            <a:solidFill>
+              <a:srgbClr val="06B6D4"/>
+            </a:solidFill>
+          </a:ln>
+        </p:spPr>
+        <p:style>
+          <a:lnRef idx="1">
+            <a:schemeClr val="accent1"/>
+          </a:lnRef>
+          <a:fillRef idx="3">
+            <a:schemeClr val="accent1"/>
+          </a:fillRef>
+          <a:effectRef idx="2">
+            <a:schemeClr val="accent1"/>
+          </a:effectRef>
+          <a:fontRef idx="minor">
+            <a:schemeClr val="lt1"/>
+          </a:fontRef>
+        </p:style>
+        <p:txBody>
+          <a:bodyPr rtlCol="0" anchor="ctr"/>
+          <a:lstStyle/>
+          <a:p>
+            <a:pPr algn="ctr">
+              <a:defRPr sz="1400">
+                <a:solidFill>
+                  <a:srgbClr val="9CA3AF"/>
+                </a:solidFill>
+              </a:defRPr>
+            </a:pPr>
+            <a:r>
+              <a:t>[ UI SCREENSHOT: SCENARIO STRESS SIMULATOR ]</a:t>
+            </a:r>
+            <a:br/>
+            <a:br/>
+            <a:r>
+              <a:t>Shows capacity trend curves, risk dials, preset configurations (Crowd Surge, Dehydration Wave), and slider controls.</a:t>
+            </a:r>
+          </a:p>
+        </p:txBody>
+      </p:sp>
+      <p:sp>
+        <p:nvSpPr>
+          <p:cNvPr id="5" name="Rectangle 4"/>
+          <p:cNvSpPr/>
+          <p:nvPr/>
+        </p:nvSpPr>
+        <p:spPr>
+          <a:xfrm>
+            <a:off x="8229600" y="2011680"/>
+            <a:ext cx="3017520" cy="1097280"/>
+          </a:xfrm>
+          <a:prstGeom prst="rect">
+            <a:avLst/>
+          </a:prstGeom>
+          <a:solidFill>
+            <a:srgbClr val="111827"/>
+          </a:solidFill>
+          <a:ln w="19050">
+            <a:solidFill>
+              <a:srgbClr val="06B6D4"/>
+            </a:solidFill>
+          </a:ln>
+        </p:spPr>
+        <p:style>
+          <a:lnRef idx="1">
+            <a:schemeClr val="accent1"/>
+          </a:lnRef>
+          <a:fillRef idx="3">
+            <a:schemeClr val="accent1"/>
+          </a:fillRef>
+          <a:effectRef idx="2">
+            <a:schemeClr val="accent1"/>
+          </a:effectRef>
+          <a:fontRef idx="minor">
+            <a:schemeClr val="lt1"/>
+          </a:fontRef>
+        </p:style>
+        <p:txBody>
+          <a:bodyPr rtlCol="0" anchor="ctr"/>
+          <a:lstStyle/>
+          <a:p>
+            <a:pPr algn="ctr"/>
+          </a:p>
+        </p:txBody>
+      </p:sp>
+      <p:sp>
+        <p:nvSpPr>
+          <p:cNvPr id="6" name="TextBox 5"/>
+          <p:cNvSpPr txBox="1"/>
+          <p:nvPr/>
+        </p:nvSpPr>
+        <p:spPr>
+          <a:xfrm>
+            <a:off x="8366760" y="2148840"/>
+            <a:ext cx="2743200" cy="822960"/>
+          </a:xfrm>
+          <a:prstGeom prst="rect">
+            <a:avLst/>
+          </a:prstGeom>
+          <a:noFill/>
+        </p:spPr>
+        <p:txBody>
+          <a:bodyPr wrap="square">
+            <a:spAutoFit/>
+          </a:bodyPr>
+          <a:lstStyle/>
+          <a:p>
+            <a:pPr>
+              <a:defRPr sz="1100" b="1">
+                <a:solidFill>
+                  <a:srgbClr val="06B6D4"/>
+                </a:solidFill>
+                <a:latin typeface="Arial"/>
+              </a:defRPr>
+            </a:pPr>
+            <a:r>
+              <a:t>STEP 1</a:t>
+            </a:r>
+          </a:p>
+          <a:p>
+            <a:pPr>
+              <a:spcBef>
+                <a:spcPts val="800"/>
+              </a:spcBef>
+              <a:defRPr sz="2400" b="1">
                 <a:solidFill>
                   <a:srgbClr val="F3F4F6"/>
                 </a:solidFill>
@@ -4537,15 +8508,112 @@
               </a:defRPr>
             </a:pPr>
             <a:r>
-              <a:t>• Fatigue-Aware Routing: Reassigns standby personnel without overloading active teams.</a:t>
-            </a:r>
-          </a:p>
-          <a:p>
-            <a:pPr>
-              <a:spcAft>
-                <a:spcPts val="2000"/>
-              </a:spcAft>
-              <a:defRPr sz="2000">
+              <a:t>Before State</a:t>
+            </a:r>
+          </a:p>
+          <a:p>
+            <a:pPr>
+              <a:spcBef>
+                <a:spcPts val="800"/>
+              </a:spcBef>
+              <a:defRPr sz="1100">
+                <a:solidFill>
+                  <a:srgbClr val="9CA3AF"/>
+                </a:solidFill>
+                <a:latin typeface="Arial"/>
+              </a:defRPr>
+            </a:pPr>
+            <a:r>
+              <a:t>Stable volunteer metrics within normal SLA bounds.</a:t>
+            </a:r>
+          </a:p>
+        </p:txBody>
+      </p:sp>
+      <p:sp>
+        <p:nvSpPr>
+          <p:cNvPr id="7" name="Rectangle 6"/>
+          <p:cNvSpPr/>
+          <p:nvPr/>
+        </p:nvSpPr>
+        <p:spPr>
+          <a:xfrm>
+            <a:off x="8229600" y="3383280"/>
+            <a:ext cx="3017520" cy="1097280"/>
+          </a:xfrm>
+          <a:prstGeom prst="rect">
+            <a:avLst/>
+          </a:prstGeom>
+          <a:solidFill>
+            <a:srgbClr val="111827"/>
+          </a:solidFill>
+          <a:ln w="19050">
+            <a:solidFill>
+              <a:srgbClr val="EF4444"/>
+            </a:solidFill>
+          </a:ln>
+        </p:spPr>
+        <p:style>
+          <a:lnRef idx="1">
+            <a:schemeClr val="accent1"/>
+          </a:lnRef>
+          <a:fillRef idx="3">
+            <a:schemeClr val="accent1"/>
+          </a:fillRef>
+          <a:effectRef idx="2">
+            <a:schemeClr val="accent1"/>
+          </a:effectRef>
+          <a:fontRef idx="minor">
+            <a:schemeClr val="lt1"/>
+          </a:fontRef>
+        </p:style>
+        <p:txBody>
+          <a:bodyPr rtlCol="0" anchor="ctr"/>
+          <a:lstStyle/>
+          <a:p>
+            <a:pPr algn="ctr"/>
+          </a:p>
+        </p:txBody>
+      </p:sp>
+      <p:sp>
+        <p:nvSpPr>
+          <p:cNvPr id="8" name="TextBox 7"/>
+          <p:cNvSpPr txBox="1"/>
+          <p:nvPr/>
+        </p:nvSpPr>
+        <p:spPr>
+          <a:xfrm>
+            <a:off x="8366760" y="3520440"/>
+            <a:ext cx="2743200" cy="822960"/>
+          </a:xfrm>
+          <a:prstGeom prst="rect">
+            <a:avLst/>
+          </a:prstGeom>
+          <a:noFill/>
+        </p:spPr>
+        <p:txBody>
+          <a:bodyPr wrap="square">
+            <a:spAutoFit/>
+          </a:bodyPr>
+          <a:lstStyle/>
+          <a:p>
+            <a:pPr>
+              <a:defRPr sz="1100" b="1">
+                <a:solidFill>
+                  <a:srgbClr val="EF4444"/>
+                </a:solidFill>
+                <a:latin typeface="Arial"/>
+              </a:defRPr>
+            </a:pPr>
+            <a:r>
+              <a:t>STEP 2</a:t>
+            </a:r>
+          </a:p>
+          <a:p>
+            <a:pPr>
+              <a:spcBef>
+                <a:spcPts val="800"/>
+              </a:spcBef>
+              <a:defRPr sz="2400" b="1">
                 <a:solidFill>
                   <a:srgbClr val="F3F4F6"/>
                 </a:solidFill>
@@ -4553,7 +8621,136 @@
               </a:defRPr>
             </a:pPr>
             <a:r>
-              <a:t>• Auto-Resolve Gaps: Execute system-wide personnel balancing with a single button click.</a:t>
+              <a:t>Surge Event</a:t>
+            </a:r>
+          </a:p>
+          <a:p>
+            <a:pPr>
+              <a:spcBef>
+                <a:spcPts val="800"/>
+              </a:spcBef>
+              <a:defRPr sz="1100">
+                <a:solidFill>
+                  <a:srgbClr val="9CA3AF"/>
+                </a:solidFill>
+                <a:latin typeface="Arial"/>
+              </a:defRPr>
+            </a:pPr>
+            <a:r>
+              <a:t>Adjust sliders to simulate crowd surges.</a:t>
+            </a:r>
+          </a:p>
+        </p:txBody>
+      </p:sp>
+      <p:sp>
+        <p:nvSpPr>
+          <p:cNvPr id="9" name="Rectangle 8"/>
+          <p:cNvSpPr/>
+          <p:nvPr/>
+        </p:nvSpPr>
+        <p:spPr>
+          <a:xfrm>
+            <a:off x="8229600" y="4754880"/>
+            <a:ext cx="3017520" cy="1097280"/>
+          </a:xfrm>
+          <a:prstGeom prst="rect">
+            <a:avLst/>
+          </a:prstGeom>
+          <a:solidFill>
+            <a:srgbClr val="111827"/>
+          </a:solidFill>
+          <a:ln w="19050">
+            <a:solidFill>
+              <a:srgbClr val="10B981"/>
+            </a:solidFill>
+          </a:ln>
+        </p:spPr>
+        <p:style>
+          <a:lnRef idx="1">
+            <a:schemeClr val="accent1"/>
+          </a:lnRef>
+          <a:fillRef idx="3">
+            <a:schemeClr val="accent1"/>
+          </a:fillRef>
+          <a:effectRef idx="2">
+            <a:schemeClr val="accent1"/>
+          </a:effectRef>
+          <a:fontRef idx="minor">
+            <a:schemeClr val="lt1"/>
+          </a:fontRef>
+        </p:style>
+        <p:txBody>
+          <a:bodyPr rtlCol="0" anchor="ctr"/>
+          <a:lstStyle/>
+          <a:p>
+            <a:pPr algn="ctr"/>
+          </a:p>
+        </p:txBody>
+      </p:sp>
+      <p:sp>
+        <p:nvSpPr>
+          <p:cNvPr id="10" name="TextBox 9"/>
+          <p:cNvSpPr txBox="1"/>
+          <p:nvPr/>
+        </p:nvSpPr>
+        <p:spPr>
+          <a:xfrm>
+            <a:off x="8366760" y="4892040"/>
+            <a:ext cx="2743200" cy="822960"/>
+          </a:xfrm>
+          <a:prstGeom prst="rect">
+            <a:avLst/>
+          </a:prstGeom>
+          <a:noFill/>
+        </p:spPr>
+        <p:txBody>
+          <a:bodyPr wrap="square">
+            <a:spAutoFit/>
+          </a:bodyPr>
+          <a:lstStyle/>
+          <a:p>
+            <a:pPr>
+              <a:defRPr sz="1100" b="1">
+                <a:solidFill>
+                  <a:srgbClr val="10B981"/>
+                </a:solidFill>
+                <a:latin typeface="Arial"/>
+              </a:defRPr>
+            </a:pPr>
+            <a:r>
+              <a:t>STEP 3</a:t>
+            </a:r>
+          </a:p>
+          <a:p>
+            <a:pPr>
+              <a:spcBef>
+                <a:spcPts val="800"/>
+              </a:spcBef>
+              <a:defRPr sz="2400" b="1">
+                <a:solidFill>
+                  <a:srgbClr val="F3F4F6"/>
+                </a:solidFill>
+                <a:latin typeface="Arial"/>
+              </a:defRPr>
+            </a:pPr>
+            <a:r>
+              <a:t>Optimized State</a:t>
+            </a:r>
+          </a:p>
+          <a:p>
+            <a:pPr>
+              <a:spcBef>
+                <a:spcPts val="800"/>
+              </a:spcBef>
+              <a:defRPr sz="1100">
+                <a:solidFill>
+                  <a:srgbClr val="9CA3AF"/>
+                </a:solidFill>
+                <a:latin typeface="Arial"/>
+              </a:defRPr>
+            </a:pPr>
+            <a:r>
+              <a:t>System recalculates routes to restore safety.</a:t>
             </a:r>
           </a:p>
         </p:txBody>
@@ -4592,44 +8789,8 @@
         </p:nvSpPr>
         <p:spPr>
           <a:xfrm>
-            <a:off x="685800" y="457200"/>
-            <a:ext cx="10817352" cy="914400"/>
-          </a:xfrm>
-          <a:prstGeom prst="rect">
-            <a:avLst/>
-          </a:prstGeom>
-          <a:noFill/>
-        </p:spPr>
-        <p:txBody>
-          <a:bodyPr wrap="square" lIns="0" tIns="0">
-            <a:spAutoFit/>
-          </a:bodyPr>
-          <a:lstStyle/>
-          <a:p>
-            <a:pPr>
-              <a:defRPr sz="3600" b="1">
-                <a:solidFill>
-                  <a:srgbClr val="06B6D4"/>
-                </a:solidFill>
-                <a:latin typeface="Arial"/>
-              </a:defRPr>
-            </a:pPr>
-            <a:r>
-              <a:t>Scenario Stress Sandbox</a:t>
-            </a:r>
-          </a:p>
-        </p:txBody>
-      </p:sp>
-      <p:sp>
-        <p:nvSpPr>
-          <p:cNvPr id="3" name="TextBox 2"/>
-          <p:cNvSpPr txBox="1"/>
-          <p:nvPr/>
-        </p:nvSpPr>
-        <p:spPr>
-          <a:xfrm>
-            <a:off x="685800" y="1645920"/>
-            <a:ext cx="10817352" cy="4389120"/>
+            <a:off x="685800" y="365760"/>
+            <a:ext cx="10817352" cy="365760"/>
           </a:xfrm>
           <a:prstGeom prst="rect">
             <a:avLst/>
@@ -4643,10 +8804,43 @@
           <a:lstStyle/>
           <a:p>
             <a:pPr>
-              <a:spcAft>
-                <a:spcPts val="2000"/>
-              </a:spcAft>
-              <a:defRPr sz="2000">
+              <a:defRPr sz="1000" b="1">
+                <a:solidFill>
+                  <a:srgbClr val="06B6D4"/>
+                </a:solidFill>
+                <a:latin typeface="Arial"/>
+              </a:defRPr>
+            </a:pPr>
+            <a:r>
+              <a:t>CROWD DENSITY FORECAST GRID</a:t>
+            </a:r>
+          </a:p>
+        </p:txBody>
+      </p:sp>
+      <p:sp>
+        <p:nvSpPr>
+          <p:cNvPr id="3" name="TextBox 2"/>
+          <p:cNvSpPr txBox="1"/>
+          <p:nvPr/>
+        </p:nvSpPr>
+        <p:spPr>
+          <a:xfrm>
+            <a:off x="685800" y="640080"/>
+            <a:ext cx="10817352" cy="731520"/>
+          </a:xfrm>
+          <a:prstGeom prst="rect">
+            <a:avLst/>
+          </a:prstGeom>
+          <a:noFill/>
+        </p:spPr>
+        <p:txBody>
+          <a:bodyPr wrap="square">
+            <a:spAutoFit/>
+          </a:bodyPr>
+          <a:lstStyle/>
+          <a:p>
+            <a:pPr>
+              <a:defRPr sz="2800" b="1">
                 <a:solidFill>
                   <a:srgbClr val="F3F4F6"/>
                 </a:solidFill>
@@ -4654,39 +8848,534 @@
               </a:defRPr>
             </a:pPr>
             <a:r>
-              <a:t>• Interactive Sliders: Stress-test operations by scaling crowd sizes and reducing volunteers.</a:t>
-            </a:r>
-          </a:p>
-          <a:p>
-            <a:pPr>
-              <a:spcAft>
-                <a:spcPts val="2000"/>
-              </a:spcAft>
-              <a:defRPr sz="2000">
-                <a:solidFill>
-                  <a:srgbClr val="F3F4F6"/>
-                </a:solidFill>
-                <a:latin typeface="Arial"/>
-              </a:defRPr>
-            </a:pPr>
-            <a:r>
-              <a:t>• Capacity Forecast Chart: Real-time graph of risk index and crowd trends over an 8-hour horizon.</a:t>
-            </a:r>
-          </a:p>
-          <a:p>
-            <a:pPr>
-              <a:spcAft>
-                <a:spcPts val="2000"/>
-              </a:spcAft>
-              <a:defRPr sz="2000">
-                <a:solidFill>
-                  <a:srgbClr val="F3F4F6"/>
-                </a:solidFill>
-                <a:latin typeface="Arial"/>
-              </a:defRPr>
-            </a:pPr>
-            <a:r>
-              <a:t>• Scenario Presets: Instant profiles for 'Crowd Surge', 'Heatwave Emergency', and 'Volunteer Shortage'.</a:t>
+              <a:t>Predictive Staffing Engine</a:t>
+            </a:r>
+          </a:p>
+        </p:txBody>
+      </p:sp>
+      <p:sp>
+        <p:nvSpPr>
+          <p:cNvPr id="4" name="Rectangle 3"/>
+          <p:cNvSpPr/>
+          <p:nvPr/>
+        </p:nvSpPr>
+        <p:spPr>
+          <a:xfrm>
+            <a:off x="685800" y="2377440"/>
+            <a:ext cx="2011680" cy="3200400"/>
+          </a:xfrm>
+          <a:prstGeom prst="rect">
+            <a:avLst/>
+          </a:prstGeom>
+          <a:solidFill>
+            <a:srgbClr val="111827"/>
+          </a:solidFill>
+          <a:ln w="19050">
+            <a:solidFill>
+              <a:srgbClr val="06B6D4"/>
+            </a:solidFill>
+          </a:ln>
+        </p:spPr>
+        <p:style>
+          <a:lnRef idx="1">
+            <a:schemeClr val="accent1"/>
+          </a:lnRef>
+          <a:fillRef idx="3">
+            <a:schemeClr val="accent1"/>
+          </a:fillRef>
+          <a:effectRef idx="2">
+            <a:schemeClr val="accent1"/>
+          </a:effectRef>
+          <a:fontRef idx="minor">
+            <a:schemeClr val="lt1"/>
+          </a:fontRef>
+        </p:style>
+        <p:txBody>
+          <a:bodyPr rtlCol="0" anchor="ctr" wrap="square"/>
+          <a:lstStyle/>
+          <a:p>
+            <a:pPr algn="ctr">
+              <a:defRPr sz="1600" b="1">
+                <a:solidFill>
+                  <a:srgbClr val="06B6D4"/>
+                </a:solidFill>
+                <a:latin typeface="Arial"/>
+              </a:defRPr>
+            </a:pPr>
+            <a:r>
+              <a:t>NOW</a:t>
+            </a:r>
+          </a:p>
+          <a:p>
+            <a:pPr>
+              <a:spcBef>
+                <a:spcPts val="1500"/>
+              </a:spcBef>
+              <a:defRPr sz="1100">
+                <a:solidFill>
+                  <a:srgbClr val="9CA3AF"/>
+                </a:solidFill>
+                <a:latin typeface="Arial"/>
+              </a:defRPr>
+            </a:pPr>
+            <a:r>
+              <a:t>Current grid capacity: 487 active, 4 incidents reported</a:t>
+            </a:r>
+          </a:p>
+        </p:txBody>
+      </p:sp>
+      <p:sp>
+        <p:nvSpPr>
+          <p:cNvPr id="5" name="Right Arrow 4"/>
+          <p:cNvSpPr/>
+          <p:nvPr/>
+        </p:nvSpPr>
+        <p:spPr>
+          <a:xfrm>
+            <a:off x="2697480" y="3749039"/>
+            <a:ext cx="182880" cy="365760"/>
+          </a:xfrm>
+          <a:prstGeom prst="rightArrow">
+            <a:avLst/>
+          </a:prstGeom>
+          <a:solidFill>
+            <a:srgbClr val="06B6D4"/>
+          </a:solidFill>
+          <a:ln>
+            <a:noFill/>
+          </a:ln>
+        </p:spPr>
+        <p:style>
+          <a:lnRef idx="1">
+            <a:schemeClr val="accent1"/>
+          </a:lnRef>
+          <a:fillRef idx="3">
+            <a:schemeClr val="accent1"/>
+          </a:fillRef>
+          <a:effectRef idx="2">
+            <a:schemeClr val="accent1"/>
+          </a:effectRef>
+          <a:fontRef idx="minor">
+            <a:schemeClr val="lt1"/>
+          </a:fontRef>
+        </p:style>
+        <p:txBody>
+          <a:bodyPr rtlCol="0" anchor="ctr"/>
+          <a:lstStyle/>
+          <a:p>
+            <a:pPr algn="ctr"/>
+          </a:p>
+        </p:txBody>
+      </p:sp>
+      <p:sp>
+        <p:nvSpPr>
+          <p:cNvPr id="6" name="Rectangle 5"/>
+          <p:cNvSpPr/>
+          <p:nvPr/>
+        </p:nvSpPr>
+        <p:spPr>
+          <a:xfrm>
+            <a:off x="2880360" y="2377440"/>
+            <a:ext cx="2011680" cy="3200400"/>
+          </a:xfrm>
+          <a:prstGeom prst="rect">
+            <a:avLst/>
+          </a:prstGeom>
+          <a:solidFill>
+            <a:srgbClr val="111827"/>
+          </a:solidFill>
+          <a:ln w="19050">
+            <a:solidFill>
+              <a:srgbClr val="06B6D4"/>
+            </a:solidFill>
+          </a:ln>
+        </p:spPr>
+        <p:style>
+          <a:lnRef idx="1">
+            <a:schemeClr val="accent1"/>
+          </a:lnRef>
+          <a:fillRef idx="3">
+            <a:schemeClr val="accent1"/>
+          </a:fillRef>
+          <a:effectRef idx="2">
+            <a:schemeClr val="accent1"/>
+          </a:effectRef>
+          <a:fontRef idx="minor">
+            <a:schemeClr val="lt1"/>
+          </a:fontRef>
+        </p:style>
+        <p:txBody>
+          <a:bodyPr rtlCol="0" anchor="ctr" wrap="square"/>
+          <a:lstStyle/>
+          <a:p>
+            <a:pPr algn="ctr">
+              <a:defRPr sz="1600" b="1">
+                <a:solidFill>
+                  <a:srgbClr val="06B6D4"/>
+                </a:solidFill>
+                <a:latin typeface="Arial"/>
+              </a:defRPr>
+            </a:pPr>
+            <a:r>
+              <a:t>1H FORECAST</a:t>
+            </a:r>
+          </a:p>
+          <a:p>
+            <a:pPr>
+              <a:spcBef>
+                <a:spcPts val="1500"/>
+              </a:spcBef>
+              <a:defRPr sz="1100">
+                <a:solidFill>
+                  <a:srgbClr val="9CA3AF"/>
+                </a:solidFill>
+                <a:latin typeface="Arial"/>
+              </a:defRPr>
+            </a:pPr>
+            <a:r>
+              <a:t>Sangam Ghat expected crowd +13%. Gap: -22 vols.</a:t>
+            </a:r>
+          </a:p>
+        </p:txBody>
+      </p:sp>
+      <p:sp>
+        <p:nvSpPr>
+          <p:cNvPr id="7" name="Right Arrow 6"/>
+          <p:cNvSpPr/>
+          <p:nvPr/>
+        </p:nvSpPr>
+        <p:spPr>
+          <a:xfrm>
+            <a:off x="4892040" y="3749039"/>
+            <a:ext cx="182880" cy="365760"/>
+          </a:xfrm>
+          <a:prstGeom prst="rightArrow">
+            <a:avLst/>
+          </a:prstGeom>
+          <a:solidFill>
+            <a:srgbClr val="06B6D4"/>
+          </a:solidFill>
+          <a:ln>
+            <a:noFill/>
+          </a:ln>
+        </p:spPr>
+        <p:style>
+          <a:lnRef idx="1">
+            <a:schemeClr val="accent1"/>
+          </a:lnRef>
+          <a:fillRef idx="3">
+            <a:schemeClr val="accent1"/>
+          </a:fillRef>
+          <a:effectRef idx="2">
+            <a:schemeClr val="accent1"/>
+          </a:effectRef>
+          <a:fontRef idx="minor">
+            <a:schemeClr val="lt1"/>
+          </a:fontRef>
+        </p:style>
+        <p:txBody>
+          <a:bodyPr rtlCol="0" anchor="ctr"/>
+          <a:lstStyle/>
+          <a:p>
+            <a:pPr algn="ctr"/>
+          </a:p>
+        </p:txBody>
+      </p:sp>
+      <p:sp>
+        <p:nvSpPr>
+          <p:cNvPr id="8" name="Rectangle 7"/>
+          <p:cNvSpPr/>
+          <p:nvPr/>
+        </p:nvSpPr>
+        <p:spPr>
+          <a:xfrm>
+            <a:off x="5074920" y="2377440"/>
+            <a:ext cx="2011680" cy="3200400"/>
+          </a:xfrm>
+          <a:prstGeom prst="rect">
+            <a:avLst/>
+          </a:prstGeom>
+          <a:solidFill>
+            <a:srgbClr val="111827"/>
+          </a:solidFill>
+          <a:ln w="19050">
+            <a:solidFill>
+              <a:srgbClr val="06B6D4"/>
+            </a:solidFill>
+          </a:ln>
+        </p:spPr>
+        <p:style>
+          <a:lnRef idx="1">
+            <a:schemeClr val="accent1"/>
+          </a:lnRef>
+          <a:fillRef idx="3">
+            <a:schemeClr val="accent1"/>
+          </a:fillRef>
+          <a:effectRef idx="2">
+            <a:schemeClr val="accent1"/>
+          </a:effectRef>
+          <a:fontRef idx="minor">
+            <a:schemeClr val="lt1"/>
+          </a:fontRef>
+        </p:style>
+        <p:txBody>
+          <a:bodyPr rtlCol="0" anchor="ctr" wrap="square"/>
+          <a:lstStyle/>
+          <a:p>
+            <a:pPr algn="ctr">
+              <a:defRPr sz="1600" b="1">
+                <a:solidFill>
+                  <a:srgbClr val="06B6D4"/>
+                </a:solidFill>
+                <a:latin typeface="Arial"/>
+              </a:defRPr>
+            </a:pPr>
+            <a:r>
+              <a:t>3H FORECAST</a:t>
+            </a:r>
+          </a:p>
+          <a:p>
+            <a:pPr>
+              <a:spcBef>
+                <a:spcPts val="1500"/>
+              </a:spcBef>
+              <a:defRPr sz="1100">
+                <a:solidFill>
+                  <a:srgbClr val="9CA3AF"/>
+                </a:solidFill>
+                <a:latin typeface="Arial"/>
+              </a:defRPr>
+            </a:pPr>
+            <a:r>
+              <a:t>Triveni Point reaches Critical density. Gap: -18 vols.</a:t>
+            </a:r>
+          </a:p>
+        </p:txBody>
+      </p:sp>
+      <p:sp>
+        <p:nvSpPr>
+          <p:cNvPr id="9" name="Right Arrow 8"/>
+          <p:cNvSpPr/>
+          <p:nvPr/>
+        </p:nvSpPr>
+        <p:spPr>
+          <a:xfrm>
+            <a:off x="7086600" y="3749039"/>
+            <a:ext cx="182880" cy="365760"/>
+          </a:xfrm>
+          <a:prstGeom prst="rightArrow">
+            <a:avLst/>
+          </a:prstGeom>
+          <a:solidFill>
+            <a:srgbClr val="06B6D4"/>
+          </a:solidFill>
+          <a:ln>
+            <a:noFill/>
+          </a:ln>
+        </p:spPr>
+        <p:style>
+          <a:lnRef idx="1">
+            <a:schemeClr val="accent1"/>
+          </a:lnRef>
+          <a:fillRef idx="3">
+            <a:schemeClr val="accent1"/>
+          </a:fillRef>
+          <a:effectRef idx="2">
+            <a:schemeClr val="accent1"/>
+          </a:effectRef>
+          <a:fontRef idx="minor">
+            <a:schemeClr val="lt1"/>
+          </a:fontRef>
+        </p:style>
+        <p:txBody>
+          <a:bodyPr rtlCol="0" anchor="ctr"/>
+          <a:lstStyle/>
+          <a:p>
+            <a:pPr algn="ctr"/>
+          </a:p>
+        </p:txBody>
+      </p:sp>
+      <p:sp>
+        <p:nvSpPr>
+          <p:cNvPr id="10" name="Rectangle 9"/>
+          <p:cNvSpPr/>
+          <p:nvPr/>
+        </p:nvSpPr>
+        <p:spPr>
+          <a:xfrm>
+            <a:off x="7269479" y="2377440"/>
+            <a:ext cx="2011680" cy="3200400"/>
+          </a:xfrm>
+          <a:prstGeom prst="rect">
+            <a:avLst/>
+          </a:prstGeom>
+          <a:solidFill>
+            <a:srgbClr val="111827"/>
+          </a:solidFill>
+          <a:ln w="19050">
+            <a:solidFill>
+              <a:srgbClr val="EF4444"/>
+            </a:solidFill>
+          </a:ln>
+        </p:spPr>
+        <p:style>
+          <a:lnRef idx="1">
+            <a:schemeClr val="accent1"/>
+          </a:lnRef>
+          <a:fillRef idx="3">
+            <a:schemeClr val="accent1"/>
+          </a:fillRef>
+          <a:effectRef idx="2">
+            <a:schemeClr val="accent1"/>
+          </a:effectRef>
+          <a:fontRef idx="minor">
+            <a:schemeClr val="lt1"/>
+          </a:fontRef>
+        </p:style>
+        <p:txBody>
+          <a:bodyPr rtlCol="0" anchor="ctr" wrap="square"/>
+          <a:lstStyle/>
+          <a:p>
+            <a:pPr algn="ctr">
+              <a:defRPr sz="1600" b="1">
+                <a:solidFill>
+                  <a:srgbClr val="EF4444"/>
+                </a:solidFill>
+                <a:latin typeface="Arial"/>
+              </a:defRPr>
+            </a:pPr>
+            <a:r>
+              <a:t>6H FORECAST</a:t>
+            </a:r>
+          </a:p>
+          <a:p>
+            <a:pPr>
+              <a:spcBef>
+                <a:spcPts val="1500"/>
+              </a:spcBef>
+              <a:defRPr sz="1100">
+                <a:solidFill>
+                  <a:srgbClr val="9CA3AF"/>
+                </a:solidFill>
+                <a:latin typeface="Arial"/>
+              </a:defRPr>
+            </a:pPr>
+            <a:r>
+              <a:t>Peak gap projected: -58 volunteers in S-01 sector.</a:t>
+            </a:r>
+          </a:p>
+        </p:txBody>
+      </p:sp>
+      <p:sp>
+        <p:nvSpPr>
+          <p:cNvPr id="11" name="Right Arrow 10"/>
+          <p:cNvSpPr/>
+          <p:nvPr/>
+        </p:nvSpPr>
+        <p:spPr>
+          <a:xfrm>
+            <a:off x="9281159" y="3749039"/>
+            <a:ext cx="182880" cy="365760"/>
+          </a:xfrm>
+          <a:prstGeom prst="rightArrow">
+            <a:avLst/>
+          </a:prstGeom>
+          <a:solidFill>
+            <a:srgbClr val="06B6D4"/>
+          </a:solidFill>
+          <a:ln>
+            <a:noFill/>
+          </a:ln>
+        </p:spPr>
+        <p:style>
+          <a:lnRef idx="1">
+            <a:schemeClr val="accent1"/>
+          </a:lnRef>
+          <a:fillRef idx="3">
+            <a:schemeClr val="accent1"/>
+          </a:fillRef>
+          <a:effectRef idx="2">
+            <a:schemeClr val="accent1"/>
+          </a:effectRef>
+          <a:fontRef idx="minor">
+            <a:schemeClr val="lt1"/>
+          </a:fontRef>
+        </p:style>
+        <p:txBody>
+          <a:bodyPr rtlCol="0" anchor="ctr"/>
+          <a:lstStyle/>
+          <a:p>
+            <a:pPr algn="ctr"/>
+          </a:p>
+        </p:txBody>
+      </p:sp>
+      <p:sp>
+        <p:nvSpPr>
+          <p:cNvPr id="12" name="Rectangle 11"/>
+          <p:cNvSpPr/>
+          <p:nvPr/>
+        </p:nvSpPr>
+        <p:spPr>
+          <a:xfrm>
+            <a:off x="9464040" y="2377440"/>
+            <a:ext cx="2011680" cy="3200400"/>
+          </a:xfrm>
+          <a:prstGeom prst="rect">
+            <a:avLst/>
+          </a:prstGeom>
+          <a:solidFill>
+            <a:srgbClr val="111827"/>
+          </a:solidFill>
+          <a:ln w="19050">
+            <a:solidFill>
+              <a:srgbClr val="06B6D4"/>
+            </a:solidFill>
+          </a:ln>
+        </p:spPr>
+        <p:style>
+          <a:lnRef idx="1">
+            <a:schemeClr val="accent1"/>
+          </a:lnRef>
+          <a:fillRef idx="3">
+            <a:schemeClr val="accent1"/>
+          </a:fillRef>
+          <a:effectRef idx="2">
+            <a:schemeClr val="accent1"/>
+          </a:effectRef>
+          <a:fontRef idx="minor">
+            <a:schemeClr val="lt1"/>
+          </a:fontRef>
+        </p:style>
+        <p:txBody>
+          <a:bodyPr rtlCol="0" anchor="ctr" wrap="square"/>
+          <a:lstStyle/>
+          <a:p>
+            <a:pPr algn="ctr">
+              <a:defRPr sz="1600" b="1">
+                <a:solidFill>
+                  <a:srgbClr val="06B6D4"/>
+                </a:solidFill>
+                <a:latin typeface="Arial"/>
+              </a:defRPr>
+            </a:pPr>
+            <a:r>
+              <a:t>12H FORECAST</a:t>
+            </a:r>
+          </a:p>
+          <a:p>
+            <a:pPr>
+              <a:spcBef>
+                <a:spcPts val="1500"/>
+              </a:spcBef>
+              <a:defRPr sz="1100">
+                <a:solidFill>
+                  <a:srgbClr val="9CA3AF"/>
+                </a:solidFill>
+                <a:latin typeface="Arial"/>
+              </a:defRPr>
+            </a:pPr>
+            <a:r>
+              <a:t>Inflow rates decline; standard monitoring resumes.</a:t>
             </a:r>
           </a:p>
         </p:txBody>
@@ -4725,44 +9414,8 @@
         </p:nvSpPr>
         <p:spPr>
           <a:xfrm>
-            <a:off x="685800" y="457200"/>
-            <a:ext cx="10817352" cy="914400"/>
-          </a:xfrm>
-          <a:prstGeom prst="rect">
-            <a:avLst/>
-          </a:prstGeom>
-          <a:noFill/>
-        </p:spPr>
-        <p:txBody>
-          <a:bodyPr wrap="square" lIns="0" tIns="0">
-            <a:spAutoFit/>
-          </a:bodyPr>
-          <a:lstStyle/>
-          <a:p>
-            <a:pPr>
-              <a:defRPr sz="3600" b="1">
-                <a:solidFill>
-                  <a:srgbClr val="06B6D4"/>
-                </a:solidFill>
-                <a:latin typeface="Arial"/>
-              </a:defRPr>
-            </a:pPr>
-            <a:r>
-              <a:t>60-Second Incident Response Flow</a:t>
-            </a:r>
-          </a:p>
-        </p:txBody>
-      </p:sp>
-      <p:sp>
-        <p:nvSpPr>
-          <p:cNvPr id="3" name="TextBox 2"/>
-          <p:cNvSpPr txBox="1"/>
-          <p:nvPr/>
-        </p:nvSpPr>
-        <p:spPr>
-          <a:xfrm>
-            <a:off x="685800" y="1645920"/>
-            <a:ext cx="10817352" cy="4389120"/>
+            <a:off x="685800" y="365760"/>
+            <a:ext cx="10817352" cy="365760"/>
           </a:xfrm>
           <a:prstGeom prst="rect">
             <a:avLst/>
@@ -4776,10 +9429,227 @@
           <a:lstStyle/>
           <a:p>
             <a:pPr>
-              <a:spcAft>
+              <a:defRPr sz="1000" b="1">
+                <a:solidFill>
+                  <a:srgbClr val="06B6D4"/>
+                </a:solidFill>
+                <a:latin typeface="Arial"/>
+              </a:defRPr>
+            </a:pPr>
+            <a:r>
+              <a:t>CONVERSATIONAL CLI &amp; CLICKABLE EXECUTIONS</a:t>
+            </a:r>
+          </a:p>
+        </p:txBody>
+      </p:sp>
+      <p:sp>
+        <p:nvSpPr>
+          <p:cNvPr id="3" name="TextBox 2"/>
+          <p:cNvSpPr txBox="1"/>
+          <p:nvPr/>
+        </p:nvSpPr>
+        <p:spPr>
+          <a:xfrm>
+            <a:off x="685800" y="640080"/>
+            <a:ext cx="10817352" cy="731520"/>
+          </a:xfrm>
+          <a:prstGeom prst="rect">
+            <a:avLst/>
+          </a:prstGeom>
+          <a:noFill/>
+        </p:spPr>
+        <p:txBody>
+          <a:bodyPr wrap="square">
+            <a:spAutoFit/>
+          </a:bodyPr>
+          <a:lstStyle/>
+          <a:p>
+            <a:pPr>
+              <a:defRPr sz="2800" b="1">
+                <a:solidFill>
+                  <a:srgbClr val="F3F4F6"/>
+                </a:solidFill>
+                <a:latin typeface="Arial"/>
+              </a:defRPr>
+            </a:pPr>
+            <a:r>
+              <a:t>AI Operations Copilot Interface</a:t>
+            </a:r>
+          </a:p>
+        </p:txBody>
+      </p:sp>
+      <p:sp>
+        <p:nvSpPr>
+          <p:cNvPr id="4" name="Rounded Rectangle 3"/>
+          <p:cNvSpPr/>
+          <p:nvPr/>
+        </p:nvSpPr>
+        <p:spPr>
+          <a:xfrm>
+            <a:off x="914400" y="2011680"/>
+            <a:ext cx="6858000" cy="3840480"/>
+          </a:xfrm>
+          <a:prstGeom prst="roundRect">
+            <a:avLst/>
+          </a:prstGeom>
+          <a:solidFill>
+            <a:srgbClr val="111827"/>
+          </a:solidFill>
+          <a:ln w="19050">
+            <a:solidFill>
+              <a:srgbClr val="06B6D4"/>
+            </a:solidFill>
+          </a:ln>
+        </p:spPr>
+        <p:style>
+          <a:lnRef idx="1">
+            <a:schemeClr val="accent1"/>
+          </a:lnRef>
+          <a:fillRef idx="3">
+            <a:schemeClr val="accent1"/>
+          </a:fillRef>
+          <a:effectRef idx="2">
+            <a:schemeClr val="accent1"/>
+          </a:effectRef>
+          <a:fontRef idx="minor">
+            <a:schemeClr val="lt1"/>
+          </a:fontRef>
+        </p:style>
+        <p:txBody>
+          <a:bodyPr rtlCol="0" anchor="ctr" wrap="square"/>
+          <a:lstStyle/>
+          <a:p>
+            <a:pPr algn="ctr">
+              <a:defRPr sz="1300" b="1">
+                <a:solidFill>
+                  <a:srgbClr val="F3F4F6"/>
+                </a:solidFill>
+                <a:latin typeface="Arial"/>
+              </a:defRPr>
+            </a:pPr>
+            <a:r>
+              <a:t>USER: "How is the crowd density at Sangam Ghat S-01, and how do we resolve the current staff gap?"</a:t>
+            </a:r>
+          </a:p>
+          <a:p>
+            <a:pPr>
+              <a:spcBef>
                 <a:spcPts val="2000"/>
-              </a:spcAft>
-              <a:defRPr sz="2000">
+              </a:spcBef>
+              <a:defRPr sz="1300">
+                <a:solidFill>
+                  <a:srgbClr val="10B981"/>
+                </a:solidFill>
+                <a:latin typeface="Arial"/>
+              </a:defRPr>
+            </a:pPr>
+            <a:r>
+              <a:t>COPILOT: "S-01 Sangam Ghat is projected to experience a density surge of +13% in 60 minutes. Recommended action: Redeploy 12 volunteers from S-03 Ram Ghat. Confidence: 95%."</a:t>
+            </a:r>
+          </a:p>
+          <a:p>
+            <a:pPr>
+              <a:spcBef>
+                <a:spcPts val="3000"/>
+              </a:spcBef>
+              <a:defRPr sz="1100" b="1">
+                <a:solidFill>
+                  <a:srgbClr val="06B6D4"/>
+                </a:solidFill>
+                <a:latin typeface="Arial"/>
+              </a:defRPr>
+            </a:pPr>
+            <a:r>
+              <a:t>[ BUTTON: EXECUTE VOLUNTEER DISPATCH REALLOCATION ]</a:t>
+            </a:r>
+          </a:p>
+        </p:txBody>
+      </p:sp>
+      <p:sp>
+        <p:nvSpPr>
+          <p:cNvPr id="5" name="Rectangle 4"/>
+          <p:cNvSpPr/>
+          <p:nvPr/>
+        </p:nvSpPr>
+        <p:spPr>
+          <a:xfrm>
+            <a:off x="8229600" y="2011680"/>
+            <a:ext cx="3017520" cy="1645920"/>
+          </a:xfrm>
+          <a:prstGeom prst="rect">
+            <a:avLst/>
+          </a:prstGeom>
+          <a:solidFill>
+            <a:srgbClr val="111827"/>
+          </a:solidFill>
+          <a:ln w="19050">
+            <a:solidFill>
+              <a:srgbClr val="06B6D4"/>
+            </a:solidFill>
+          </a:ln>
+        </p:spPr>
+        <p:style>
+          <a:lnRef idx="1">
+            <a:schemeClr val="accent1"/>
+          </a:lnRef>
+          <a:fillRef idx="3">
+            <a:schemeClr val="accent1"/>
+          </a:fillRef>
+          <a:effectRef idx="2">
+            <a:schemeClr val="accent1"/>
+          </a:effectRef>
+          <a:fontRef idx="minor">
+            <a:schemeClr val="lt1"/>
+          </a:fontRef>
+        </p:style>
+        <p:txBody>
+          <a:bodyPr rtlCol="0" anchor="ctr"/>
+          <a:lstStyle/>
+          <a:p>
+            <a:pPr algn="ctr"/>
+          </a:p>
+        </p:txBody>
+      </p:sp>
+      <p:sp>
+        <p:nvSpPr>
+          <p:cNvPr id="6" name="TextBox 5"/>
+          <p:cNvSpPr txBox="1"/>
+          <p:nvPr/>
+        </p:nvSpPr>
+        <p:spPr>
+          <a:xfrm>
+            <a:off x="8366760" y="2148840"/>
+            <a:ext cx="2743200" cy="1371600"/>
+          </a:xfrm>
+          <a:prstGeom prst="rect">
+            <a:avLst/>
+          </a:prstGeom>
+          <a:noFill/>
+        </p:spPr>
+        <p:txBody>
+          <a:bodyPr wrap="square">
+            <a:spAutoFit/>
+          </a:bodyPr>
+          <a:lstStyle/>
+          <a:p>
+            <a:pPr>
+              <a:defRPr sz="1100" b="1">
+                <a:solidFill>
+                  <a:srgbClr val="06B6D4"/>
+                </a:solidFill>
+                <a:latin typeface="Arial"/>
+              </a:defRPr>
+            </a:pPr>
+            <a:r>
+              <a:t>CORE FEATURE</a:t>
+            </a:r>
+          </a:p>
+          <a:p>
+            <a:pPr>
+              <a:spcBef>
+                <a:spcPts val="800"/>
+              </a:spcBef>
+              <a:defRPr sz="2400" b="1">
                 <a:solidFill>
                   <a:srgbClr val="F3F4F6"/>
                 </a:solidFill>
@@ -4787,15 +9657,112 @@
               </a:defRPr>
             </a:pPr>
             <a:r>
-              <a:t>• 1. Detection: Medical emergency ticket logged at S-02 (Triveni Point) with Critical severity.</a:t>
-            </a:r>
-          </a:p>
-          <a:p>
-            <a:pPr>
-              <a:spcAft>
-                <a:spcPts val="2000"/>
-              </a:spcAft>
-              <a:defRPr sz="2000">
+              <a:t>SLA Analytics</a:t>
+            </a:r>
+          </a:p>
+          <a:p>
+            <a:pPr>
+              <a:spcBef>
+                <a:spcPts val="800"/>
+              </a:spcBef>
+              <a:defRPr sz="1100">
+                <a:solidFill>
+                  <a:srgbClr val="9CA3AF"/>
+                </a:solidFill>
+                <a:latin typeface="Arial"/>
+              </a:defRPr>
+            </a:pPr>
+            <a:r>
+              <a:t>Every query returns Confidence Scores, SLA impact ratings, and data citations.</a:t>
+            </a:r>
+          </a:p>
+        </p:txBody>
+      </p:sp>
+      <p:sp>
+        <p:nvSpPr>
+          <p:cNvPr id="7" name="Rectangle 6"/>
+          <p:cNvSpPr/>
+          <p:nvPr/>
+        </p:nvSpPr>
+        <p:spPr>
+          <a:xfrm>
+            <a:off x="8229600" y="4206240"/>
+            <a:ext cx="3017520" cy="1645920"/>
+          </a:xfrm>
+          <a:prstGeom prst="rect">
+            <a:avLst/>
+          </a:prstGeom>
+          <a:solidFill>
+            <a:srgbClr val="111827"/>
+          </a:solidFill>
+          <a:ln w="19050">
+            <a:solidFill>
+              <a:srgbClr val="10B981"/>
+            </a:solidFill>
+          </a:ln>
+        </p:spPr>
+        <p:style>
+          <a:lnRef idx="1">
+            <a:schemeClr val="accent1"/>
+          </a:lnRef>
+          <a:fillRef idx="3">
+            <a:schemeClr val="accent1"/>
+          </a:fillRef>
+          <a:effectRef idx="2">
+            <a:schemeClr val="accent1"/>
+          </a:effectRef>
+          <a:fontRef idx="minor">
+            <a:schemeClr val="lt1"/>
+          </a:fontRef>
+        </p:style>
+        <p:txBody>
+          <a:bodyPr rtlCol="0" anchor="ctr"/>
+          <a:lstStyle/>
+          <a:p>
+            <a:pPr algn="ctr"/>
+          </a:p>
+        </p:txBody>
+      </p:sp>
+      <p:sp>
+        <p:nvSpPr>
+          <p:cNvPr id="8" name="TextBox 7"/>
+          <p:cNvSpPr txBox="1"/>
+          <p:nvPr/>
+        </p:nvSpPr>
+        <p:spPr>
+          <a:xfrm>
+            <a:off x="8366760" y="4343400"/>
+            <a:ext cx="2743200" cy="1371600"/>
+          </a:xfrm>
+          <a:prstGeom prst="rect">
+            <a:avLst/>
+          </a:prstGeom>
+          <a:noFill/>
+        </p:spPr>
+        <p:txBody>
+          <a:bodyPr wrap="square">
+            <a:spAutoFit/>
+          </a:bodyPr>
+          <a:lstStyle/>
+          <a:p>
+            <a:pPr>
+              <a:defRPr sz="1100" b="1">
+                <a:solidFill>
+                  <a:srgbClr val="10B981"/>
+                </a:solidFill>
+                <a:latin typeface="Arial"/>
+              </a:defRPr>
+            </a:pPr>
+            <a:r>
+              <a:t>CONTROL LOGIC</a:t>
+            </a:r>
+          </a:p>
+          <a:p>
+            <a:pPr>
+              <a:spcBef>
+                <a:spcPts val="800"/>
+              </a:spcBef>
+              <a:defRPr sz="2400" b="1">
                 <a:solidFill>
                   <a:srgbClr val="F3F4F6"/>
                 </a:solidFill>
@@ -4803,55 +9770,23 @@
               </a:defRPr>
             </a:pPr>
             <a:r>
-              <a:t>• 2. Profile Search: Solver scans nearby low-fatigue, first-aid certified volunteers.</a:t>
-            </a:r>
-          </a:p>
-          <a:p>
-            <a:pPr>
-              <a:spcAft>
-                <a:spcPts val="2000"/>
-              </a:spcAft>
-              <a:defRPr sz="2000">
-                <a:solidFill>
-                  <a:srgbClr val="F3F4F6"/>
-                </a:solidFill>
-                <a:latin typeface="Arial"/>
-              </a:defRPr>
-            </a:pPr>
-            <a:r>
-              <a:t>• 3. Candidate Proposal: Rohit Kumar (0.4 km away) recommended with 95% confidence score.</a:t>
-            </a:r>
-          </a:p>
-          <a:p>
-            <a:pPr>
-              <a:spcAft>
-                <a:spcPts val="2000"/>
-              </a:spcAft>
-              <a:defRPr sz="2000">
-                <a:solidFill>
-                  <a:srgbClr val="F3F4F6"/>
-                </a:solidFill>
-                <a:latin typeface="Arial"/>
-              </a:defRPr>
-            </a:pPr>
-            <a:r>
-              <a:t>• 4. Dispatch Authorization: Dispatcher executes rebalancing command via one-click CTA.</a:t>
-            </a:r>
-          </a:p>
-          <a:p>
-            <a:pPr>
-              <a:spcAft>
-                <a:spcPts val="2000"/>
-              </a:spcAft>
-              <a:defRPr sz="2000">
-                <a:solidFill>
-                  <a:srgbClr val="F3F4F6"/>
-                </a:solidFill>
-                <a:latin typeface="Arial"/>
-              </a:defRPr>
-            </a:pPr>
-            <a:r>
-              <a:t>• 5. Resolution: Volunteer arrives within 3.8 minutes, beating standard SLA targets.</a:t>
+              <a:t>Clickable CTAs</a:t>
+            </a:r>
+          </a:p>
+          <a:p>
+            <a:pPr>
+              <a:spcBef>
+                <a:spcPts val="800"/>
+              </a:spcBef>
+              <a:defRPr sz="1100">
+                <a:solidFill>
+                  <a:srgbClr val="9CA3AF"/>
+                </a:solidFill>
+                <a:latin typeface="Arial"/>
+              </a:defRPr>
+            </a:pPr>
+            <a:r>
+              <a:t>Operations chatbot triggers dispatches, redirects pages, or runs stress simulations.</a:t>
             </a:r>
           </a:p>
         </p:txBody>
